--- a/pitch/BioPulse_Pitch_App_Actual.pptx
+++ b/pitch/BioPulse_Pitch_App_Actual.pptx
@@ -3113,7 +3113,7 @@
             <a:avLst/>
           </a:prstGeom>
           <a:solidFill>
-            <a:srgbClr val="050A10"/>
+            <a:srgbClr val="0D1B2A"/>
           </a:solidFill>
           <a:ln>
             <a:noFill/>
@@ -3142,48 +3142,24 @@
           </a:p>
         </p:txBody>
       </p:sp>
-      <p:pic>
-        <p:nvPicPr>
-          <p:cNvPr id="3" name="Picture 2" descr="bp_hero_bg.png"/>
-          <p:cNvPicPr>
-            <a:picLocks noChangeAspect="1"/>
-          </p:cNvPicPr>
-          <p:nvPr/>
-        </p:nvPicPr>
-        <p:blipFill>
-          <a:blip r:embed="rId2"/>
-          <a:stretch>
-            <a:fillRect/>
-          </a:stretch>
-        </p:blipFill>
-        <p:spPr>
-          <a:xfrm>
-            <a:off x="0" y="0"/>
-            <a:ext cx="12191695" cy="6858000"/>
-          </a:xfrm>
-          <a:prstGeom prst="rect">
-            <a:avLst/>
-          </a:prstGeom>
-        </p:spPr>
-      </p:pic>
-      <p:sp>
-        <p:nvSpPr>
-          <p:cNvPr id="4" name="Rectangle 3"/>
+      <p:sp>
+        <p:nvSpPr>
+          <p:cNvPr id="3" name="Rounded Rectangle 2"/>
           <p:cNvSpPr/>
           <p:nvPr/>
         </p:nvSpPr>
         <p:spPr>
           <a:xfrm>
-            <a:off x="0" y="0"/>
-            <a:ext cx="12191695" cy="6858000"/>
-          </a:xfrm>
-          <a:prstGeom prst="rect">
-            <a:avLst/>
+            <a:off x="640080" y="777240"/>
+            <a:ext cx="566928" cy="566928"/>
+          </a:xfrm>
+          <a:prstGeom prst="roundRect">
+            <a:avLst>
+              <a:gd name="adj" fmla="val 25000"/>
+            </a:avLst>
           </a:prstGeom>
           <a:solidFill>
-            <a:srgbClr val="050A10">
-              <a:alpha val="52000"/>
-            </a:srgbClr>
+            <a:srgbClr val="4FD8C4"/>
           </a:solidFill>
           <a:ln>
             <a:noFill/>
@@ -3214,47 +3190,69 @@
       </p:sp>
       <p:sp>
         <p:nvSpPr>
-          <p:cNvPr id="5" name="Rounded Rectangle 4"/>
-          <p:cNvSpPr/>
-          <p:nvPr/>
-        </p:nvSpPr>
-        <p:spPr>
-          <a:xfrm>
-            <a:off x="914400" y="868680"/>
+          <p:cNvPr id="4" name="TextBox 3"/>
+          <p:cNvSpPr txBox="1"/>
+          <p:nvPr/>
+        </p:nvSpPr>
+        <p:spPr>
+          <a:xfrm>
+            <a:off x="640080" y="777240"/>
             <a:ext cx="566928" cy="566928"/>
           </a:xfrm>
-          <a:prstGeom prst="roundRect">
-            <a:avLst>
-              <a:gd name="adj" fmla="val 25000"/>
-            </a:avLst>
-          </a:prstGeom>
-          <a:solidFill>
-            <a:srgbClr val="00C8B4"/>
-          </a:solidFill>
-          <a:ln>
-            <a:noFill/>
-          </a:ln>
-          <a:effectLst/>
-        </p:spPr>
-        <p:style>
-          <a:lnRef idx="1">
-            <a:schemeClr val="accent1"/>
-          </a:lnRef>
-          <a:fillRef idx="3">
-            <a:schemeClr val="accent1"/>
-          </a:fillRef>
-          <a:effectRef idx="2">
-            <a:schemeClr val="accent1"/>
-          </a:effectRef>
-          <a:fontRef idx="minor">
-            <a:schemeClr val="lt1"/>
-          </a:fontRef>
-        </p:style>
-        <p:txBody>
-          <a:bodyPr rtlCol="0" anchor="ctr"/>
-          <a:lstStyle/>
-          <a:p>
-            <a:pPr algn="ctr"/>
+          <a:prstGeom prst="rect">
+            <a:avLst/>
+          </a:prstGeom>
+          <a:noFill/>
+        </p:spPr>
+        <p:txBody>
+          <a:bodyPr wrap="square" anchor="ctr" lIns="0" rIns="0" tIns="0" bIns="0">
+            <a:spAutoFit/>
+          </a:bodyPr>
+          <a:lstStyle/>
+          <a:p>
+            <a:r>
+              <a:rPr sz="2200" b="1">
+                <a:solidFill>
+                  <a:srgbClr val="0D1B2A"/>
+                </a:solidFill>
+                <a:latin typeface="Arial"/>
+              </a:rPr>
+              <a:t>B</a:t>
+            </a:r>
+          </a:p>
+        </p:txBody>
+      </p:sp>
+      <p:sp>
+        <p:nvSpPr>
+          <p:cNvPr id="5" name="TextBox 4"/>
+          <p:cNvSpPr txBox="1"/>
+          <p:nvPr/>
+        </p:nvSpPr>
+        <p:spPr>
+          <a:xfrm>
+            <a:off x="640080" y="2331720"/>
+            <a:ext cx="10515600" cy="1371600"/>
+          </a:xfrm>
+          <a:prstGeom prst="rect">
+            <a:avLst/>
+          </a:prstGeom>
+          <a:noFill/>
+        </p:spPr>
+        <p:txBody>
+          <a:bodyPr wrap="square" anchor="t" lIns="0" rIns="0" tIns="0" bIns="0">
+            <a:spAutoFit/>
+          </a:bodyPr>
+          <a:lstStyle/>
+          <a:p>
+            <a:r>
+              <a:rPr sz="6600" b="1">
+                <a:solidFill>
+                  <a:srgbClr val="EAF2F5"/>
+                </a:solidFill>
+                <a:latin typeface="Arial"/>
+              </a:rPr>
+              <a:t>BioPulse</a:t>
+            </a:r>
           </a:p>
         </p:txBody>
       </p:sp>
@@ -3266,75 +3264,7 @@
         </p:nvSpPr>
         <p:spPr>
           <a:xfrm>
-            <a:off x="914400" y="868680"/>
-            <a:ext cx="566928" cy="566928"/>
-          </a:xfrm>
-          <a:prstGeom prst="rect">
-            <a:avLst/>
-          </a:prstGeom>
-          <a:noFill/>
-        </p:spPr>
-        <p:txBody>
-          <a:bodyPr wrap="square" anchor="ctr" lIns="0" rIns="0" tIns="0" bIns="0">
-            <a:spAutoFit/>
-          </a:bodyPr>
-          <a:lstStyle/>
-          <a:p>
-            <a:r>
-              <a:rPr sz="2200" b="1">
-                <a:solidFill>
-                  <a:srgbClr val="050A10"/>
-                </a:solidFill>
-                <a:latin typeface="Arial"/>
-              </a:rPr>
-              <a:t>B</a:t>
-            </a:r>
-          </a:p>
-        </p:txBody>
-      </p:sp>
-      <p:sp>
-        <p:nvSpPr>
-          <p:cNvPr id="7" name="TextBox 6"/>
-          <p:cNvSpPr txBox="1"/>
-          <p:nvPr/>
-        </p:nvSpPr>
-        <p:spPr>
-          <a:xfrm>
-            <a:off x="914400" y="2468880"/>
-            <a:ext cx="10515600" cy="1371600"/>
-          </a:xfrm>
-          <a:prstGeom prst="rect">
-            <a:avLst/>
-          </a:prstGeom>
-          <a:noFill/>
-        </p:spPr>
-        <p:txBody>
-          <a:bodyPr wrap="square" anchor="t" lIns="0" rIns="0" tIns="0" bIns="0">
-            <a:spAutoFit/>
-          </a:bodyPr>
-          <a:lstStyle/>
-          <a:p>
-            <a:r>
-              <a:rPr sz="6600" b="1">
-                <a:solidFill>
-                  <a:srgbClr val="F2F6F8"/>
-                </a:solidFill>
-                <a:latin typeface="Arial"/>
-              </a:rPr>
-              <a:t>BioPulse</a:t>
-            </a:r>
-          </a:p>
-        </p:txBody>
-      </p:sp>
-      <p:sp>
-        <p:nvSpPr>
-          <p:cNvPr id="8" name="TextBox 7"/>
-          <p:cNvSpPr txBox="1"/>
-          <p:nvPr/>
-        </p:nvSpPr>
-        <p:spPr>
-          <a:xfrm>
-            <a:off x="932688" y="3566160"/>
+            <a:off x="658368" y="3429000"/>
             <a:ext cx="10058400" cy="914400"/>
           </a:xfrm>
           <a:prstGeom prst="rect">
@@ -3356,25 +3286,25 @@
             <a:r>
               <a:rPr sz="2200" b="0">
                 <a:solidFill>
-                  <a:srgbClr val="93A8BC"/>
-                </a:solidFill>
-                <a:latin typeface="Arial"/>
-              </a:rPr>
-              <a:t>Tu wearable ya sabe que algo va mal.
-Nosotros te lo decimos — y qué hacer.</a:t>
-            </a:r>
-          </a:p>
-        </p:txBody>
-      </p:sp>
-      <p:sp>
-        <p:nvSpPr>
-          <p:cNvPr id="9" name="TextBox 8"/>
-          <p:cNvSpPr txBox="1"/>
-          <p:nvPr/>
-        </p:nvSpPr>
-        <p:spPr>
-          <a:xfrm>
-            <a:off x="932688" y="5212080"/>
+                  <a:srgbClr val="8AA0B2"/>
+                </a:solidFill>
+                <a:latin typeface="Arial"/>
+              </a:rPr>
+              <a:t>Tus wearables recogen 100.000 datos al día. Ninguno te salva la vida.
+Convertimos los datos de tu reloj en una alerta temprana que dice qué pasa y qué hacer — antes.</a:t>
+            </a:r>
+          </a:p>
+        </p:txBody>
+      </p:sp>
+      <p:sp>
+        <p:nvSpPr>
+          <p:cNvPr id="7" name="TextBox 6"/>
+          <p:cNvSpPr txBox="1"/>
+          <p:nvPr/>
+        </p:nvSpPr>
+        <p:spPr>
+          <a:xfrm>
+            <a:off x="658368" y="5212080"/>
             <a:ext cx="10058400" cy="365760"/>
           </a:xfrm>
           <a:prstGeom prst="rect">
@@ -3391,7 +3321,7 @@
             <a:r>
               <a:rPr sz="1200" b="1">
                 <a:solidFill>
-                  <a:srgbClr val="00C8B4"/>
+                  <a:srgbClr val="4FD8C4"/>
                 </a:solidFill>
                 <a:latin typeface="Arial"/>
               </a:rPr>
@@ -3402,13 +3332,13 @@
       </p:sp>
       <p:sp>
         <p:nvSpPr>
-          <p:cNvPr id="10" name="TextBox 9"/>
-          <p:cNvSpPr txBox="1"/>
-          <p:nvPr/>
-        </p:nvSpPr>
-        <p:spPr>
-          <a:xfrm>
-            <a:off x="932688" y="5989320"/>
+          <p:cNvPr id="8" name="TextBox 7"/>
+          <p:cNvSpPr txBox="1"/>
+          <p:nvPr/>
+        </p:nvSpPr>
+        <p:spPr>
+          <a:xfrm>
+            <a:off x="658368" y="5989320"/>
             <a:ext cx="10058400" cy="365760"/>
           </a:xfrm>
           <a:prstGeom prst="rect">
@@ -3425,7 +3355,7 @@
             <a:r>
               <a:rPr sz="1100" b="0">
                 <a:solidFill>
-                  <a:srgbClr val="5A7288"/>
+                  <a:srgbClr val="8AA0B2"/>
                 </a:solidFill>
                 <a:latin typeface="Arial"/>
               </a:rPr>
@@ -3467,7 +3397,7 @@
             <a:avLst/>
           </a:prstGeom>
           <a:solidFill>
-            <a:srgbClr val="050A10"/>
+            <a:srgbClr val="0D1B2A"/>
           </a:solidFill>
           <a:ln>
             <a:noFill/>
@@ -3504,8 +3434,8 @@
         </p:nvSpPr>
         <p:spPr>
           <a:xfrm>
-            <a:off x="914400" y="685800"/>
-            <a:ext cx="8229600" cy="365760"/>
+            <a:off x="640080" y="457200"/>
+            <a:ext cx="10881360" cy="274320"/>
           </a:xfrm>
           <a:prstGeom prst="rect">
             <a:avLst/>
@@ -3521,7 +3451,7 @@
             <a:r>
               <a:rPr sz="1200" b="1">
                 <a:solidFill>
-                  <a:srgbClr val="00C8B4"/>
+                  <a:srgbClr val="4FD8C4"/>
                 </a:solidFill>
                 <a:latin typeface="Arial"/>
               </a:rPr>
@@ -3538,8 +3468,8 @@
         </p:nvSpPr>
         <p:spPr>
           <a:xfrm>
-            <a:off x="914400" y="1234440"/>
-            <a:ext cx="10332720" cy="2194560"/>
+            <a:off x="640080" y="914400"/>
+            <a:ext cx="10881360" cy="1005840"/>
           </a:xfrm>
           <a:prstGeom prst="rect">
             <a:avLst/>
@@ -3554,13 +3484,13 @@
           <a:p>
             <a:pPr>
               <a:lnSpc>
-                <a:spcPct val="104000"/>
+                <a:spcPct val="102000"/>
               </a:lnSpc>
             </a:pPr>
             <a:r>
-              <a:rPr sz="4000" b="1">
-                <a:solidFill>
-                  <a:srgbClr val="F2F6F8"/>
+              <a:rPr sz="3400" b="1">
+                <a:solidFill>
+                  <a:srgbClr val="EAF2F5"/>
                 </a:solidFill>
                 <a:latin typeface="Arial"/>
               </a:rPr>
@@ -3578,25 +3508,19 @@
         </p:nvSpPr>
         <p:spPr>
           <a:xfrm>
-            <a:off x="914400" y="2834640"/>
-            <a:ext cx="4937760" cy="2468880"/>
+            <a:off x="640080" y="4023360"/>
+            <a:ext cx="5029200" cy="1737360"/>
           </a:xfrm>
           <a:prstGeom prst="roundRect">
             <a:avLst>
-              <a:gd name="adj" fmla="val 10000"/>
+              <a:gd name="adj" fmla="val 6000"/>
             </a:avLst>
           </a:prstGeom>
           <a:solidFill>
-            <a:srgbClr val="00C8B4">
-              <a:alpha val="12000"/>
-            </a:srgbClr>
+            <a:srgbClr val="101F30"/>
           </a:solidFill>
-          <a:ln w="12700">
-            <a:solidFill>
-              <a:srgbClr val="00C8B4">
-                <a:alpha val="30000"/>
-              </a:srgbClr>
-            </a:solidFill>
+          <a:ln>
+            <a:noFill/>
           </a:ln>
           <a:effectLst/>
         </p:spPr>
@@ -3624,104 +3548,23 @@
       </p:sp>
       <p:sp>
         <p:nvSpPr>
-          <p:cNvPr id="6" name="TextBox 5"/>
-          <p:cNvSpPr txBox="1"/>
-          <p:nvPr/>
-        </p:nvSpPr>
-        <p:spPr>
-          <a:xfrm>
-            <a:off x="1225296" y="3127248"/>
-            <a:ext cx="4315968" cy="457200"/>
-          </a:xfrm>
-          <a:prstGeom prst="rect">
-            <a:avLst/>
-          </a:prstGeom>
-          <a:noFill/>
-        </p:spPr>
-        <p:txBody>
-          <a:bodyPr wrap="square" anchor="t" lIns="0" rIns="0" tIns="0" bIns="0">
-            <a:spAutoFit/>
-          </a:bodyPr>
-          <a:lstStyle/>
-          <a:p>
-            <a:r>
-              <a:rPr sz="1700" b="1">
-                <a:solidFill>
-                  <a:srgbClr val="F2F6F8"/>
-                </a:solidFill>
-                <a:latin typeface="Arial"/>
-              </a:rPr>
-              <a:t>B2C · Suscripción</a:t>
-            </a:r>
-          </a:p>
-        </p:txBody>
-      </p:sp>
-      <p:sp>
-        <p:nvSpPr>
-          <p:cNvPr id="7" name="TextBox 6"/>
-          <p:cNvSpPr txBox="1"/>
-          <p:nvPr/>
-        </p:nvSpPr>
-        <p:spPr>
-          <a:xfrm>
-            <a:off x="1225296" y="3675888"/>
-            <a:ext cx="4315968" cy="1463040"/>
-          </a:xfrm>
-          <a:prstGeom prst="rect">
-            <a:avLst/>
-          </a:prstGeom>
-          <a:noFill/>
-        </p:spPr>
-        <p:txBody>
-          <a:bodyPr wrap="square" anchor="t" lIns="0" rIns="0" tIns="0" bIns="0">
-            <a:spAutoFit/>
-          </a:bodyPr>
-          <a:lstStyle/>
-          <a:p>
-            <a:pPr>
-              <a:lnSpc>
-                <a:spcPct val="118000"/>
-              </a:lnSpc>
-            </a:pPr>
-            <a:r>
-              <a:rPr sz="1400" b="0">
-                <a:solidFill>
-                  <a:srgbClr val="93A8BC"/>
-                </a:solidFill>
-                <a:latin typeface="Arial"/>
-              </a:rPr>
-              <a:t>App de pago mensual. Plan familiar para cuidar mayores a distancia. Funciona con el wearable que ya tienes.</a:t>
-            </a:r>
-          </a:p>
-        </p:txBody>
-      </p:sp>
-      <p:sp>
-        <p:nvSpPr>
-          <p:cNvPr id="8" name="Rounded Rectangle 7"/>
+          <p:cNvPr id="6" name="Oval 5"/>
           <p:cNvSpPr/>
           <p:nvPr/>
         </p:nvSpPr>
         <p:spPr>
           <a:xfrm>
-            <a:off x="6309360" y="2834640"/>
-            <a:ext cx="4937760" cy="2468880"/>
-          </a:xfrm>
-          <a:prstGeom prst="roundRect">
-            <a:avLst>
-              <a:gd name="adj" fmla="val 10000"/>
-            </a:avLst>
+            <a:off x="914400" y="4297680"/>
+            <a:ext cx="457200" cy="457200"/>
+          </a:xfrm>
+          <a:prstGeom prst="ellipse">
+            <a:avLst/>
           </a:prstGeom>
           <a:solidFill>
-            <a:srgbClr val="7C84F8">
-              <a:alpha val="12000"/>
-            </a:srgbClr>
+            <a:srgbClr val="4FD8C4"/>
           </a:solidFill>
-          <a:ln w="12700">
-            <a:solidFill>
-              <a:srgbClr val="7C84F8">
-                <a:alpha val="30000"/>
-              </a:srgbClr>
-            </a:solidFill>
+          <a:ln>
+            <a:noFill/>
           </a:ln>
           <a:effectLst/>
         </p:spPr>
@@ -3749,48 +3592,48 @@
       </p:sp>
       <p:sp>
         <p:nvSpPr>
-          <p:cNvPr id="9" name="TextBox 8"/>
-          <p:cNvSpPr txBox="1"/>
-          <p:nvPr/>
-        </p:nvSpPr>
-        <p:spPr>
-          <a:xfrm>
-            <a:off x="6620256" y="3127248"/>
-            <a:ext cx="4315968" cy="457200"/>
-          </a:xfrm>
-          <a:prstGeom prst="rect">
-            <a:avLst/>
-          </a:prstGeom>
-          <a:noFill/>
-        </p:spPr>
-        <p:txBody>
-          <a:bodyPr wrap="square" anchor="t" lIns="0" rIns="0" tIns="0" bIns="0">
-            <a:spAutoFit/>
-          </a:bodyPr>
-          <a:lstStyle/>
-          <a:p>
-            <a:r>
-              <a:rPr sz="1700" b="1">
-                <a:solidFill>
-                  <a:srgbClr val="F2F6F8"/>
-                </a:solidFill>
-                <a:latin typeface="Arial"/>
-              </a:rPr>
-              <a:t>B2B · Datos y riesgo</a:t>
-            </a:r>
-          </a:p>
-        </p:txBody>
-      </p:sp>
-      <p:sp>
-        <p:nvSpPr>
-          <p:cNvPr id="10" name="TextBox 9"/>
-          <p:cNvSpPr txBox="1"/>
-          <p:nvPr/>
-        </p:nvSpPr>
-        <p:spPr>
-          <a:xfrm>
-            <a:off x="6620256" y="3675888"/>
-            <a:ext cx="4315968" cy="1463040"/>
+          <p:cNvPr id="7" name="TextBox 6"/>
+          <p:cNvSpPr txBox="1"/>
+          <p:nvPr/>
+        </p:nvSpPr>
+        <p:spPr>
+          <a:xfrm>
+            <a:off x="1508760" y="4251960"/>
+            <a:ext cx="4023360" cy="548640"/>
+          </a:xfrm>
+          <a:prstGeom prst="rect">
+            <a:avLst/>
+          </a:prstGeom>
+          <a:noFill/>
+        </p:spPr>
+        <p:txBody>
+          <a:bodyPr wrap="square" anchor="t" lIns="0" rIns="0" tIns="0" bIns="0">
+            <a:spAutoFit/>
+          </a:bodyPr>
+          <a:lstStyle/>
+          <a:p>
+            <a:r>
+              <a:rPr sz="1600" b="1">
+                <a:solidFill>
+                  <a:srgbClr val="EAF2F5"/>
+                </a:solidFill>
+                <a:latin typeface="Arial"/>
+              </a:rPr>
+              <a:t>B2C · Suscripción</a:t>
+            </a:r>
+          </a:p>
+        </p:txBody>
+      </p:sp>
+      <p:sp>
+        <p:nvSpPr>
+          <p:cNvPr id="8" name="TextBox 7"/>
+          <p:cNvSpPr txBox="1"/>
+          <p:nvPr/>
+        </p:nvSpPr>
+        <p:spPr>
+          <a:xfrm>
+            <a:off x="914400" y="4937760"/>
+            <a:ext cx="4480560" cy="731519"/>
           </a:xfrm>
           <a:prstGeom prst="rect">
             <a:avLst/>
@@ -3805,13 +3648,176 @@
           <a:p>
             <a:pPr>
               <a:lnSpc>
-                <a:spcPct val="118000"/>
+                <a:spcPct val="115000"/>
               </a:lnSpc>
             </a:pPr>
             <a:r>
-              <a:rPr sz="1400" b="0">
-                <a:solidFill>
-                  <a:srgbClr val="93A8BC"/>
+              <a:rPr sz="1300" b="0">
+                <a:solidFill>
+                  <a:srgbClr val="8AA0B2"/>
+                </a:solidFill>
+                <a:latin typeface="Arial"/>
+              </a:rPr>
+              <a:t>App de pago mensual. Plan familiar para cuidar mayores a distancia. Funciona con el wearable que ya tienes.</a:t>
+            </a:r>
+          </a:p>
+        </p:txBody>
+      </p:sp>
+      <p:sp>
+        <p:nvSpPr>
+          <p:cNvPr id="9" name="Rounded Rectangle 8"/>
+          <p:cNvSpPr/>
+          <p:nvPr/>
+        </p:nvSpPr>
+        <p:spPr>
+          <a:xfrm>
+            <a:off x="6217920" y="4023360"/>
+            <a:ext cx="5029200" cy="1737360"/>
+          </a:xfrm>
+          <a:prstGeom prst="roundRect">
+            <a:avLst>
+              <a:gd name="adj" fmla="val 6000"/>
+            </a:avLst>
+          </a:prstGeom>
+          <a:solidFill>
+            <a:srgbClr val="101F30"/>
+          </a:solidFill>
+          <a:ln>
+            <a:noFill/>
+          </a:ln>
+          <a:effectLst/>
+        </p:spPr>
+        <p:style>
+          <a:lnRef idx="1">
+            <a:schemeClr val="accent1"/>
+          </a:lnRef>
+          <a:fillRef idx="3">
+            <a:schemeClr val="accent1"/>
+          </a:fillRef>
+          <a:effectRef idx="2">
+            <a:schemeClr val="accent1"/>
+          </a:effectRef>
+          <a:fontRef idx="minor">
+            <a:schemeClr val="lt1"/>
+          </a:fontRef>
+        </p:style>
+        <p:txBody>
+          <a:bodyPr rtlCol="0" anchor="ctr"/>
+          <a:lstStyle/>
+          <a:p>
+            <a:pPr algn="ctr"/>
+          </a:p>
+        </p:txBody>
+      </p:sp>
+      <p:sp>
+        <p:nvSpPr>
+          <p:cNvPr id="10" name="Oval 9"/>
+          <p:cNvSpPr/>
+          <p:nvPr/>
+        </p:nvSpPr>
+        <p:spPr>
+          <a:xfrm>
+            <a:off x="6492240" y="4297680"/>
+            <a:ext cx="457200" cy="457200"/>
+          </a:xfrm>
+          <a:prstGeom prst="ellipse">
+            <a:avLst/>
+          </a:prstGeom>
+          <a:solidFill>
+            <a:srgbClr val="9BA8F2"/>
+          </a:solidFill>
+          <a:ln>
+            <a:noFill/>
+          </a:ln>
+          <a:effectLst/>
+        </p:spPr>
+        <p:style>
+          <a:lnRef idx="1">
+            <a:schemeClr val="accent1"/>
+          </a:lnRef>
+          <a:fillRef idx="3">
+            <a:schemeClr val="accent1"/>
+          </a:fillRef>
+          <a:effectRef idx="2">
+            <a:schemeClr val="accent1"/>
+          </a:effectRef>
+          <a:fontRef idx="minor">
+            <a:schemeClr val="lt1"/>
+          </a:fontRef>
+        </p:style>
+        <p:txBody>
+          <a:bodyPr rtlCol="0" anchor="ctr"/>
+          <a:lstStyle/>
+          <a:p>
+            <a:pPr algn="ctr"/>
+          </a:p>
+        </p:txBody>
+      </p:sp>
+      <p:sp>
+        <p:nvSpPr>
+          <p:cNvPr id="11" name="TextBox 10"/>
+          <p:cNvSpPr txBox="1"/>
+          <p:nvPr/>
+        </p:nvSpPr>
+        <p:spPr>
+          <a:xfrm>
+            <a:off x="7086600" y="4251960"/>
+            <a:ext cx="4023360" cy="548640"/>
+          </a:xfrm>
+          <a:prstGeom prst="rect">
+            <a:avLst/>
+          </a:prstGeom>
+          <a:noFill/>
+        </p:spPr>
+        <p:txBody>
+          <a:bodyPr wrap="square" anchor="t" lIns="0" rIns="0" tIns="0" bIns="0">
+            <a:spAutoFit/>
+          </a:bodyPr>
+          <a:lstStyle/>
+          <a:p>
+            <a:r>
+              <a:rPr sz="1600" b="1">
+                <a:solidFill>
+                  <a:srgbClr val="EAF2F5"/>
+                </a:solidFill>
+                <a:latin typeface="Arial"/>
+              </a:rPr>
+              <a:t>B2B · Datos y riesgo</a:t>
+            </a:r>
+          </a:p>
+        </p:txBody>
+      </p:sp>
+      <p:sp>
+        <p:nvSpPr>
+          <p:cNvPr id="12" name="TextBox 11"/>
+          <p:cNvSpPr txBox="1"/>
+          <p:nvPr/>
+        </p:nvSpPr>
+        <p:spPr>
+          <a:xfrm>
+            <a:off x="6492240" y="4937760"/>
+            <a:ext cx="4480560" cy="731519"/>
+          </a:xfrm>
+          <a:prstGeom prst="rect">
+            <a:avLst/>
+          </a:prstGeom>
+          <a:noFill/>
+        </p:spPr>
+        <p:txBody>
+          <a:bodyPr wrap="square" anchor="t" lIns="0" rIns="0" tIns="0" bIns="0">
+            <a:spAutoFit/>
+          </a:bodyPr>
+          <a:lstStyle/>
+          <a:p>
+            <a:pPr>
+              <a:lnSpc>
+                <a:spcPct val="115000"/>
+              </a:lnSpc>
+            </a:pPr>
+            <a:r>
+              <a:rPr sz="1300" b="0">
+                <a:solidFill>
+                  <a:srgbClr val="8AA0B2"/>
                 </a:solidFill>
                 <a:latin typeface="Arial"/>
               </a:rPr>
@@ -3822,13 +3828,13 @@
       </p:sp>
       <p:sp>
         <p:nvSpPr>
-          <p:cNvPr id="11" name="TextBox 10"/>
-          <p:cNvSpPr txBox="1"/>
-          <p:nvPr/>
-        </p:nvSpPr>
-        <p:spPr>
-          <a:xfrm>
-            <a:off x="914400" y="6446520"/>
+          <p:cNvPr id="13" name="TextBox 12"/>
+          <p:cNvSpPr txBox="1"/>
+          <p:nvPr/>
+        </p:nvSpPr>
+        <p:spPr>
+          <a:xfrm>
+            <a:off x="640080" y="6473952"/>
             <a:ext cx="7315200" cy="274320"/>
           </a:xfrm>
           <a:prstGeom prst="rect">
@@ -3845,7 +3851,7 @@
             <a:r>
               <a:rPr sz="900" b="0">
                 <a:solidFill>
-                  <a:srgbClr val="5A7288"/>
+                  <a:srgbClr val="8AA0B2"/>
                 </a:solidFill>
                 <a:latin typeface="Arial"/>
               </a:rPr>
@@ -3856,14 +3862,14 @@
       </p:sp>
       <p:sp>
         <p:nvSpPr>
-          <p:cNvPr id="12" name="TextBox 11"/>
-          <p:cNvSpPr txBox="1"/>
-          <p:nvPr/>
-        </p:nvSpPr>
-        <p:spPr>
-          <a:xfrm>
-            <a:off x="10607040" y="6446520"/>
-            <a:ext cx="822960" cy="274320"/>
+          <p:cNvPr id="14" name="TextBox 13"/>
+          <p:cNvSpPr txBox="1"/>
+          <p:nvPr/>
+        </p:nvSpPr>
+        <p:spPr>
+          <a:xfrm>
+            <a:off x="11155680" y="6473952"/>
+            <a:ext cx="548640" cy="274320"/>
           </a:xfrm>
           <a:prstGeom prst="rect">
             <a:avLst/>
@@ -3879,7 +3885,7 @@
             <a:r>
               <a:rPr sz="900" b="0">
                 <a:solidFill>
-                  <a:srgbClr val="5A7288"/>
+                  <a:srgbClr val="8AA0B2"/>
                 </a:solidFill>
                 <a:latin typeface="Arial"/>
               </a:rPr>
@@ -3921,7 +3927,7 @@
             <a:avLst/>
           </a:prstGeom>
           <a:solidFill>
-            <a:srgbClr val="050A10"/>
+            <a:srgbClr val="0D1B2A"/>
           </a:solidFill>
           <a:ln>
             <a:noFill/>
@@ -3958,8 +3964,8 @@
         </p:nvSpPr>
         <p:spPr>
           <a:xfrm>
-            <a:off x="914400" y="685800"/>
-            <a:ext cx="8229600" cy="365760"/>
+            <a:off x="640080" y="457200"/>
+            <a:ext cx="10881360" cy="274320"/>
           </a:xfrm>
           <a:prstGeom prst="rect">
             <a:avLst/>
@@ -3975,7 +3981,7 @@
             <a:r>
               <a:rPr sz="1200" b="1">
                 <a:solidFill>
-                  <a:srgbClr val="00C8B4"/>
+                  <a:srgbClr val="4FD8C4"/>
                 </a:solidFill>
                 <a:latin typeface="Arial"/>
               </a:rPr>
@@ -3992,8 +3998,8 @@
         </p:nvSpPr>
         <p:spPr>
           <a:xfrm>
-            <a:off x="914400" y="1234440"/>
-            <a:ext cx="10332720" cy="2194560"/>
+            <a:off x="640080" y="914400"/>
+            <a:ext cx="10881360" cy="1005840"/>
           </a:xfrm>
           <a:prstGeom prst="rect">
             <a:avLst/>
@@ -4008,13 +4014,13 @@
           <a:p>
             <a:pPr>
               <a:lnSpc>
-                <a:spcPct val="104000"/>
+                <a:spcPct val="102000"/>
               </a:lnSpc>
             </a:pPr>
             <a:r>
-              <a:rPr sz="4200" b="1">
-                <a:solidFill>
-                  <a:srgbClr val="F2F6F8"/>
+              <a:rPr sz="3400" b="1">
+                <a:solidFill>
+                  <a:srgbClr val="EAF2F5"/>
                 </a:solidFill>
                 <a:latin typeface="Arial"/>
               </a:rPr>
@@ -4032,25 +4038,19 @@
         </p:nvSpPr>
         <p:spPr>
           <a:xfrm>
-            <a:off x="914400" y="2834640"/>
-            <a:ext cx="3429000" cy="2377440"/>
+            <a:off x="640080" y="4023360"/>
+            <a:ext cx="3474720" cy="1737360"/>
           </a:xfrm>
           <a:prstGeom prst="roundRect">
             <a:avLst>
-              <a:gd name="adj" fmla="val 10000"/>
+              <a:gd name="adj" fmla="val 6000"/>
             </a:avLst>
           </a:prstGeom>
           <a:solidFill>
-            <a:srgbClr val="00C8B4">
-              <a:alpha val="12000"/>
-            </a:srgbClr>
+            <a:srgbClr val="101F30"/>
           </a:solidFill>
-          <a:ln w="12700">
-            <a:solidFill>
-              <a:srgbClr val="00C8B4">
-                <a:alpha val="30000"/>
-              </a:srgbClr>
-            </a:solidFill>
+          <a:ln>
+            <a:noFill/>
           </a:ln>
           <a:effectLst/>
         </p:spPr>
@@ -4078,104 +4078,23 @@
       </p:sp>
       <p:sp>
         <p:nvSpPr>
-          <p:cNvPr id="6" name="TextBox 5"/>
-          <p:cNvSpPr txBox="1"/>
-          <p:nvPr/>
-        </p:nvSpPr>
-        <p:spPr>
-          <a:xfrm>
-            <a:off x="1225296" y="3127248"/>
-            <a:ext cx="2807208" cy="457200"/>
-          </a:xfrm>
-          <a:prstGeom prst="rect">
-            <a:avLst/>
-          </a:prstGeom>
-          <a:noFill/>
-        </p:spPr>
-        <p:txBody>
-          <a:bodyPr wrap="square" anchor="t" lIns="0" rIns="0" tIns="0" bIns="0">
-            <a:spAutoFit/>
-          </a:bodyPr>
-          <a:lstStyle/>
-          <a:p>
-            <a:r>
-              <a:rPr sz="1600" b="1">
-                <a:solidFill>
-                  <a:srgbClr val="F2F6F8"/>
-                </a:solidFill>
-                <a:latin typeface="Arial"/>
-              </a:rPr>
-              <a:t>Fase 5–8</a:t>
-            </a:r>
-          </a:p>
-        </p:txBody>
-      </p:sp>
-      <p:sp>
-        <p:nvSpPr>
-          <p:cNvPr id="7" name="TextBox 6"/>
-          <p:cNvSpPr txBox="1"/>
-          <p:nvPr/>
-        </p:nvSpPr>
-        <p:spPr>
-          <a:xfrm>
-            <a:off x="1225296" y="3675888"/>
-            <a:ext cx="2807208" cy="1371600"/>
-          </a:xfrm>
-          <a:prstGeom prst="rect">
-            <a:avLst/>
-          </a:prstGeom>
-          <a:noFill/>
-        </p:spPr>
-        <p:txBody>
-          <a:bodyPr wrap="square" anchor="t" lIns="0" rIns="0" tIns="0" bIns="0">
-            <a:spAutoFit/>
-          </a:bodyPr>
-          <a:lstStyle/>
-          <a:p>
-            <a:pPr>
-              <a:lnSpc>
-                <a:spcPct val="118000"/>
-              </a:lnSpc>
-            </a:pPr>
-            <a:r>
-              <a:rPr sz="1300" b="0">
-                <a:solidFill>
-                  <a:srgbClr val="93A8BC"/>
-                </a:solidFill>
-                <a:latin typeface="Arial"/>
-              </a:rPr>
-              <a:t>API directa + datos en vivo + despliegue en la nube (ya en Vercel).</a:t>
-            </a:r>
-          </a:p>
-        </p:txBody>
-      </p:sp>
-      <p:sp>
-        <p:nvSpPr>
-          <p:cNvPr id="8" name="Rounded Rectangle 7"/>
+          <p:cNvPr id="6" name="Oval 5"/>
           <p:cNvSpPr/>
           <p:nvPr/>
         </p:nvSpPr>
         <p:spPr>
           <a:xfrm>
-            <a:off x="4526280" y="2834640"/>
-            <a:ext cx="3429000" cy="2377440"/>
-          </a:xfrm>
-          <a:prstGeom prst="roundRect">
-            <a:avLst>
-              <a:gd name="adj" fmla="val 10000"/>
-            </a:avLst>
+            <a:off x="914400" y="4297680"/>
+            <a:ext cx="457200" cy="457200"/>
+          </a:xfrm>
+          <a:prstGeom prst="ellipse">
+            <a:avLst/>
           </a:prstGeom>
           <a:solidFill>
-            <a:srgbClr val="F2B84B">
-              <a:alpha val="12000"/>
-            </a:srgbClr>
+            <a:srgbClr val="4FD8C4"/>
           </a:solidFill>
-          <a:ln w="12700">
-            <a:solidFill>
-              <a:srgbClr val="F2B84B">
-                <a:alpha val="30000"/>
-              </a:srgbClr>
-            </a:solidFill>
+          <a:ln>
+            <a:noFill/>
           </a:ln>
           <a:effectLst/>
         </p:spPr>
@@ -4203,14 +4122,14 @@
       </p:sp>
       <p:sp>
         <p:nvSpPr>
-          <p:cNvPr id="9" name="TextBox 8"/>
-          <p:cNvSpPr txBox="1"/>
-          <p:nvPr/>
-        </p:nvSpPr>
-        <p:spPr>
-          <a:xfrm>
-            <a:off x="4837176" y="3127248"/>
-            <a:ext cx="2807208" cy="457200"/>
+          <p:cNvPr id="7" name="TextBox 6"/>
+          <p:cNvSpPr txBox="1"/>
+          <p:nvPr/>
+        </p:nvSpPr>
+        <p:spPr>
+          <a:xfrm>
+            <a:off x="1508760" y="4251960"/>
+            <a:ext cx="2468879" cy="548640"/>
           </a:xfrm>
           <a:prstGeom prst="rect">
             <a:avLst/>
@@ -4226,25 +4145,25 @@
             <a:r>
               <a:rPr sz="1600" b="1">
                 <a:solidFill>
-                  <a:srgbClr val="F2F6F8"/>
-                </a:solidFill>
-                <a:latin typeface="Arial"/>
-              </a:rPr>
-              <a:t>Escalar</a:t>
-            </a:r>
-          </a:p>
-        </p:txBody>
-      </p:sp>
-      <p:sp>
-        <p:nvSpPr>
-          <p:cNvPr id="10" name="TextBox 9"/>
-          <p:cNvSpPr txBox="1"/>
-          <p:nvPr/>
-        </p:nvSpPr>
-        <p:spPr>
-          <a:xfrm>
-            <a:off x="4837176" y="3675888"/>
-            <a:ext cx="2807208" cy="1371600"/>
+                  <a:srgbClr val="EAF2F5"/>
+                </a:solidFill>
+                <a:latin typeface="Arial"/>
+              </a:rPr>
+              <a:t>Fase 5–8</a:t>
+            </a:r>
+          </a:p>
+        </p:txBody>
+      </p:sp>
+      <p:sp>
+        <p:nvSpPr>
+          <p:cNvPr id="8" name="TextBox 7"/>
+          <p:cNvSpPr txBox="1"/>
+          <p:nvPr/>
+        </p:nvSpPr>
+        <p:spPr>
+          <a:xfrm>
+            <a:off x="914400" y="4937760"/>
+            <a:ext cx="2926079" cy="731519"/>
           </a:xfrm>
           <a:prstGeom prst="rect">
             <a:avLst/>
@@ -4259,48 +4178,42 @@
           <a:p>
             <a:pPr>
               <a:lnSpc>
-                <a:spcPct val="118000"/>
+                <a:spcPct val="115000"/>
               </a:lnSpc>
             </a:pPr>
             <a:r>
               <a:rPr sz="1300" b="0">
                 <a:solidFill>
-                  <a:srgbClr val="93A8BC"/>
-                </a:solidFill>
-                <a:latin typeface="Arial"/>
-              </a:rPr>
-              <a:t>Llevar el MVP a usuarios reales y crecer el modelo con más datos.</a:t>
-            </a:r>
-          </a:p>
-        </p:txBody>
-      </p:sp>
-      <p:sp>
-        <p:nvSpPr>
-          <p:cNvPr id="11" name="Rounded Rectangle 10"/>
+                  <a:srgbClr val="8AA0B2"/>
+                </a:solidFill>
+                <a:latin typeface="Arial"/>
+              </a:rPr>
+              <a:t>API directa + datos en vivo + despliegue en la nube (ya en Vercel).</a:t>
+            </a:r>
+          </a:p>
+        </p:txBody>
+      </p:sp>
+      <p:sp>
+        <p:nvSpPr>
+          <p:cNvPr id="9" name="Rounded Rectangle 8"/>
           <p:cNvSpPr/>
           <p:nvPr/>
         </p:nvSpPr>
         <p:spPr>
           <a:xfrm>
-            <a:off x="8138160" y="2834640"/>
-            <a:ext cx="3108960" cy="2377440"/>
+            <a:off x="4480560" y="4023360"/>
+            <a:ext cx="3474720" cy="1737360"/>
           </a:xfrm>
           <a:prstGeom prst="roundRect">
             <a:avLst>
-              <a:gd name="adj" fmla="val 10000"/>
+              <a:gd name="adj" fmla="val 6000"/>
             </a:avLst>
           </a:prstGeom>
           <a:solidFill>
-            <a:srgbClr val="F05C7A">
-              <a:alpha val="12000"/>
-            </a:srgbClr>
+            <a:srgbClr val="101F30"/>
           </a:solidFill>
-          <a:ln w="12700">
-            <a:solidFill>
-              <a:srgbClr val="F05C7A">
-                <a:alpha val="30000"/>
-              </a:srgbClr>
-            </a:solidFill>
+          <a:ln>
+            <a:noFill/>
           </a:ln>
           <a:effectLst/>
         </p:spPr>
@@ -4328,48 +4241,92 @@
       </p:sp>
       <p:sp>
         <p:nvSpPr>
+          <p:cNvPr id="10" name="Oval 9"/>
+          <p:cNvSpPr/>
+          <p:nvPr/>
+        </p:nvSpPr>
+        <p:spPr>
+          <a:xfrm>
+            <a:off x="4754880" y="4297680"/>
+            <a:ext cx="457200" cy="457200"/>
+          </a:xfrm>
+          <a:prstGeom prst="ellipse">
+            <a:avLst/>
+          </a:prstGeom>
+          <a:solidFill>
+            <a:srgbClr val="F2B84B"/>
+          </a:solidFill>
+          <a:ln>
+            <a:noFill/>
+          </a:ln>
+          <a:effectLst/>
+        </p:spPr>
+        <p:style>
+          <a:lnRef idx="1">
+            <a:schemeClr val="accent1"/>
+          </a:lnRef>
+          <a:fillRef idx="3">
+            <a:schemeClr val="accent1"/>
+          </a:fillRef>
+          <a:effectRef idx="2">
+            <a:schemeClr val="accent1"/>
+          </a:effectRef>
+          <a:fontRef idx="minor">
+            <a:schemeClr val="lt1"/>
+          </a:fontRef>
+        </p:style>
+        <p:txBody>
+          <a:bodyPr rtlCol="0" anchor="ctr"/>
+          <a:lstStyle/>
+          <a:p>
+            <a:pPr algn="ctr"/>
+          </a:p>
+        </p:txBody>
+      </p:sp>
+      <p:sp>
+        <p:nvSpPr>
+          <p:cNvPr id="11" name="TextBox 10"/>
+          <p:cNvSpPr txBox="1"/>
+          <p:nvPr/>
+        </p:nvSpPr>
+        <p:spPr>
+          <a:xfrm>
+            <a:off x="5349240" y="4251960"/>
+            <a:ext cx="2468879" cy="548640"/>
+          </a:xfrm>
+          <a:prstGeom prst="rect">
+            <a:avLst/>
+          </a:prstGeom>
+          <a:noFill/>
+        </p:spPr>
+        <p:txBody>
+          <a:bodyPr wrap="square" anchor="t" lIns="0" rIns="0" tIns="0" bIns="0">
+            <a:spAutoFit/>
+          </a:bodyPr>
+          <a:lstStyle/>
+          <a:p>
+            <a:r>
+              <a:rPr sz="1600" b="1">
+                <a:solidFill>
+                  <a:srgbClr val="EAF2F5"/>
+                </a:solidFill>
+                <a:latin typeface="Arial"/>
+              </a:rPr>
+              <a:t>Escalar</a:t>
+            </a:r>
+          </a:p>
+        </p:txBody>
+      </p:sp>
+      <p:sp>
+        <p:nvSpPr>
           <p:cNvPr id="12" name="TextBox 11"/>
           <p:cNvSpPr txBox="1"/>
           <p:nvPr/>
         </p:nvSpPr>
         <p:spPr>
           <a:xfrm>
-            <a:off x="8449056" y="3127248"/>
-            <a:ext cx="2487168" cy="457200"/>
-          </a:xfrm>
-          <a:prstGeom prst="rect">
-            <a:avLst/>
-          </a:prstGeom>
-          <a:noFill/>
-        </p:spPr>
-        <p:txBody>
-          <a:bodyPr wrap="square" anchor="t" lIns="0" rIns="0" tIns="0" bIns="0">
-            <a:spAutoFit/>
-          </a:bodyPr>
-          <a:lstStyle/>
-          <a:p>
-            <a:r>
-              <a:rPr sz="1600" b="1">
-                <a:solidFill>
-                  <a:srgbClr val="F2F6F8"/>
-                </a:solidFill>
-                <a:latin typeface="Arial"/>
-              </a:rPr>
-              <a:t>Equipo</a:t>
-            </a:r>
-          </a:p>
-        </p:txBody>
-      </p:sp>
-      <p:sp>
-        <p:nvSpPr>
-          <p:cNvPr id="13" name="TextBox 12"/>
-          <p:cNvSpPr txBox="1"/>
-          <p:nvPr/>
-        </p:nvSpPr>
-        <p:spPr>
-          <a:xfrm>
-            <a:off x="8449056" y="3675888"/>
-            <a:ext cx="2487168" cy="1371600"/>
+            <a:off x="4754880" y="4937760"/>
+            <a:ext cx="2926079" cy="731519"/>
           </a:xfrm>
           <a:prstGeom prst="rect">
             <a:avLst/>
@@ -4384,31 +4341,121 @@
           <a:p>
             <a:pPr>
               <a:lnSpc>
-                <a:spcPct val="118000"/>
+                <a:spcPct val="115000"/>
               </a:lnSpc>
             </a:pPr>
             <a:r>
               <a:rPr sz="1300" b="0">
                 <a:solidFill>
-                  <a:srgbClr val="93A8BC"/>
-                </a:solidFill>
-                <a:latin typeface="Arial"/>
-              </a:rPr>
-              <a:t>Ciencia de datos + producto. Buscamos socio que abra puertas B2B y clínica.</a:t>
-            </a:r>
-          </a:p>
-        </p:txBody>
-      </p:sp>
-      <p:sp>
-        <p:nvSpPr>
-          <p:cNvPr id="14" name="TextBox 13"/>
-          <p:cNvSpPr txBox="1"/>
-          <p:nvPr/>
-        </p:nvSpPr>
-        <p:spPr>
-          <a:xfrm>
-            <a:off x="914400" y="5623560"/>
-            <a:ext cx="10332720" cy="457200"/>
+                  <a:srgbClr val="8AA0B2"/>
+                </a:solidFill>
+                <a:latin typeface="Arial"/>
+              </a:rPr>
+              <a:t>Llevar el MVP a usuarios reales y crecer el modelo con más datos.</a:t>
+            </a:r>
+          </a:p>
+        </p:txBody>
+      </p:sp>
+      <p:sp>
+        <p:nvSpPr>
+          <p:cNvPr id="13" name="Rounded Rectangle 12"/>
+          <p:cNvSpPr/>
+          <p:nvPr/>
+        </p:nvSpPr>
+        <p:spPr>
+          <a:xfrm>
+            <a:off x="8321040" y="4023360"/>
+            <a:ext cx="3474720" cy="1737360"/>
+          </a:xfrm>
+          <a:prstGeom prst="roundRect">
+            <a:avLst>
+              <a:gd name="adj" fmla="val 6000"/>
+            </a:avLst>
+          </a:prstGeom>
+          <a:solidFill>
+            <a:srgbClr val="101F30"/>
+          </a:solidFill>
+          <a:ln>
+            <a:noFill/>
+          </a:ln>
+          <a:effectLst/>
+        </p:spPr>
+        <p:style>
+          <a:lnRef idx="1">
+            <a:schemeClr val="accent1"/>
+          </a:lnRef>
+          <a:fillRef idx="3">
+            <a:schemeClr val="accent1"/>
+          </a:fillRef>
+          <a:effectRef idx="2">
+            <a:schemeClr val="accent1"/>
+          </a:effectRef>
+          <a:fontRef idx="minor">
+            <a:schemeClr val="lt1"/>
+          </a:fontRef>
+        </p:style>
+        <p:txBody>
+          <a:bodyPr rtlCol="0" anchor="ctr"/>
+          <a:lstStyle/>
+          <a:p>
+            <a:pPr algn="ctr"/>
+          </a:p>
+        </p:txBody>
+      </p:sp>
+      <p:sp>
+        <p:nvSpPr>
+          <p:cNvPr id="14" name="Oval 13"/>
+          <p:cNvSpPr/>
+          <p:nvPr/>
+        </p:nvSpPr>
+        <p:spPr>
+          <a:xfrm>
+            <a:off x="8595360" y="4297680"/>
+            <a:ext cx="457200" cy="457200"/>
+          </a:xfrm>
+          <a:prstGeom prst="ellipse">
+            <a:avLst/>
+          </a:prstGeom>
+          <a:solidFill>
+            <a:srgbClr val="F0687A"/>
+          </a:solidFill>
+          <a:ln>
+            <a:noFill/>
+          </a:ln>
+          <a:effectLst/>
+        </p:spPr>
+        <p:style>
+          <a:lnRef idx="1">
+            <a:schemeClr val="accent1"/>
+          </a:lnRef>
+          <a:fillRef idx="3">
+            <a:schemeClr val="accent1"/>
+          </a:fillRef>
+          <a:effectRef idx="2">
+            <a:schemeClr val="accent1"/>
+          </a:effectRef>
+          <a:fontRef idx="minor">
+            <a:schemeClr val="lt1"/>
+          </a:fontRef>
+        </p:style>
+        <p:txBody>
+          <a:bodyPr rtlCol="0" anchor="ctr"/>
+          <a:lstStyle/>
+          <a:p>
+            <a:pPr algn="ctr"/>
+          </a:p>
+        </p:txBody>
+      </p:sp>
+      <p:sp>
+        <p:nvSpPr>
+          <p:cNvPr id="15" name="TextBox 14"/>
+          <p:cNvSpPr txBox="1"/>
+          <p:nvPr/>
+        </p:nvSpPr>
+        <p:spPr>
+          <a:xfrm>
+            <a:off x="9189719" y="4251960"/>
+            <a:ext cx="2468879" cy="548640"/>
           </a:xfrm>
           <a:prstGeom prst="rect">
             <a:avLst/>
@@ -4424,11 +4471,157 @@
             <a:r>
               <a:rPr sz="1600" b="1">
                 <a:solidFill>
-                  <a:srgbClr val="F2F6F8"/>
+                  <a:srgbClr val="EAF2F5"/>
+                </a:solidFill>
+                <a:latin typeface="Arial"/>
+              </a:rPr>
+              <a:t>Equipo</a:t>
+            </a:r>
+          </a:p>
+        </p:txBody>
+      </p:sp>
+      <p:sp>
+        <p:nvSpPr>
+          <p:cNvPr id="16" name="TextBox 15"/>
+          <p:cNvSpPr txBox="1"/>
+          <p:nvPr/>
+        </p:nvSpPr>
+        <p:spPr>
+          <a:xfrm>
+            <a:off x="8595360" y="4937760"/>
+            <a:ext cx="2926079" cy="731519"/>
+          </a:xfrm>
+          <a:prstGeom prst="rect">
+            <a:avLst/>
+          </a:prstGeom>
+          <a:noFill/>
+        </p:spPr>
+        <p:txBody>
+          <a:bodyPr wrap="square" anchor="t" lIns="0" rIns="0" tIns="0" bIns="0">
+            <a:spAutoFit/>
+          </a:bodyPr>
+          <a:lstStyle/>
+          <a:p>
+            <a:pPr>
+              <a:lnSpc>
+                <a:spcPct val="115000"/>
+              </a:lnSpc>
+            </a:pPr>
+            <a:r>
+              <a:rPr sz="1300" b="0">
+                <a:solidFill>
+                  <a:srgbClr val="8AA0B2"/>
+                </a:solidFill>
+                <a:latin typeface="Arial"/>
+              </a:rPr>
+              <a:t>Ciencia de datos + producto. Socio que abra puertas B2B y clínica.</a:t>
+            </a:r>
+          </a:p>
+        </p:txBody>
+      </p:sp>
+      <p:sp>
+        <p:nvSpPr>
+          <p:cNvPr id="17" name="TextBox 16"/>
+          <p:cNvSpPr txBox="1"/>
+          <p:nvPr/>
+        </p:nvSpPr>
+        <p:spPr>
+          <a:xfrm>
+            <a:off x="640080" y="5989320"/>
+            <a:ext cx="10881360" cy="1463040"/>
+          </a:xfrm>
+          <a:prstGeom prst="rect">
+            <a:avLst/>
+          </a:prstGeom>
+          <a:noFill/>
+        </p:spPr>
+        <p:txBody>
+          <a:bodyPr wrap="square" anchor="t" lIns="0" rIns="0" tIns="0" bIns="0">
+            <a:spAutoFit/>
+          </a:bodyPr>
+          <a:lstStyle/>
+          <a:p>
+            <a:pPr>
+              <a:lnSpc>
+                <a:spcPct val="120000"/>
+              </a:lnSpc>
+            </a:pPr>
+            <a:r>
+              <a:rPr sz="1600" b="0">
+                <a:solidFill>
+                  <a:srgbClr val="EAF2F5"/>
                 </a:solidFill>
                 <a:latin typeface="Arial"/>
               </a:rPr>
               <a:t>Ronda Serie Semilla   ·   $X</a:t>
+            </a:r>
+          </a:p>
+        </p:txBody>
+      </p:sp>
+      <p:sp>
+        <p:nvSpPr>
+          <p:cNvPr id="18" name="TextBox 17"/>
+          <p:cNvSpPr txBox="1"/>
+          <p:nvPr/>
+        </p:nvSpPr>
+        <p:spPr>
+          <a:xfrm>
+            <a:off x="640080" y="6473952"/>
+            <a:ext cx="7315200" cy="274320"/>
+          </a:xfrm>
+          <a:prstGeom prst="rect">
+            <a:avLst/>
+          </a:prstGeom>
+          <a:noFill/>
+        </p:spPr>
+        <p:txBody>
+          <a:bodyPr wrap="square" anchor="t" lIns="0" rIns="0" tIns="0" bIns="0">
+            <a:spAutoFit/>
+          </a:bodyPr>
+          <a:lstStyle/>
+          <a:p>
+            <a:r>
+              <a:rPr sz="900" b="0">
+                <a:solidFill>
+                  <a:srgbClr val="8AA0B2"/>
+                </a:solidFill>
+                <a:latin typeface="Arial"/>
+              </a:rPr>
+              <a:t>BioPulse  ·  Predictive Biometric Analytics</a:t>
+            </a:r>
+          </a:p>
+        </p:txBody>
+      </p:sp>
+      <p:sp>
+        <p:nvSpPr>
+          <p:cNvPr id="19" name="TextBox 18"/>
+          <p:cNvSpPr txBox="1"/>
+          <p:nvPr/>
+        </p:nvSpPr>
+        <p:spPr>
+          <a:xfrm>
+            <a:off x="11155680" y="6473952"/>
+            <a:ext cx="548640" cy="274320"/>
+          </a:xfrm>
+          <a:prstGeom prst="rect">
+            <a:avLst/>
+          </a:prstGeom>
+          <a:noFill/>
+        </p:spPr>
+        <p:txBody>
+          <a:bodyPr wrap="square" anchor="t" lIns="0" rIns="0" tIns="0" bIns="0">
+            <a:spAutoFit/>
+          </a:bodyPr>
+          <a:lstStyle/>
+          <a:p>
+            <a:r>
+              <a:rPr sz="900" b="0">
+                <a:solidFill>
+                  <a:srgbClr val="8AA0B2"/>
+                </a:solidFill>
+                <a:latin typeface="Arial"/>
+              </a:rPr>
+              <a:t>11</a:t>
             </a:r>
           </a:p>
         </p:txBody>
@@ -4466,7 +4659,7 @@
             <a:avLst/>
           </a:prstGeom>
           <a:solidFill>
-            <a:srgbClr val="050A10"/>
+            <a:srgbClr val="0D1B2A"/>
           </a:solidFill>
           <a:ln>
             <a:noFill/>
@@ -4503,8 +4696,8 @@
         </p:nvSpPr>
         <p:spPr>
           <a:xfrm>
-            <a:off x="914400" y="685800"/>
-            <a:ext cx="8229600" cy="365760"/>
+            <a:off x="640080" y="457200"/>
+            <a:ext cx="10881360" cy="274320"/>
           </a:xfrm>
           <a:prstGeom prst="rect">
             <a:avLst/>
@@ -4520,7 +4713,7 @@
             <a:r>
               <a:rPr sz="1200" b="1">
                 <a:solidFill>
-                  <a:srgbClr val="00C8B4"/>
+                  <a:srgbClr val="4FD8C4"/>
                 </a:solidFill>
                 <a:latin typeface="Arial"/>
               </a:rPr>
@@ -4537,8 +4730,8 @@
         </p:nvSpPr>
         <p:spPr>
           <a:xfrm>
-            <a:off x="914400" y="1234440"/>
-            <a:ext cx="10332720" cy="2194560"/>
+            <a:off x="640080" y="914400"/>
+            <a:ext cx="10881360" cy="1005840"/>
           </a:xfrm>
           <a:prstGeom prst="rect">
             <a:avLst/>
@@ -4553,13 +4746,13 @@
           <a:p>
             <a:pPr>
               <a:lnSpc>
-                <a:spcPct val="104000"/>
+                <a:spcPct val="102000"/>
               </a:lnSpc>
             </a:pPr>
             <a:r>
-              <a:rPr sz="4000" b="1">
-                <a:solidFill>
-                  <a:srgbClr val="F2F6F8"/>
+              <a:rPr sz="3400" b="1">
+                <a:solidFill>
+                  <a:srgbClr val="EAF2F5"/>
                 </a:solidFill>
                 <a:latin typeface="Arial"/>
               </a:rPr>
@@ -4571,14 +4764,94 @@
       </p:sp>
       <p:sp>
         <p:nvSpPr>
-          <p:cNvPr id="5" name="TextBox 4"/>
-          <p:cNvSpPr txBox="1"/>
-          <p:nvPr/>
-        </p:nvSpPr>
-        <p:spPr>
-          <a:xfrm>
-            <a:off x="914400" y="3017520"/>
-            <a:ext cx="8229600" cy="1554480"/>
+          <p:cNvPr id="5" name="Rounded Rectangle 4"/>
+          <p:cNvSpPr/>
+          <p:nvPr/>
+        </p:nvSpPr>
+        <p:spPr>
+          <a:xfrm>
+            <a:off x="640080" y="1828800"/>
+            <a:ext cx="3474720" cy="1737360"/>
+          </a:xfrm>
+          <a:prstGeom prst="roundRect">
+            <a:avLst>
+              <a:gd name="adj" fmla="val 6000"/>
+            </a:avLst>
+          </a:prstGeom>
+          <a:solidFill>
+            <a:srgbClr val="101F30"/>
+          </a:solidFill>
+          <a:ln>
+            <a:noFill/>
+          </a:ln>
+          <a:effectLst/>
+        </p:spPr>
+        <p:style>
+          <a:lnRef idx="1">
+            <a:schemeClr val="accent1"/>
+          </a:lnRef>
+          <a:fillRef idx="3">
+            <a:schemeClr val="accent1"/>
+          </a:fillRef>
+          <a:effectRef idx="2">
+            <a:schemeClr val="accent1"/>
+          </a:effectRef>
+          <a:fontRef idx="minor">
+            <a:schemeClr val="lt1"/>
+          </a:fontRef>
+        </p:style>
+        <p:txBody>
+          <a:bodyPr rtlCol="0" anchor="ctr"/>
+          <a:lstStyle/>
+          <a:p>
+            <a:pPr algn="ctr"/>
+          </a:p>
+        </p:txBody>
+      </p:sp>
+      <p:sp>
+        <p:nvSpPr>
+          <p:cNvPr id="6" name="TextBox 5"/>
+          <p:cNvSpPr txBox="1"/>
+          <p:nvPr/>
+        </p:nvSpPr>
+        <p:spPr>
+          <a:xfrm>
+            <a:off x="914400" y="2148840"/>
+            <a:ext cx="2926079" cy="1005840"/>
+          </a:xfrm>
+          <a:prstGeom prst="rect">
+            <a:avLst/>
+          </a:prstGeom>
+          <a:noFill/>
+        </p:spPr>
+        <p:txBody>
+          <a:bodyPr wrap="square" anchor="t" lIns="0" rIns="0" tIns="0" bIns="0">
+            <a:spAutoFit/>
+          </a:bodyPr>
+          <a:lstStyle/>
+          <a:p>
+            <a:r>
+              <a:rPr sz="4000" b="1">
+                <a:solidFill>
+                  <a:srgbClr val="4FD8C4"/>
+                </a:solidFill>
+                <a:latin typeface="Arial"/>
+              </a:rPr>
+              <a:t>100k</a:t>
+            </a:r>
+          </a:p>
+        </p:txBody>
+      </p:sp>
+      <p:sp>
+        <p:nvSpPr>
+          <p:cNvPr id="7" name="TextBox 6"/>
+          <p:cNvSpPr txBox="1"/>
+          <p:nvPr/>
+        </p:nvSpPr>
+        <p:spPr>
+          <a:xfrm>
+            <a:off x="914400" y="3108960"/>
+            <a:ext cx="2926079" cy="822960"/>
           </a:xfrm>
           <a:prstGeom prst="rect">
             <a:avLst/>
@@ -4593,98 +4866,307 @@
           <a:p>
             <a:pPr>
               <a:lnSpc>
-                <a:spcPct val="130000"/>
+                <a:spcPct val="110000"/>
               </a:lnSpc>
             </a:pPr>
             <a:r>
-              <a:rPr sz="1600" b="0">
-                <a:solidFill>
-                  <a:srgbClr val="93A8BC"/>
-                </a:solidFill>
-                <a:latin typeface="Arial"/>
-              </a:rPr>
-              <a:t>Los wearables capturan señales vitales continuas, pero el usuario solo ve números que no sabe traducir en acción. El hardware existe; la inteligencia que decide, no.</a:t>
-            </a:r>
-          </a:p>
-        </p:txBody>
-      </p:sp>
-      <p:sp>
-        <p:nvSpPr>
-          <p:cNvPr id="6" name="TextBox 5"/>
-          <p:cNvSpPr txBox="1"/>
-          <p:nvPr/>
-        </p:nvSpPr>
-        <p:spPr>
-          <a:xfrm>
-            <a:off x="9509760" y="2286000"/>
-            <a:ext cx="2286000" cy="2011680"/>
-          </a:xfrm>
-          <a:prstGeom prst="rect">
-            <a:avLst/>
-          </a:prstGeom>
-          <a:noFill/>
-        </p:spPr>
-        <p:txBody>
-          <a:bodyPr wrap="square" anchor="ctr" lIns="0" rIns="0" tIns="0" bIns="0">
-            <a:spAutoFit/>
-          </a:bodyPr>
-          <a:lstStyle/>
-          <a:p>
-            <a:r>
-              <a:rPr sz="7000" b="1">
-                <a:solidFill>
-                  <a:srgbClr val="00C8B4"/>
-                </a:solidFill>
-                <a:latin typeface="Arial"/>
-              </a:rPr>
-              <a:t>100k</a:t>
-            </a:r>
-          </a:p>
-        </p:txBody>
-      </p:sp>
-      <p:sp>
-        <p:nvSpPr>
-          <p:cNvPr id="7" name="TextBox 6"/>
-          <p:cNvSpPr txBox="1"/>
-          <p:nvPr/>
-        </p:nvSpPr>
-        <p:spPr>
-          <a:xfrm>
-            <a:off x="9509760" y="3749039"/>
-            <a:ext cx="2286000" cy="365760"/>
-          </a:xfrm>
-          <a:prstGeom prst="rect">
-            <a:avLst/>
-          </a:prstGeom>
-          <a:noFill/>
-        </p:spPr>
-        <p:txBody>
-          <a:bodyPr wrap="square" anchor="t" lIns="0" rIns="0" tIns="0" bIns="0">
-            <a:spAutoFit/>
-          </a:bodyPr>
-          <a:lstStyle/>
-          <a:p>
-            <a:r>
-              <a:rPr sz="1200" b="0">
-                <a:solidFill>
-                  <a:srgbClr val="5A7288"/>
-                </a:solidFill>
-                <a:latin typeface="Arial"/>
-              </a:rPr>
-              <a:t>señales / día sin usar</a:t>
-            </a:r>
-          </a:p>
-        </p:txBody>
-      </p:sp>
-      <p:sp>
-        <p:nvSpPr>
-          <p:cNvPr id="8" name="TextBox 7"/>
-          <p:cNvSpPr txBox="1"/>
-          <p:nvPr/>
-        </p:nvSpPr>
-        <p:spPr>
-          <a:xfrm>
-            <a:off x="914400" y="6446520"/>
+              <a:rPr sz="1300" b="0">
+                <a:solidFill>
+                  <a:srgbClr val="8AA0B2"/>
+                </a:solidFill>
+                <a:latin typeface="Arial"/>
+              </a:rPr>
+              <a:t>señales al día que tu wearable captura y deja sin usar</a:t>
+            </a:r>
+          </a:p>
+        </p:txBody>
+      </p:sp>
+      <p:sp>
+        <p:nvSpPr>
+          <p:cNvPr id="8" name="Rounded Rectangle 7"/>
+          <p:cNvSpPr/>
+          <p:nvPr/>
+        </p:nvSpPr>
+        <p:spPr>
+          <a:xfrm>
+            <a:off x="4480560" y="1828800"/>
+            <a:ext cx="3474720" cy="1737360"/>
+          </a:xfrm>
+          <a:prstGeom prst="roundRect">
+            <a:avLst>
+              <a:gd name="adj" fmla="val 6000"/>
+            </a:avLst>
+          </a:prstGeom>
+          <a:solidFill>
+            <a:srgbClr val="101F30"/>
+          </a:solidFill>
+          <a:ln>
+            <a:noFill/>
+          </a:ln>
+          <a:effectLst/>
+        </p:spPr>
+        <p:style>
+          <a:lnRef idx="1">
+            <a:schemeClr val="accent1"/>
+          </a:lnRef>
+          <a:fillRef idx="3">
+            <a:schemeClr val="accent1"/>
+          </a:fillRef>
+          <a:effectRef idx="2">
+            <a:schemeClr val="accent1"/>
+          </a:effectRef>
+          <a:fontRef idx="minor">
+            <a:schemeClr val="lt1"/>
+          </a:fontRef>
+        </p:style>
+        <p:txBody>
+          <a:bodyPr rtlCol="0" anchor="ctr"/>
+          <a:lstStyle/>
+          <a:p>
+            <a:pPr algn="ctr"/>
+          </a:p>
+        </p:txBody>
+      </p:sp>
+      <p:sp>
+        <p:nvSpPr>
+          <p:cNvPr id="9" name="TextBox 8"/>
+          <p:cNvSpPr txBox="1"/>
+          <p:nvPr/>
+        </p:nvSpPr>
+        <p:spPr>
+          <a:xfrm>
+            <a:off x="4754880" y="2148840"/>
+            <a:ext cx="2926079" cy="1005840"/>
+          </a:xfrm>
+          <a:prstGeom prst="rect">
+            <a:avLst/>
+          </a:prstGeom>
+          <a:noFill/>
+        </p:spPr>
+        <p:txBody>
+          <a:bodyPr wrap="square" anchor="t" lIns="0" rIns="0" tIns="0" bIns="0">
+            <a:spAutoFit/>
+          </a:bodyPr>
+          <a:lstStyle/>
+          <a:p>
+            <a:r>
+              <a:rPr sz="4000" b="1">
+                <a:solidFill>
+                  <a:srgbClr val="9BA8F2"/>
+                </a:solidFill>
+                <a:latin typeface="Arial"/>
+              </a:rPr>
+              <a:t>0%</a:t>
+            </a:r>
+          </a:p>
+        </p:txBody>
+      </p:sp>
+      <p:sp>
+        <p:nvSpPr>
+          <p:cNvPr id="10" name="TextBox 9"/>
+          <p:cNvSpPr txBox="1"/>
+          <p:nvPr/>
+        </p:nvSpPr>
+        <p:spPr>
+          <a:xfrm>
+            <a:off x="4754880" y="3108960"/>
+            <a:ext cx="2926079" cy="822960"/>
+          </a:xfrm>
+          <a:prstGeom prst="rect">
+            <a:avLst/>
+          </a:prstGeom>
+          <a:noFill/>
+        </p:spPr>
+        <p:txBody>
+          <a:bodyPr wrap="square" anchor="t" lIns="0" rIns="0" tIns="0" bIns="0">
+            <a:spAutoFit/>
+          </a:bodyPr>
+          <a:lstStyle/>
+          <a:p>
+            <a:pPr>
+              <a:lnSpc>
+                <a:spcPct val="110000"/>
+              </a:lnSpc>
+            </a:pPr>
+            <a:r>
+              <a:rPr sz="1300" b="0">
+                <a:solidFill>
+                  <a:srgbClr val="8AA0B2"/>
+                </a:solidFill>
+                <a:latin typeface="Arial"/>
+              </a:rPr>
+              <a:t>de esa señal se vuelve una alerta accionable a tiempo</a:t>
+            </a:r>
+          </a:p>
+        </p:txBody>
+      </p:sp>
+      <p:sp>
+        <p:nvSpPr>
+          <p:cNvPr id="11" name="Rounded Rectangle 10"/>
+          <p:cNvSpPr/>
+          <p:nvPr/>
+        </p:nvSpPr>
+        <p:spPr>
+          <a:xfrm>
+            <a:off x="8321040" y="1828800"/>
+            <a:ext cx="3474720" cy="1737360"/>
+          </a:xfrm>
+          <a:prstGeom prst="roundRect">
+            <a:avLst>
+              <a:gd name="adj" fmla="val 6000"/>
+            </a:avLst>
+          </a:prstGeom>
+          <a:solidFill>
+            <a:srgbClr val="101F30"/>
+          </a:solidFill>
+          <a:ln>
+            <a:noFill/>
+          </a:ln>
+          <a:effectLst/>
+        </p:spPr>
+        <p:style>
+          <a:lnRef idx="1">
+            <a:schemeClr val="accent1"/>
+          </a:lnRef>
+          <a:fillRef idx="3">
+            <a:schemeClr val="accent1"/>
+          </a:fillRef>
+          <a:effectRef idx="2">
+            <a:schemeClr val="accent1"/>
+          </a:effectRef>
+          <a:fontRef idx="minor">
+            <a:schemeClr val="lt1"/>
+          </a:fontRef>
+        </p:style>
+        <p:txBody>
+          <a:bodyPr rtlCol="0" anchor="ctr"/>
+          <a:lstStyle/>
+          <a:p>
+            <a:pPr algn="ctr"/>
+          </a:p>
+        </p:txBody>
+      </p:sp>
+      <p:sp>
+        <p:nvSpPr>
+          <p:cNvPr id="12" name="TextBox 11"/>
+          <p:cNvSpPr txBox="1"/>
+          <p:nvPr/>
+        </p:nvSpPr>
+        <p:spPr>
+          <a:xfrm>
+            <a:off x="8595360" y="2148840"/>
+            <a:ext cx="2926079" cy="1005840"/>
+          </a:xfrm>
+          <a:prstGeom prst="rect">
+            <a:avLst/>
+          </a:prstGeom>
+          <a:noFill/>
+        </p:spPr>
+        <p:txBody>
+          <a:bodyPr wrap="square" anchor="t" lIns="0" rIns="0" tIns="0" bIns="0">
+            <a:spAutoFit/>
+          </a:bodyPr>
+          <a:lstStyle/>
+          <a:p>
+            <a:r>
+              <a:rPr sz="4000" b="1">
+                <a:solidFill>
+                  <a:srgbClr val="F0687A"/>
+                </a:solidFill>
+                <a:latin typeface="Arial"/>
+              </a:rPr>
+              <a:t>1 app</a:t>
+            </a:r>
+          </a:p>
+        </p:txBody>
+      </p:sp>
+      <p:sp>
+        <p:nvSpPr>
+          <p:cNvPr id="13" name="TextBox 12"/>
+          <p:cNvSpPr txBox="1"/>
+          <p:nvPr/>
+        </p:nvSpPr>
+        <p:spPr>
+          <a:xfrm>
+            <a:off x="8595360" y="3108960"/>
+            <a:ext cx="2926079" cy="822960"/>
+          </a:xfrm>
+          <a:prstGeom prst="rect">
+            <a:avLst/>
+          </a:prstGeom>
+          <a:noFill/>
+        </p:spPr>
+        <p:txBody>
+          <a:bodyPr wrap="square" anchor="t" lIns="0" rIns="0" tIns="0" bIns="0">
+            <a:spAutoFit/>
+          </a:bodyPr>
+          <a:lstStyle/>
+          <a:p>
+            <a:pPr>
+              <a:lnSpc>
+                <a:spcPct val="110000"/>
+              </a:lnSpc>
+            </a:pPr>
+            <a:r>
+              <a:rPr sz="1300" b="0">
+                <a:solidFill>
+                  <a:srgbClr val="8AA0B2"/>
+                </a:solidFill>
+                <a:latin typeface="Arial"/>
+              </a:rPr>
+              <a:t>BioPulse: la que por fin te dice qué hacer</a:t>
+            </a:r>
+          </a:p>
+        </p:txBody>
+      </p:sp>
+      <p:sp>
+        <p:nvSpPr>
+          <p:cNvPr id="14" name="TextBox 13"/>
+          <p:cNvSpPr txBox="1"/>
+          <p:nvPr/>
+        </p:nvSpPr>
+        <p:spPr>
+          <a:xfrm>
+            <a:off x="640080" y="4526280"/>
+            <a:ext cx="10881360" cy="1463040"/>
+          </a:xfrm>
+          <a:prstGeom prst="rect">
+            <a:avLst/>
+          </a:prstGeom>
+          <a:noFill/>
+        </p:spPr>
+        <p:txBody>
+          <a:bodyPr wrap="square" anchor="t" lIns="0" rIns="0" tIns="0" bIns="0">
+            <a:spAutoFit/>
+          </a:bodyPr>
+          <a:lstStyle/>
+          <a:p>
+            <a:pPr>
+              <a:lnSpc>
+                <a:spcPct val="120000"/>
+              </a:lnSpc>
+            </a:pPr>
+            <a:r>
+              <a:rPr sz="1500" b="0">
+                <a:solidFill>
+                  <a:srgbClr val="8AA0B2"/>
+                </a:solidFill>
+                <a:latin typeface="Arial"/>
+              </a:rPr>
+              <a:t>El hardware existe. La inteligencia que decide, no.</a:t>
+            </a:r>
+          </a:p>
+        </p:txBody>
+      </p:sp>
+      <p:sp>
+        <p:nvSpPr>
+          <p:cNvPr id="15" name="TextBox 14"/>
+          <p:cNvSpPr txBox="1"/>
+          <p:nvPr/>
+        </p:nvSpPr>
+        <p:spPr>
+          <a:xfrm>
+            <a:off x="640080" y="6473952"/>
             <a:ext cx="7315200" cy="274320"/>
           </a:xfrm>
           <a:prstGeom prst="rect">
@@ -4701,7 +5183,7 @@
             <a:r>
               <a:rPr sz="900" b="0">
                 <a:solidFill>
-                  <a:srgbClr val="5A7288"/>
+                  <a:srgbClr val="8AA0B2"/>
                 </a:solidFill>
                 <a:latin typeface="Arial"/>
               </a:rPr>
@@ -4712,14 +5194,14 @@
       </p:sp>
       <p:sp>
         <p:nvSpPr>
-          <p:cNvPr id="9" name="TextBox 8"/>
-          <p:cNvSpPr txBox="1"/>
-          <p:nvPr/>
-        </p:nvSpPr>
-        <p:spPr>
-          <a:xfrm>
-            <a:off x="10607040" y="6446520"/>
-            <a:ext cx="822960" cy="274320"/>
+          <p:cNvPr id="16" name="TextBox 15"/>
+          <p:cNvSpPr txBox="1"/>
+          <p:nvPr/>
+        </p:nvSpPr>
+        <p:spPr>
+          <a:xfrm>
+            <a:off x="11155680" y="6473952"/>
+            <a:ext cx="548640" cy="274320"/>
           </a:xfrm>
           <a:prstGeom prst="rect">
             <a:avLst/>
@@ -4735,7 +5217,7 @@
             <a:r>
               <a:rPr sz="900" b="0">
                 <a:solidFill>
-                  <a:srgbClr val="5A7288"/>
+                  <a:srgbClr val="8AA0B2"/>
                 </a:solidFill>
                 <a:latin typeface="Arial"/>
               </a:rPr>
@@ -4777,7 +5259,7 @@
             <a:avLst/>
           </a:prstGeom>
           <a:solidFill>
-            <a:srgbClr val="050A10"/>
+            <a:srgbClr val="0D1B2A"/>
           </a:solidFill>
           <a:ln>
             <a:noFill/>
@@ -4814,8 +5296,8 @@
         </p:nvSpPr>
         <p:spPr>
           <a:xfrm>
-            <a:off x="914400" y="685800"/>
-            <a:ext cx="8229600" cy="365760"/>
+            <a:off x="640080" y="457200"/>
+            <a:ext cx="10881360" cy="274320"/>
           </a:xfrm>
           <a:prstGeom prst="rect">
             <a:avLst/>
@@ -4831,7 +5313,7 @@
             <a:r>
               <a:rPr sz="1200" b="1">
                 <a:solidFill>
-                  <a:srgbClr val="00C8B4"/>
+                  <a:srgbClr val="4FD8C4"/>
                 </a:solidFill>
                 <a:latin typeface="Arial"/>
               </a:rPr>
@@ -4848,8 +5330,8 @@
         </p:nvSpPr>
         <p:spPr>
           <a:xfrm>
-            <a:off x="914400" y="1234440"/>
-            <a:ext cx="10332720" cy="2194560"/>
+            <a:off x="640080" y="914400"/>
+            <a:ext cx="10881360" cy="1005840"/>
           </a:xfrm>
           <a:prstGeom prst="rect">
             <a:avLst/>
@@ -4864,13 +5346,13 @@
           <a:p>
             <a:pPr>
               <a:lnSpc>
-                <a:spcPct val="104000"/>
+                <a:spcPct val="102000"/>
               </a:lnSpc>
             </a:pPr>
             <a:r>
-              <a:rPr sz="4200" b="1">
-                <a:solidFill>
-                  <a:srgbClr val="F2F6F8"/>
+              <a:rPr sz="3400" b="1">
+                <a:solidFill>
+                  <a:srgbClr val="EAF2F5"/>
                 </a:solidFill>
                 <a:latin typeface="Arial"/>
               </a:rPr>
@@ -4882,31 +5364,64 @@
       </p:sp>
       <p:sp>
         <p:nvSpPr>
-          <p:cNvPr id="5" name="Rounded Rectangle 4"/>
+          <p:cNvPr id="5" name="TextBox 4"/>
+          <p:cNvSpPr txBox="1"/>
+          <p:nvPr/>
+        </p:nvSpPr>
+        <p:spPr>
+          <a:xfrm>
+            <a:off x="640080" y="1920240"/>
+            <a:ext cx="10881360" cy="1463040"/>
+          </a:xfrm>
+          <a:prstGeom prst="rect">
+            <a:avLst/>
+          </a:prstGeom>
+          <a:noFill/>
+        </p:spPr>
+        <p:txBody>
+          <a:bodyPr wrap="square" anchor="t" lIns="0" rIns="0" tIns="0" bIns="0">
+            <a:spAutoFit/>
+          </a:bodyPr>
+          <a:lstStyle/>
+          <a:p>
+            <a:pPr>
+              <a:lnSpc>
+                <a:spcPct val="120000"/>
+              </a:lnSpc>
+            </a:pPr>
+            <a:r>
+              <a:rPr sz="1300" b="0">
+                <a:solidFill>
+                  <a:srgbClr val="8AA0B2"/>
+                </a:solidFill>
+                <a:latin typeface="Arial"/>
+              </a:rPr>
+              <a:t>Tu wearable ya sabe que algo va mal. Nosotros lo traducimos a un Índice de Riesgo (0–100) con el por qué y el qué hacer. Sin ser científico, sin ser médico.</a:t>
+            </a:r>
+          </a:p>
+        </p:txBody>
+      </p:sp>
+      <p:sp>
+        <p:nvSpPr>
+          <p:cNvPr id="6" name="Rounded Rectangle 5"/>
           <p:cNvSpPr/>
           <p:nvPr/>
         </p:nvSpPr>
         <p:spPr>
           <a:xfrm>
-            <a:off x="914400" y="3017520"/>
-            <a:ext cx="4937760" cy="2560320"/>
+            <a:off x="640080" y="4023360"/>
+            <a:ext cx="3474720" cy="1737360"/>
           </a:xfrm>
           <a:prstGeom prst="roundRect">
             <a:avLst>
-              <a:gd name="adj" fmla="val 10000"/>
+              <a:gd name="adj" fmla="val 6000"/>
             </a:avLst>
           </a:prstGeom>
           <a:solidFill>
-            <a:srgbClr val="00C8B4">
-              <a:alpha val="12000"/>
-            </a:srgbClr>
+            <a:srgbClr val="101F30"/>
           </a:solidFill>
-          <a:ln w="12700">
-            <a:solidFill>
-              <a:srgbClr val="00C8B4">
-                <a:alpha val="30000"/>
-              </a:srgbClr>
-            </a:solidFill>
+          <a:ln>
+            <a:noFill/>
           </a:ln>
           <a:effectLst/>
         </p:spPr>
@@ -4934,104 +5449,23 @@
       </p:sp>
       <p:sp>
         <p:nvSpPr>
-          <p:cNvPr id="6" name="TextBox 5"/>
-          <p:cNvSpPr txBox="1"/>
-          <p:nvPr/>
-        </p:nvSpPr>
-        <p:spPr>
-          <a:xfrm>
-            <a:off x="1225296" y="3310128"/>
-            <a:ext cx="4315968" cy="457200"/>
-          </a:xfrm>
-          <a:prstGeom prst="rect">
-            <a:avLst/>
-          </a:prstGeom>
-          <a:noFill/>
-        </p:spPr>
-        <p:txBody>
-          <a:bodyPr wrap="square" anchor="t" lIns="0" rIns="0" tIns="0" bIns="0">
-            <a:spAutoFit/>
-          </a:bodyPr>
-          <a:lstStyle/>
-          <a:p>
-            <a:r>
-              <a:rPr sz="1800" b="1">
-                <a:solidFill>
-                  <a:srgbClr val="F2F6F8"/>
-                </a:solidFill>
-                <a:latin typeface="Arial"/>
-              </a:rPr>
-              <a:t>Índice de Riesgo 0–100</a:t>
-            </a:r>
-          </a:p>
-        </p:txBody>
-      </p:sp>
-      <p:sp>
-        <p:nvSpPr>
-          <p:cNvPr id="7" name="TextBox 6"/>
-          <p:cNvSpPr txBox="1"/>
-          <p:nvPr/>
-        </p:nvSpPr>
-        <p:spPr>
-          <a:xfrm>
-            <a:off x="1225296" y="3858768"/>
-            <a:ext cx="4315968" cy="1554480"/>
-          </a:xfrm>
-          <a:prstGeom prst="rect">
-            <a:avLst/>
-          </a:prstGeom>
-          <a:noFill/>
-        </p:spPr>
-        <p:txBody>
-          <a:bodyPr wrap="square" anchor="t" lIns="0" rIns="0" tIns="0" bIns="0">
-            <a:spAutoFit/>
-          </a:bodyPr>
-          <a:lstStyle/>
-          <a:p>
-            <a:pPr>
-              <a:lnSpc>
-                <a:spcPct val="118000"/>
-              </a:lnSpc>
-            </a:pPr>
-            <a:r>
-              <a:rPr sz="1400" b="0">
-                <a:solidFill>
-                  <a:srgbClr val="93A8BC"/>
-                </a:solidFill>
-                <a:latin typeface="Arial"/>
-              </a:rPr>
-              <a:t>Personal (te comparas con tu base, no con un extraño) y explicable: muestra la causa exacta — HRV, RHR, recuperación, sueño.</a:t>
-            </a:r>
-          </a:p>
-        </p:txBody>
-      </p:sp>
-      <p:sp>
-        <p:nvSpPr>
-          <p:cNvPr id="8" name="Rounded Rectangle 7"/>
+          <p:cNvPr id="7" name="Oval 6"/>
           <p:cNvSpPr/>
           <p:nvPr/>
         </p:nvSpPr>
         <p:spPr>
           <a:xfrm>
-            <a:off x="6309360" y="3017520"/>
-            <a:ext cx="4937760" cy="2560320"/>
-          </a:xfrm>
-          <a:prstGeom prst="roundRect">
-            <a:avLst>
-              <a:gd name="adj" fmla="val 10000"/>
-            </a:avLst>
+            <a:off x="914400" y="4297680"/>
+            <a:ext cx="457200" cy="457200"/>
+          </a:xfrm>
+          <a:prstGeom prst="ellipse">
+            <a:avLst/>
           </a:prstGeom>
           <a:solidFill>
-            <a:srgbClr val="F05C7A">
-              <a:alpha val="12000"/>
-            </a:srgbClr>
+            <a:srgbClr val="4FD8C4"/>
           </a:solidFill>
-          <a:ln w="12700">
-            <a:solidFill>
-              <a:srgbClr val="F05C7A">
-                <a:alpha val="30000"/>
-              </a:srgbClr>
-            </a:solidFill>
+          <a:ln>
+            <a:noFill/>
           </a:ln>
           <a:effectLst/>
         </p:spPr>
@@ -5059,48 +5493,48 @@
       </p:sp>
       <p:sp>
         <p:nvSpPr>
+          <p:cNvPr id="8" name="TextBox 7"/>
+          <p:cNvSpPr txBox="1"/>
+          <p:nvPr/>
+        </p:nvSpPr>
+        <p:spPr>
+          <a:xfrm>
+            <a:off x="1508760" y="4251960"/>
+            <a:ext cx="2468879" cy="548640"/>
+          </a:xfrm>
+          <a:prstGeom prst="rect">
+            <a:avLst/>
+          </a:prstGeom>
+          <a:noFill/>
+        </p:spPr>
+        <p:txBody>
+          <a:bodyPr wrap="square" anchor="t" lIns="0" rIns="0" tIns="0" bIns="0">
+            <a:spAutoFit/>
+          </a:bodyPr>
+          <a:lstStyle/>
+          <a:p>
+            <a:r>
+              <a:rPr sz="1600" b="1">
+                <a:solidFill>
+                  <a:srgbClr val="EAF2F5"/>
+                </a:solidFill>
+                <a:latin typeface="Arial"/>
+              </a:rPr>
+              <a:t>Índice de Riesgo 0–100</a:t>
+            </a:r>
+          </a:p>
+        </p:txBody>
+      </p:sp>
+      <p:sp>
+        <p:nvSpPr>
           <p:cNvPr id="9" name="TextBox 8"/>
           <p:cNvSpPr txBox="1"/>
           <p:nvPr/>
         </p:nvSpPr>
         <p:spPr>
           <a:xfrm>
-            <a:off x="6620256" y="3310128"/>
-            <a:ext cx="4315968" cy="457200"/>
-          </a:xfrm>
-          <a:prstGeom prst="rect">
-            <a:avLst/>
-          </a:prstGeom>
-          <a:noFill/>
-        </p:spPr>
-        <p:txBody>
-          <a:bodyPr wrap="square" anchor="t" lIns="0" rIns="0" tIns="0" bIns="0">
-            <a:spAutoFit/>
-          </a:bodyPr>
-          <a:lstStyle/>
-          <a:p>
-            <a:r>
-              <a:rPr sz="1800" b="1">
-                <a:solidFill>
-                  <a:srgbClr val="F2F6F8"/>
-                </a:solidFill>
-                <a:latin typeface="Arial"/>
-              </a:rPr>
-              <a:t>Plan de hoy accionable</a:t>
-            </a:r>
-          </a:p>
-        </p:txBody>
-      </p:sp>
-      <p:sp>
-        <p:nvSpPr>
-          <p:cNvPr id="10" name="TextBox 9"/>
-          <p:cNvSpPr txBox="1"/>
-          <p:nvPr/>
-        </p:nvSpPr>
-        <p:spPr>
-          <a:xfrm>
-            <a:off x="6620256" y="3858768"/>
-            <a:ext cx="4315968" cy="1554480"/>
+            <a:off x="914400" y="4937760"/>
+            <a:ext cx="2926079" cy="731519"/>
           </a:xfrm>
           <a:prstGeom prst="rect">
             <a:avLst/>
@@ -5115,30 +5549,356 @@
           <a:p>
             <a:pPr>
               <a:lnSpc>
-                <a:spcPct val="118000"/>
+                <a:spcPct val="115000"/>
               </a:lnSpc>
             </a:pPr>
             <a:r>
-              <a:rPr sz="1400" b="0">
-                <a:solidFill>
-                  <a:srgbClr val="93A8BC"/>
-                </a:solidFill>
-                <a:latin typeface="Arial"/>
-              </a:rPr>
-              <a:t>Si el riesgo sube, el Coach (IA) entrega 3 pasos concretos con tus métricas del día. Sin ser médico, sabes qué hacer ahora.</a:t>
-            </a:r>
-          </a:p>
-        </p:txBody>
-      </p:sp>
-      <p:sp>
-        <p:nvSpPr>
-          <p:cNvPr id="11" name="TextBox 10"/>
-          <p:cNvSpPr txBox="1"/>
-          <p:nvPr/>
-        </p:nvSpPr>
-        <p:spPr>
-          <a:xfrm>
-            <a:off x="914400" y="6446520"/>
+              <a:rPr sz="1300" b="0">
+                <a:solidFill>
+                  <a:srgbClr val="8AA0B2"/>
+                </a:solidFill>
+                <a:latin typeface="Arial"/>
+              </a:rPr>
+              <a:t>Personal: te comparas con tu propia base, no con un extraño.</a:t>
+            </a:r>
+          </a:p>
+        </p:txBody>
+      </p:sp>
+      <p:sp>
+        <p:nvSpPr>
+          <p:cNvPr id="10" name="Rounded Rectangle 9"/>
+          <p:cNvSpPr/>
+          <p:nvPr/>
+        </p:nvSpPr>
+        <p:spPr>
+          <a:xfrm>
+            <a:off x="4480560" y="4023360"/>
+            <a:ext cx="3474720" cy="1737360"/>
+          </a:xfrm>
+          <a:prstGeom prst="roundRect">
+            <a:avLst>
+              <a:gd name="adj" fmla="val 6000"/>
+            </a:avLst>
+          </a:prstGeom>
+          <a:solidFill>
+            <a:srgbClr val="101F30"/>
+          </a:solidFill>
+          <a:ln>
+            <a:noFill/>
+          </a:ln>
+          <a:effectLst/>
+        </p:spPr>
+        <p:style>
+          <a:lnRef idx="1">
+            <a:schemeClr val="accent1"/>
+          </a:lnRef>
+          <a:fillRef idx="3">
+            <a:schemeClr val="accent1"/>
+          </a:fillRef>
+          <a:effectRef idx="2">
+            <a:schemeClr val="accent1"/>
+          </a:effectRef>
+          <a:fontRef idx="minor">
+            <a:schemeClr val="lt1"/>
+          </a:fontRef>
+        </p:style>
+        <p:txBody>
+          <a:bodyPr rtlCol="0" anchor="ctr"/>
+          <a:lstStyle/>
+          <a:p>
+            <a:pPr algn="ctr"/>
+          </a:p>
+        </p:txBody>
+      </p:sp>
+      <p:sp>
+        <p:nvSpPr>
+          <p:cNvPr id="11" name="Oval 10"/>
+          <p:cNvSpPr/>
+          <p:nvPr/>
+        </p:nvSpPr>
+        <p:spPr>
+          <a:xfrm>
+            <a:off x="4754880" y="4297680"/>
+            <a:ext cx="457200" cy="457200"/>
+          </a:xfrm>
+          <a:prstGeom prst="ellipse">
+            <a:avLst/>
+          </a:prstGeom>
+          <a:solidFill>
+            <a:srgbClr val="9BA8F2"/>
+          </a:solidFill>
+          <a:ln>
+            <a:noFill/>
+          </a:ln>
+          <a:effectLst/>
+        </p:spPr>
+        <p:style>
+          <a:lnRef idx="1">
+            <a:schemeClr val="accent1"/>
+          </a:lnRef>
+          <a:fillRef idx="3">
+            <a:schemeClr val="accent1"/>
+          </a:fillRef>
+          <a:effectRef idx="2">
+            <a:schemeClr val="accent1"/>
+          </a:effectRef>
+          <a:fontRef idx="minor">
+            <a:schemeClr val="lt1"/>
+          </a:fontRef>
+        </p:style>
+        <p:txBody>
+          <a:bodyPr rtlCol="0" anchor="ctr"/>
+          <a:lstStyle/>
+          <a:p>
+            <a:pPr algn="ctr"/>
+          </a:p>
+        </p:txBody>
+      </p:sp>
+      <p:sp>
+        <p:nvSpPr>
+          <p:cNvPr id="12" name="TextBox 11"/>
+          <p:cNvSpPr txBox="1"/>
+          <p:nvPr/>
+        </p:nvSpPr>
+        <p:spPr>
+          <a:xfrm>
+            <a:off x="5349240" y="4251960"/>
+            <a:ext cx="2468879" cy="548640"/>
+          </a:xfrm>
+          <a:prstGeom prst="rect">
+            <a:avLst/>
+          </a:prstGeom>
+          <a:noFill/>
+        </p:spPr>
+        <p:txBody>
+          <a:bodyPr wrap="square" anchor="t" lIns="0" rIns="0" tIns="0" bIns="0">
+            <a:spAutoFit/>
+          </a:bodyPr>
+          <a:lstStyle/>
+          <a:p>
+            <a:r>
+              <a:rPr sz="1600" b="1">
+                <a:solidFill>
+                  <a:srgbClr val="EAF2F5"/>
+                </a:solidFill>
+                <a:latin typeface="Arial"/>
+              </a:rPr>
+              <a:t>Explicable</a:t>
+            </a:r>
+          </a:p>
+        </p:txBody>
+      </p:sp>
+      <p:sp>
+        <p:nvSpPr>
+          <p:cNvPr id="13" name="TextBox 12"/>
+          <p:cNvSpPr txBox="1"/>
+          <p:nvPr/>
+        </p:nvSpPr>
+        <p:spPr>
+          <a:xfrm>
+            <a:off x="4754880" y="4937760"/>
+            <a:ext cx="2926079" cy="731519"/>
+          </a:xfrm>
+          <a:prstGeom prst="rect">
+            <a:avLst/>
+          </a:prstGeom>
+          <a:noFill/>
+        </p:spPr>
+        <p:txBody>
+          <a:bodyPr wrap="square" anchor="t" lIns="0" rIns="0" tIns="0" bIns="0">
+            <a:spAutoFit/>
+          </a:bodyPr>
+          <a:lstStyle/>
+          <a:p>
+            <a:pPr>
+              <a:lnSpc>
+                <a:spcPct val="115000"/>
+              </a:lnSpc>
+            </a:pPr>
+            <a:r>
+              <a:rPr sz="1300" b="0">
+                <a:solidFill>
+                  <a:srgbClr val="8AA0B2"/>
+                </a:solidFill>
+                <a:latin typeface="Arial"/>
+              </a:rPr>
+              <a:t>Muestra la causa exacta — HRV, RHR, recuperación, sueño.</a:t>
+            </a:r>
+          </a:p>
+        </p:txBody>
+      </p:sp>
+      <p:sp>
+        <p:nvSpPr>
+          <p:cNvPr id="14" name="Rounded Rectangle 13"/>
+          <p:cNvSpPr/>
+          <p:nvPr/>
+        </p:nvSpPr>
+        <p:spPr>
+          <a:xfrm>
+            <a:off x="8321040" y="4023360"/>
+            <a:ext cx="3474720" cy="1737360"/>
+          </a:xfrm>
+          <a:prstGeom prst="roundRect">
+            <a:avLst>
+              <a:gd name="adj" fmla="val 6000"/>
+            </a:avLst>
+          </a:prstGeom>
+          <a:solidFill>
+            <a:srgbClr val="101F30"/>
+          </a:solidFill>
+          <a:ln>
+            <a:noFill/>
+          </a:ln>
+          <a:effectLst/>
+        </p:spPr>
+        <p:style>
+          <a:lnRef idx="1">
+            <a:schemeClr val="accent1"/>
+          </a:lnRef>
+          <a:fillRef idx="3">
+            <a:schemeClr val="accent1"/>
+          </a:fillRef>
+          <a:effectRef idx="2">
+            <a:schemeClr val="accent1"/>
+          </a:effectRef>
+          <a:fontRef idx="minor">
+            <a:schemeClr val="lt1"/>
+          </a:fontRef>
+        </p:style>
+        <p:txBody>
+          <a:bodyPr rtlCol="0" anchor="ctr"/>
+          <a:lstStyle/>
+          <a:p>
+            <a:pPr algn="ctr"/>
+          </a:p>
+        </p:txBody>
+      </p:sp>
+      <p:sp>
+        <p:nvSpPr>
+          <p:cNvPr id="15" name="Oval 14"/>
+          <p:cNvSpPr/>
+          <p:nvPr/>
+        </p:nvSpPr>
+        <p:spPr>
+          <a:xfrm>
+            <a:off x="8595360" y="4297680"/>
+            <a:ext cx="457200" cy="457200"/>
+          </a:xfrm>
+          <a:prstGeom prst="ellipse">
+            <a:avLst/>
+          </a:prstGeom>
+          <a:solidFill>
+            <a:srgbClr val="F0687A"/>
+          </a:solidFill>
+          <a:ln>
+            <a:noFill/>
+          </a:ln>
+          <a:effectLst/>
+        </p:spPr>
+        <p:style>
+          <a:lnRef idx="1">
+            <a:schemeClr val="accent1"/>
+          </a:lnRef>
+          <a:fillRef idx="3">
+            <a:schemeClr val="accent1"/>
+          </a:fillRef>
+          <a:effectRef idx="2">
+            <a:schemeClr val="accent1"/>
+          </a:effectRef>
+          <a:fontRef idx="minor">
+            <a:schemeClr val="lt1"/>
+          </a:fontRef>
+        </p:style>
+        <p:txBody>
+          <a:bodyPr rtlCol="0" anchor="ctr"/>
+          <a:lstStyle/>
+          <a:p>
+            <a:pPr algn="ctr"/>
+          </a:p>
+        </p:txBody>
+      </p:sp>
+      <p:sp>
+        <p:nvSpPr>
+          <p:cNvPr id="16" name="TextBox 15"/>
+          <p:cNvSpPr txBox="1"/>
+          <p:nvPr/>
+        </p:nvSpPr>
+        <p:spPr>
+          <a:xfrm>
+            <a:off x="9189719" y="4251960"/>
+            <a:ext cx="2468879" cy="548640"/>
+          </a:xfrm>
+          <a:prstGeom prst="rect">
+            <a:avLst/>
+          </a:prstGeom>
+          <a:noFill/>
+        </p:spPr>
+        <p:txBody>
+          <a:bodyPr wrap="square" anchor="t" lIns="0" rIns="0" tIns="0" bIns="0">
+            <a:spAutoFit/>
+          </a:bodyPr>
+          <a:lstStyle/>
+          <a:p>
+            <a:r>
+              <a:rPr sz="1600" b="1">
+                <a:solidFill>
+                  <a:srgbClr val="EAF2F5"/>
+                </a:solidFill>
+                <a:latin typeface="Arial"/>
+              </a:rPr>
+              <a:t>Plan de hoy (IA)</a:t>
+            </a:r>
+          </a:p>
+        </p:txBody>
+      </p:sp>
+      <p:sp>
+        <p:nvSpPr>
+          <p:cNvPr id="17" name="TextBox 16"/>
+          <p:cNvSpPr txBox="1"/>
+          <p:nvPr/>
+        </p:nvSpPr>
+        <p:spPr>
+          <a:xfrm>
+            <a:off x="8595360" y="4937760"/>
+            <a:ext cx="2926079" cy="731519"/>
+          </a:xfrm>
+          <a:prstGeom prst="rect">
+            <a:avLst/>
+          </a:prstGeom>
+          <a:noFill/>
+        </p:spPr>
+        <p:txBody>
+          <a:bodyPr wrap="square" anchor="t" lIns="0" rIns="0" tIns="0" bIns="0">
+            <a:spAutoFit/>
+          </a:bodyPr>
+          <a:lstStyle/>
+          <a:p>
+            <a:pPr>
+              <a:lnSpc>
+                <a:spcPct val="115000"/>
+              </a:lnSpc>
+            </a:pPr>
+            <a:r>
+              <a:rPr sz="1300" b="0">
+                <a:solidFill>
+                  <a:srgbClr val="8AA0B2"/>
+                </a:solidFill>
+                <a:latin typeface="Arial"/>
+              </a:rPr>
+              <a:t>Si el riesgo sube, el Coach entrega 3 pasos accionables con tus métricas.</a:t>
+            </a:r>
+          </a:p>
+        </p:txBody>
+      </p:sp>
+      <p:sp>
+        <p:nvSpPr>
+          <p:cNvPr id="18" name="TextBox 17"/>
+          <p:cNvSpPr txBox="1"/>
+          <p:nvPr/>
+        </p:nvSpPr>
+        <p:spPr>
+          <a:xfrm>
+            <a:off x="640080" y="6473952"/>
             <a:ext cx="7315200" cy="274320"/>
           </a:xfrm>
           <a:prstGeom prst="rect">
@@ -5155,7 +5915,7 @@
             <a:r>
               <a:rPr sz="900" b="0">
                 <a:solidFill>
-                  <a:srgbClr val="5A7288"/>
+                  <a:srgbClr val="8AA0B2"/>
                 </a:solidFill>
                 <a:latin typeface="Arial"/>
               </a:rPr>
@@ -5166,14 +5926,14 @@
       </p:sp>
       <p:sp>
         <p:nvSpPr>
-          <p:cNvPr id="12" name="TextBox 11"/>
-          <p:cNvSpPr txBox="1"/>
-          <p:nvPr/>
-        </p:nvSpPr>
-        <p:spPr>
-          <a:xfrm>
-            <a:off x="10607040" y="6446520"/>
-            <a:ext cx="822960" cy="274320"/>
+          <p:cNvPr id="19" name="TextBox 18"/>
+          <p:cNvSpPr txBox="1"/>
+          <p:nvPr/>
+        </p:nvSpPr>
+        <p:spPr>
+          <a:xfrm>
+            <a:off x="11155680" y="6473952"/>
+            <a:ext cx="548640" cy="274320"/>
           </a:xfrm>
           <a:prstGeom prst="rect">
             <a:avLst/>
@@ -5189,7 +5949,7 @@
             <a:r>
               <a:rPr sz="900" b="0">
                 <a:solidFill>
-                  <a:srgbClr val="5A7288"/>
+                  <a:srgbClr val="8AA0B2"/>
                 </a:solidFill>
                 <a:latin typeface="Arial"/>
               </a:rPr>
@@ -5231,7 +5991,7 @@
             <a:avLst/>
           </a:prstGeom>
           <a:solidFill>
-            <a:srgbClr val="050A10"/>
+            <a:srgbClr val="0D1B2A"/>
           </a:solidFill>
           <a:ln>
             <a:noFill/>
@@ -5268,8 +6028,8 @@
         </p:nvSpPr>
         <p:spPr>
           <a:xfrm>
-            <a:off x="914400" y="685800"/>
-            <a:ext cx="8229600" cy="365760"/>
+            <a:off x="640080" y="457200"/>
+            <a:ext cx="10881360" cy="274320"/>
           </a:xfrm>
           <a:prstGeom prst="rect">
             <a:avLst/>
@@ -5285,7 +6045,7 @@
             <a:r>
               <a:rPr sz="1200" b="1">
                 <a:solidFill>
-                  <a:srgbClr val="00C8B4"/>
+                  <a:srgbClr val="4FD8C4"/>
                 </a:solidFill>
                 <a:latin typeface="Arial"/>
               </a:rPr>
@@ -5302,8 +6062,8 @@
         </p:nvSpPr>
         <p:spPr>
           <a:xfrm>
-            <a:off x="914400" y="1097280"/>
-            <a:ext cx="10332720" cy="2194560"/>
+            <a:off x="640080" y="914400"/>
+            <a:ext cx="10881360" cy="1005840"/>
           </a:xfrm>
           <a:prstGeom prst="rect">
             <a:avLst/>
@@ -5318,13 +6078,13 @@
           <a:p>
             <a:pPr>
               <a:lnSpc>
-                <a:spcPct val="104000"/>
+                <a:spcPct val="102000"/>
               </a:lnSpc>
             </a:pPr>
             <a:r>
-              <a:rPr sz="3800" b="1">
-                <a:solidFill>
-                  <a:srgbClr val="F2F6F8"/>
+              <a:rPr sz="3400" b="1">
+                <a:solidFill>
+                  <a:srgbClr val="EAF2F5"/>
                 </a:solidFill>
                 <a:latin typeface="Arial"/>
               </a:rPr>
@@ -5335,31 +6095,64 @@
       </p:sp>
       <p:sp>
         <p:nvSpPr>
-          <p:cNvPr id="5" name="Rounded Rectangle 4"/>
+          <p:cNvPr id="5" name="TextBox 4"/>
+          <p:cNvSpPr txBox="1"/>
+          <p:nvPr/>
+        </p:nvSpPr>
+        <p:spPr>
+          <a:xfrm>
+            <a:off x="640080" y="1920240"/>
+            <a:ext cx="10881360" cy="1463040"/>
+          </a:xfrm>
+          <a:prstGeom prst="rect">
+            <a:avLst/>
+          </a:prstGeom>
+          <a:noFill/>
+        </p:spPr>
+        <p:txBody>
+          <a:bodyPr wrap="square" anchor="t" lIns="0" rIns="0" tIns="0" bIns="0">
+            <a:spAutoFit/>
+          </a:bodyPr>
+          <a:lstStyle/>
+          <a:p>
+            <a:pPr>
+              <a:lnSpc>
+                <a:spcPct val="120000"/>
+              </a:lnSpc>
+            </a:pPr>
+            <a:r>
+              <a:rPr sz="1300" b="0">
+                <a:solidFill>
+                  <a:srgbClr val="8AA0B2"/>
+                </a:solidFill>
+                <a:latin typeface="Arial"/>
+              </a:rPr>
+              <a:t>Una sola pantalla. El riesgo de hoy, por qué subió y qué hacer ahora mismo.</a:t>
+            </a:r>
+          </a:p>
+        </p:txBody>
+      </p:sp>
+      <p:sp>
+        <p:nvSpPr>
+          <p:cNvPr id="6" name="Rounded Rectangle 5"/>
           <p:cNvSpPr/>
           <p:nvPr/>
         </p:nvSpPr>
         <p:spPr>
           <a:xfrm>
-            <a:off x="914400" y="2331720"/>
-            <a:ext cx="2670048" cy="2286000"/>
+            <a:off x="640080" y="4023360"/>
+            <a:ext cx="2670048" cy="1737360"/>
           </a:xfrm>
           <a:prstGeom prst="roundRect">
             <a:avLst>
-              <a:gd name="adj" fmla="val 10000"/>
+              <a:gd name="adj" fmla="val 6000"/>
             </a:avLst>
           </a:prstGeom>
           <a:solidFill>
-            <a:srgbClr val="00C8B4">
-              <a:alpha val="12000"/>
-            </a:srgbClr>
+            <a:srgbClr val="101F30"/>
           </a:solidFill>
-          <a:ln w="12700">
-            <a:solidFill>
-              <a:srgbClr val="00C8B4">
-                <a:alpha val="30000"/>
-              </a:srgbClr>
-            </a:solidFill>
+          <a:ln>
+            <a:noFill/>
           </a:ln>
           <a:effectLst/>
         </p:spPr>
@@ -5387,104 +6180,23 @@
       </p:sp>
       <p:sp>
         <p:nvSpPr>
-          <p:cNvPr id="6" name="TextBox 5"/>
-          <p:cNvSpPr txBox="1"/>
-          <p:nvPr/>
-        </p:nvSpPr>
-        <p:spPr>
-          <a:xfrm>
-            <a:off x="1225296" y="2624328"/>
-            <a:ext cx="2048256" cy="457200"/>
-          </a:xfrm>
-          <a:prstGeom prst="rect">
-            <a:avLst/>
-          </a:prstGeom>
-          <a:noFill/>
-        </p:spPr>
-        <p:txBody>
-          <a:bodyPr wrap="square" anchor="t" lIns="0" rIns="0" tIns="0" bIns="0">
-            <a:spAutoFit/>
-          </a:bodyPr>
-          <a:lstStyle/>
-          <a:p>
-            <a:r>
-              <a:rPr sz="1600" b="1">
-                <a:solidFill>
-                  <a:srgbClr val="F2F6F8"/>
-                </a:solidFill>
-                <a:latin typeface="Arial"/>
-              </a:rPr>
-              <a:t>BioScore</a:t>
-            </a:r>
-          </a:p>
-        </p:txBody>
-      </p:sp>
-      <p:sp>
-        <p:nvSpPr>
-          <p:cNvPr id="7" name="TextBox 6"/>
-          <p:cNvSpPr txBox="1"/>
-          <p:nvPr/>
-        </p:nvSpPr>
-        <p:spPr>
-          <a:xfrm>
-            <a:off x="1225296" y="3172968"/>
-            <a:ext cx="2048256" cy="1280160"/>
-          </a:xfrm>
-          <a:prstGeom prst="rect">
-            <a:avLst/>
-          </a:prstGeom>
-          <a:noFill/>
-        </p:spPr>
-        <p:txBody>
-          <a:bodyPr wrap="square" anchor="t" lIns="0" rIns="0" tIns="0" bIns="0">
-            <a:spAutoFit/>
-          </a:bodyPr>
-          <a:lstStyle/>
-          <a:p>
-            <a:pPr>
-              <a:lnSpc>
-                <a:spcPct val="118000"/>
-              </a:lnSpc>
-            </a:pPr>
-            <a:r>
-              <a:rPr sz="1250" b="0">
-                <a:solidFill>
-                  <a:srgbClr val="93A8BC"/>
-                </a:solidFill>
-                <a:latin typeface="Arial"/>
-              </a:rPr>
-              <a:t>Bienestar y rendimiento (mayor = mejor), desde HRV, RHR y sueño.</a:t>
-            </a:r>
-          </a:p>
-        </p:txBody>
-      </p:sp>
-      <p:sp>
-        <p:nvSpPr>
-          <p:cNvPr id="8" name="Rounded Rectangle 7"/>
+          <p:cNvPr id="7" name="Oval 6"/>
           <p:cNvSpPr/>
           <p:nvPr/>
         </p:nvSpPr>
         <p:spPr>
           <a:xfrm>
-            <a:off x="3749040" y="2331720"/>
-            <a:ext cx="2670048" cy="2286000"/>
-          </a:xfrm>
-          <a:prstGeom prst="roundRect">
-            <a:avLst>
-              <a:gd name="adj" fmla="val 10000"/>
-            </a:avLst>
+            <a:off x="914400" y="4297680"/>
+            <a:ext cx="457200" cy="457200"/>
+          </a:xfrm>
+          <a:prstGeom prst="ellipse">
+            <a:avLst/>
           </a:prstGeom>
           <a:solidFill>
-            <a:srgbClr val="F05C7A">
-              <a:alpha val="12000"/>
-            </a:srgbClr>
+            <a:srgbClr val="4FD8C4"/>
           </a:solidFill>
-          <a:ln w="12700">
-            <a:solidFill>
-              <a:srgbClr val="F05C7A">
-                <a:alpha val="30000"/>
-              </a:srgbClr>
-            </a:solidFill>
+          <a:ln>
+            <a:noFill/>
           </a:ln>
           <a:effectLst/>
         </p:spPr>
@@ -5512,48 +6224,48 @@
       </p:sp>
       <p:sp>
         <p:nvSpPr>
+          <p:cNvPr id="8" name="TextBox 7"/>
+          <p:cNvSpPr txBox="1"/>
+          <p:nvPr/>
+        </p:nvSpPr>
+        <p:spPr>
+          <a:xfrm>
+            <a:off x="1508760" y="4251960"/>
+            <a:ext cx="1664207" cy="548640"/>
+          </a:xfrm>
+          <a:prstGeom prst="rect">
+            <a:avLst/>
+          </a:prstGeom>
+          <a:noFill/>
+        </p:spPr>
+        <p:txBody>
+          <a:bodyPr wrap="square" anchor="t" lIns="0" rIns="0" tIns="0" bIns="0">
+            <a:spAutoFit/>
+          </a:bodyPr>
+          <a:lstStyle/>
+          <a:p>
+            <a:r>
+              <a:rPr sz="1500" b="1">
+                <a:solidFill>
+                  <a:srgbClr val="EAF2F5"/>
+                </a:solidFill>
+                <a:latin typeface="Arial"/>
+              </a:rPr>
+              <a:t>BioScore</a:t>
+            </a:r>
+          </a:p>
+        </p:txBody>
+      </p:sp>
+      <p:sp>
+        <p:nvSpPr>
           <p:cNvPr id="9" name="TextBox 8"/>
           <p:cNvSpPr txBox="1"/>
           <p:nvPr/>
         </p:nvSpPr>
         <p:spPr>
           <a:xfrm>
-            <a:off x="4059936" y="2624328"/>
-            <a:ext cx="2048256" cy="457200"/>
-          </a:xfrm>
-          <a:prstGeom prst="rect">
-            <a:avLst/>
-          </a:prstGeom>
-          <a:noFill/>
-        </p:spPr>
-        <p:txBody>
-          <a:bodyPr wrap="square" anchor="t" lIns="0" rIns="0" tIns="0" bIns="0">
-            <a:spAutoFit/>
-          </a:bodyPr>
-          <a:lstStyle/>
-          <a:p>
-            <a:r>
-              <a:rPr sz="1600" b="1">
-                <a:solidFill>
-                  <a:srgbClr val="F2F6F8"/>
-                </a:solidFill>
-                <a:latin typeface="Arial"/>
-              </a:rPr>
-              <a:t>Índice de Riesgo</a:t>
-            </a:r>
-          </a:p>
-        </p:txBody>
-      </p:sp>
-      <p:sp>
-        <p:nvSpPr>
-          <p:cNvPr id="10" name="TextBox 9"/>
-          <p:cNvSpPr txBox="1"/>
-          <p:nvPr/>
-        </p:nvSpPr>
-        <p:spPr>
-          <a:xfrm>
-            <a:off x="4059936" y="3172968"/>
-            <a:ext cx="2048256" cy="1280160"/>
+            <a:off x="914400" y="4937760"/>
+            <a:ext cx="2121408" cy="731519"/>
           </a:xfrm>
           <a:prstGeom prst="rect">
             <a:avLst/>
@@ -5568,48 +6280,42 @@
           <a:p>
             <a:pPr>
               <a:lnSpc>
-                <a:spcPct val="118000"/>
+                <a:spcPct val="115000"/>
               </a:lnSpc>
             </a:pPr>
             <a:r>
-              <a:rPr sz="1250" b="0">
-                <a:solidFill>
-                  <a:srgbClr val="93A8BC"/>
-                </a:solidFill>
-                <a:latin typeface="Arial"/>
-              </a:rPr>
-              <a:t>Fatiga, anomalía o proceso infeccioso temprano. BAJO / MOD / ALTO.</a:t>
-            </a:r>
-          </a:p>
-        </p:txBody>
-      </p:sp>
-      <p:sp>
-        <p:nvSpPr>
-          <p:cNvPr id="11" name="Rounded Rectangle 10"/>
+              <a:rPr sz="1200" b="0">
+                <a:solidFill>
+                  <a:srgbClr val="8AA0B2"/>
+                </a:solidFill>
+                <a:latin typeface="Arial"/>
+              </a:rPr>
+              <a:t>Bienestar y rendimiento (mayor = mejor) desde HRV, RHR y sueño.</a:t>
+            </a:r>
+          </a:p>
+        </p:txBody>
+      </p:sp>
+      <p:sp>
+        <p:nvSpPr>
+          <p:cNvPr id="10" name="Rounded Rectangle 9"/>
           <p:cNvSpPr/>
           <p:nvPr/>
         </p:nvSpPr>
         <p:spPr>
           <a:xfrm>
-            <a:off x="6583680" y="2331720"/>
-            <a:ext cx="2670048" cy="2286000"/>
+            <a:off x="3474720" y="4023360"/>
+            <a:ext cx="2670048" cy="1737360"/>
           </a:xfrm>
           <a:prstGeom prst="roundRect">
             <a:avLst>
-              <a:gd name="adj" fmla="val 10000"/>
+              <a:gd name="adj" fmla="val 6000"/>
             </a:avLst>
           </a:prstGeom>
           <a:solidFill>
-            <a:srgbClr val="7C84F8">
-              <a:alpha val="12000"/>
-            </a:srgbClr>
+            <a:srgbClr val="101F30"/>
           </a:solidFill>
-          <a:ln w="12700">
-            <a:solidFill>
-              <a:srgbClr val="7C84F8">
-                <a:alpha val="30000"/>
-              </a:srgbClr>
-            </a:solidFill>
+          <a:ln>
+            <a:noFill/>
           </a:ln>
           <a:effectLst/>
         </p:spPr>
@@ -5637,104 +6343,23 @@
       </p:sp>
       <p:sp>
         <p:nvSpPr>
-          <p:cNvPr id="12" name="TextBox 11"/>
-          <p:cNvSpPr txBox="1"/>
-          <p:nvPr/>
-        </p:nvSpPr>
-        <p:spPr>
-          <a:xfrm>
-            <a:off x="6894576" y="2624328"/>
-            <a:ext cx="2048256" cy="457200"/>
-          </a:xfrm>
-          <a:prstGeom prst="rect">
-            <a:avLst/>
-          </a:prstGeom>
-          <a:noFill/>
-        </p:spPr>
-        <p:txBody>
-          <a:bodyPr wrap="square" anchor="t" lIns="0" rIns="0" tIns="0" bIns="0">
-            <a:spAutoFit/>
-          </a:bodyPr>
-          <a:lstStyle/>
-          <a:p>
-            <a:r>
-              <a:rPr sz="1600" b="1">
-                <a:solidFill>
-                  <a:srgbClr val="F2F6F8"/>
-                </a:solidFill>
-                <a:latin typeface="Arial"/>
-              </a:rPr>
-              <a:t>Sleep Score</a:t>
-            </a:r>
-          </a:p>
-        </p:txBody>
-      </p:sp>
-      <p:sp>
-        <p:nvSpPr>
-          <p:cNvPr id="13" name="TextBox 12"/>
-          <p:cNvSpPr txBox="1"/>
-          <p:nvPr/>
-        </p:nvSpPr>
-        <p:spPr>
-          <a:xfrm>
-            <a:off x="6894576" y="3172968"/>
-            <a:ext cx="2048256" cy="1280160"/>
-          </a:xfrm>
-          <a:prstGeom prst="rect">
-            <a:avLst/>
-          </a:prstGeom>
-          <a:noFill/>
-        </p:spPr>
-        <p:txBody>
-          <a:bodyPr wrap="square" anchor="t" lIns="0" rIns="0" tIns="0" bIns="0">
-            <a:spAutoFit/>
-          </a:bodyPr>
-          <a:lstStyle/>
-          <a:p>
-            <a:pPr>
-              <a:lnSpc>
-                <a:spcPct val="118000"/>
-              </a:lnSpc>
-            </a:pPr>
-            <a:r>
-              <a:rPr sz="1250" b="0">
-                <a:solidFill>
-                  <a:srgbClr val="93A8BC"/>
-                </a:solidFill>
-                <a:latin typeface="Arial"/>
-              </a:rPr>
-              <a:t>Sueño predictivo desde métricas reales: profundo, eficiencia, despertares.</a:t>
-            </a:r>
-          </a:p>
-        </p:txBody>
-      </p:sp>
-      <p:sp>
-        <p:nvSpPr>
-          <p:cNvPr id="14" name="Rounded Rectangle 13"/>
+          <p:cNvPr id="11" name="Oval 10"/>
           <p:cNvSpPr/>
           <p:nvPr/>
         </p:nvSpPr>
         <p:spPr>
           <a:xfrm>
-            <a:off x="9418320" y="2331720"/>
-            <a:ext cx="2670048" cy="2286000"/>
-          </a:xfrm>
-          <a:prstGeom prst="roundRect">
-            <a:avLst>
-              <a:gd name="adj" fmla="val 10000"/>
-            </a:avLst>
+            <a:off x="3749039" y="4297680"/>
+            <a:ext cx="457200" cy="457200"/>
+          </a:xfrm>
+          <a:prstGeom prst="ellipse">
+            <a:avLst/>
           </a:prstGeom>
           <a:solidFill>
-            <a:srgbClr val="F2B84B">
-              <a:alpha val="12000"/>
-            </a:srgbClr>
+            <a:srgbClr val="F0687A"/>
           </a:solidFill>
-          <a:ln w="12700">
-            <a:solidFill>
-              <a:srgbClr val="F2B84B">
-                <a:alpha val="30000"/>
-              </a:srgbClr>
-            </a:solidFill>
+          <a:ln>
+            <a:noFill/>
           </a:ln>
           <a:effectLst/>
         </p:spPr>
@@ -5762,48 +6387,48 @@
       </p:sp>
       <p:sp>
         <p:nvSpPr>
-          <p:cNvPr id="15" name="TextBox 14"/>
-          <p:cNvSpPr txBox="1"/>
-          <p:nvPr/>
-        </p:nvSpPr>
-        <p:spPr>
-          <a:xfrm>
-            <a:off x="9729216" y="2624328"/>
-            <a:ext cx="2048256" cy="457200"/>
-          </a:xfrm>
-          <a:prstGeom prst="rect">
-            <a:avLst/>
-          </a:prstGeom>
-          <a:noFill/>
-        </p:spPr>
-        <p:txBody>
-          <a:bodyPr wrap="square" anchor="t" lIns="0" rIns="0" tIns="0" bIns="0">
-            <a:spAutoFit/>
-          </a:bodyPr>
-          <a:lstStyle/>
-          <a:p>
-            <a:r>
-              <a:rPr sz="1600" b="1">
-                <a:solidFill>
-                  <a:srgbClr val="F2F6F8"/>
-                </a:solidFill>
-                <a:latin typeface="Arial"/>
-              </a:rPr>
-              <a:t>Coach IA</a:t>
-            </a:r>
-          </a:p>
-        </p:txBody>
-      </p:sp>
-      <p:sp>
-        <p:nvSpPr>
-          <p:cNvPr id="16" name="TextBox 15"/>
-          <p:cNvSpPr txBox="1"/>
-          <p:nvPr/>
-        </p:nvSpPr>
-        <p:spPr>
-          <a:xfrm>
-            <a:off x="9729216" y="3172968"/>
-            <a:ext cx="2048256" cy="1280160"/>
+          <p:cNvPr id="12" name="TextBox 11"/>
+          <p:cNvSpPr txBox="1"/>
+          <p:nvPr/>
+        </p:nvSpPr>
+        <p:spPr>
+          <a:xfrm>
+            <a:off x="4343400" y="4251960"/>
+            <a:ext cx="1664207" cy="548640"/>
+          </a:xfrm>
+          <a:prstGeom prst="rect">
+            <a:avLst/>
+          </a:prstGeom>
+          <a:noFill/>
+        </p:spPr>
+        <p:txBody>
+          <a:bodyPr wrap="square" anchor="t" lIns="0" rIns="0" tIns="0" bIns="0">
+            <a:spAutoFit/>
+          </a:bodyPr>
+          <a:lstStyle/>
+          <a:p>
+            <a:r>
+              <a:rPr sz="1500" b="1">
+                <a:solidFill>
+                  <a:srgbClr val="EAF2F5"/>
+                </a:solidFill>
+                <a:latin typeface="Arial"/>
+              </a:rPr>
+              <a:t>Índice de Riesgo</a:t>
+            </a:r>
+          </a:p>
+        </p:txBody>
+      </p:sp>
+      <p:sp>
+        <p:nvSpPr>
+          <p:cNvPr id="13" name="TextBox 12"/>
+          <p:cNvSpPr txBox="1"/>
+          <p:nvPr/>
+        </p:nvSpPr>
+        <p:spPr>
+          <a:xfrm>
+            <a:off x="3749039" y="4937760"/>
+            <a:ext cx="2121408" cy="731519"/>
           </a:xfrm>
           <a:prstGeom prst="rect">
             <a:avLst/>
@@ -5818,17 +6443,141 @@
           <a:p>
             <a:pPr>
               <a:lnSpc>
-                <a:spcPct val="118000"/>
+                <a:spcPct val="115000"/>
               </a:lnSpc>
             </a:pPr>
             <a:r>
-              <a:rPr sz="1250" b="0">
-                <a:solidFill>
-                  <a:srgbClr val="93A8BC"/>
-                </a:solidFill>
-                <a:latin typeface="Arial"/>
-              </a:rPr>
-              <a:t>Conversa sobre tus métricas y entrega el Plan de hoy.</a:t>
+              <a:rPr sz="1200" b="0">
+                <a:solidFill>
+                  <a:srgbClr val="8AA0B2"/>
+                </a:solidFill>
+                <a:latin typeface="Arial"/>
+              </a:rPr>
+              <a:t>Fatiga, anomalía o proceso infeccioso temprano. BAJO / MOD / ALTO.</a:t>
+            </a:r>
+          </a:p>
+        </p:txBody>
+      </p:sp>
+      <p:sp>
+        <p:nvSpPr>
+          <p:cNvPr id="14" name="Rounded Rectangle 13"/>
+          <p:cNvSpPr/>
+          <p:nvPr/>
+        </p:nvSpPr>
+        <p:spPr>
+          <a:xfrm>
+            <a:off x="6309360" y="4023360"/>
+            <a:ext cx="2670048" cy="1737360"/>
+          </a:xfrm>
+          <a:prstGeom prst="roundRect">
+            <a:avLst>
+              <a:gd name="adj" fmla="val 6000"/>
+            </a:avLst>
+          </a:prstGeom>
+          <a:solidFill>
+            <a:srgbClr val="101F30"/>
+          </a:solidFill>
+          <a:ln>
+            <a:noFill/>
+          </a:ln>
+          <a:effectLst/>
+        </p:spPr>
+        <p:style>
+          <a:lnRef idx="1">
+            <a:schemeClr val="accent1"/>
+          </a:lnRef>
+          <a:fillRef idx="3">
+            <a:schemeClr val="accent1"/>
+          </a:fillRef>
+          <a:effectRef idx="2">
+            <a:schemeClr val="accent1"/>
+          </a:effectRef>
+          <a:fontRef idx="minor">
+            <a:schemeClr val="lt1"/>
+          </a:fontRef>
+        </p:style>
+        <p:txBody>
+          <a:bodyPr rtlCol="0" anchor="ctr"/>
+          <a:lstStyle/>
+          <a:p>
+            <a:pPr algn="ctr"/>
+          </a:p>
+        </p:txBody>
+      </p:sp>
+      <p:sp>
+        <p:nvSpPr>
+          <p:cNvPr id="15" name="Oval 14"/>
+          <p:cNvSpPr/>
+          <p:nvPr/>
+        </p:nvSpPr>
+        <p:spPr>
+          <a:xfrm>
+            <a:off x="6583680" y="4297680"/>
+            <a:ext cx="457200" cy="457200"/>
+          </a:xfrm>
+          <a:prstGeom prst="ellipse">
+            <a:avLst/>
+          </a:prstGeom>
+          <a:solidFill>
+            <a:srgbClr val="9BA8F2"/>
+          </a:solidFill>
+          <a:ln>
+            <a:noFill/>
+          </a:ln>
+          <a:effectLst/>
+        </p:spPr>
+        <p:style>
+          <a:lnRef idx="1">
+            <a:schemeClr val="accent1"/>
+          </a:lnRef>
+          <a:fillRef idx="3">
+            <a:schemeClr val="accent1"/>
+          </a:fillRef>
+          <a:effectRef idx="2">
+            <a:schemeClr val="accent1"/>
+          </a:effectRef>
+          <a:fontRef idx="minor">
+            <a:schemeClr val="lt1"/>
+          </a:fontRef>
+        </p:style>
+        <p:txBody>
+          <a:bodyPr rtlCol="0" anchor="ctr"/>
+          <a:lstStyle/>
+          <a:p>
+            <a:pPr algn="ctr"/>
+          </a:p>
+        </p:txBody>
+      </p:sp>
+      <p:sp>
+        <p:nvSpPr>
+          <p:cNvPr id="16" name="TextBox 15"/>
+          <p:cNvSpPr txBox="1"/>
+          <p:nvPr/>
+        </p:nvSpPr>
+        <p:spPr>
+          <a:xfrm>
+            <a:off x="7178040" y="4251960"/>
+            <a:ext cx="1664207" cy="548640"/>
+          </a:xfrm>
+          <a:prstGeom prst="rect">
+            <a:avLst/>
+          </a:prstGeom>
+          <a:noFill/>
+        </p:spPr>
+        <p:txBody>
+          <a:bodyPr wrap="square" anchor="t" lIns="0" rIns="0" tIns="0" bIns="0">
+            <a:spAutoFit/>
+          </a:bodyPr>
+          <a:lstStyle/>
+          <a:p>
+            <a:r>
+              <a:rPr sz="1500" b="1">
+                <a:solidFill>
+                  <a:srgbClr val="EAF2F5"/>
+                </a:solidFill>
+                <a:latin typeface="Arial"/>
+              </a:rPr>
+              <a:t>Sleep Score</a:t>
             </a:r>
           </a:p>
         </p:txBody>
@@ -5841,8 +6590,8 @@
         </p:nvSpPr>
         <p:spPr>
           <a:xfrm>
-            <a:off x="914400" y="4983480"/>
-            <a:ext cx="10332720" cy="1005840"/>
+            <a:off x="6583680" y="4937760"/>
+            <a:ext cx="2121408" cy="731519"/>
           </a:xfrm>
           <a:prstGeom prst="rect">
             <a:avLst/>
@@ -5857,30 +6606,193 @@
           <a:p>
             <a:pPr>
               <a:lnSpc>
-                <a:spcPct val="120000"/>
+                <a:spcPct val="115000"/>
               </a:lnSpc>
             </a:pPr>
             <a:r>
-              <a:rPr sz="1400" b="0">
-                <a:solidFill>
-                  <a:srgbClr val="93A8BC"/>
-                </a:solidFill>
-                <a:latin typeface="Arial"/>
-              </a:rPr>
-              <a:t>Diseño de vidrio iOS 26, modo claro/oscuro instantáneo, y respiración guiada de 2 min para calmar el sistema nervioso.</a:t>
-            </a:r>
-          </a:p>
-        </p:txBody>
-      </p:sp>
-      <p:sp>
-        <p:nvSpPr>
-          <p:cNvPr id="18" name="TextBox 17"/>
-          <p:cNvSpPr txBox="1"/>
-          <p:nvPr/>
-        </p:nvSpPr>
-        <p:spPr>
-          <a:xfrm>
-            <a:off x="914400" y="6446520"/>
+              <a:rPr sz="1200" b="0">
+                <a:solidFill>
+                  <a:srgbClr val="8AA0B2"/>
+                </a:solidFill>
+                <a:latin typeface="Arial"/>
+              </a:rPr>
+              <a:t>Sueño predictivo desde métricas reales: profundo, eficiencia, despertares.</a:t>
+            </a:r>
+          </a:p>
+        </p:txBody>
+      </p:sp>
+      <p:sp>
+        <p:nvSpPr>
+          <p:cNvPr id="18" name="Rounded Rectangle 17"/>
+          <p:cNvSpPr/>
+          <p:nvPr/>
+        </p:nvSpPr>
+        <p:spPr>
+          <a:xfrm>
+            <a:off x="8321040" y="4023360"/>
+            <a:ext cx="2670048" cy="1737360"/>
+          </a:xfrm>
+          <a:prstGeom prst="roundRect">
+            <a:avLst>
+              <a:gd name="adj" fmla="val 6000"/>
+            </a:avLst>
+          </a:prstGeom>
+          <a:solidFill>
+            <a:srgbClr val="101F30"/>
+          </a:solidFill>
+          <a:ln>
+            <a:noFill/>
+          </a:ln>
+          <a:effectLst/>
+        </p:spPr>
+        <p:style>
+          <a:lnRef idx="1">
+            <a:schemeClr val="accent1"/>
+          </a:lnRef>
+          <a:fillRef idx="3">
+            <a:schemeClr val="accent1"/>
+          </a:fillRef>
+          <a:effectRef idx="2">
+            <a:schemeClr val="accent1"/>
+          </a:effectRef>
+          <a:fontRef idx="minor">
+            <a:schemeClr val="lt1"/>
+          </a:fontRef>
+        </p:style>
+        <p:txBody>
+          <a:bodyPr rtlCol="0" anchor="ctr"/>
+          <a:lstStyle/>
+          <a:p>
+            <a:pPr algn="ctr"/>
+          </a:p>
+        </p:txBody>
+      </p:sp>
+      <p:sp>
+        <p:nvSpPr>
+          <p:cNvPr id="19" name="Oval 18"/>
+          <p:cNvSpPr/>
+          <p:nvPr/>
+        </p:nvSpPr>
+        <p:spPr>
+          <a:xfrm>
+            <a:off x="8595360" y="4297680"/>
+            <a:ext cx="457200" cy="457200"/>
+          </a:xfrm>
+          <a:prstGeom prst="ellipse">
+            <a:avLst/>
+          </a:prstGeom>
+          <a:solidFill>
+            <a:srgbClr val="F2B84B"/>
+          </a:solidFill>
+          <a:ln>
+            <a:noFill/>
+          </a:ln>
+          <a:effectLst/>
+        </p:spPr>
+        <p:style>
+          <a:lnRef idx="1">
+            <a:schemeClr val="accent1"/>
+          </a:lnRef>
+          <a:fillRef idx="3">
+            <a:schemeClr val="accent1"/>
+          </a:fillRef>
+          <a:effectRef idx="2">
+            <a:schemeClr val="accent1"/>
+          </a:effectRef>
+          <a:fontRef idx="minor">
+            <a:schemeClr val="lt1"/>
+          </a:fontRef>
+        </p:style>
+        <p:txBody>
+          <a:bodyPr rtlCol="0" anchor="ctr"/>
+          <a:lstStyle/>
+          <a:p>
+            <a:pPr algn="ctr"/>
+          </a:p>
+        </p:txBody>
+      </p:sp>
+      <p:sp>
+        <p:nvSpPr>
+          <p:cNvPr id="20" name="TextBox 19"/>
+          <p:cNvSpPr txBox="1"/>
+          <p:nvPr/>
+        </p:nvSpPr>
+        <p:spPr>
+          <a:xfrm>
+            <a:off x="9189719" y="4251960"/>
+            <a:ext cx="1664207" cy="548640"/>
+          </a:xfrm>
+          <a:prstGeom prst="rect">
+            <a:avLst/>
+          </a:prstGeom>
+          <a:noFill/>
+        </p:spPr>
+        <p:txBody>
+          <a:bodyPr wrap="square" anchor="t" lIns="0" rIns="0" tIns="0" bIns="0">
+            <a:spAutoFit/>
+          </a:bodyPr>
+          <a:lstStyle/>
+          <a:p>
+            <a:r>
+              <a:rPr sz="1500" b="1">
+                <a:solidFill>
+                  <a:srgbClr val="EAF2F5"/>
+                </a:solidFill>
+                <a:latin typeface="Arial"/>
+              </a:rPr>
+              <a:t>Coach IA</a:t>
+            </a:r>
+          </a:p>
+        </p:txBody>
+      </p:sp>
+      <p:sp>
+        <p:nvSpPr>
+          <p:cNvPr id="21" name="TextBox 20"/>
+          <p:cNvSpPr txBox="1"/>
+          <p:nvPr/>
+        </p:nvSpPr>
+        <p:spPr>
+          <a:xfrm>
+            <a:off x="8595360" y="4937760"/>
+            <a:ext cx="2121408" cy="731519"/>
+          </a:xfrm>
+          <a:prstGeom prst="rect">
+            <a:avLst/>
+          </a:prstGeom>
+          <a:noFill/>
+        </p:spPr>
+        <p:txBody>
+          <a:bodyPr wrap="square" anchor="t" lIns="0" rIns="0" tIns="0" bIns="0">
+            <a:spAutoFit/>
+          </a:bodyPr>
+          <a:lstStyle/>
+          <a:p>
+            <a:pPr>
+              <a:lnSpc>
+                <a:spcPct val="115000"/>
+              </a:lnSpc>
+            </a:pPr>
+            <a:r>
+              <a:rPr sz="1200" b="0">
+                <a:solidFill>
+                  <a:srgbClr val="8AA0B2"/>
+                </a:solidFill>
+                <a:latin typeface="Arial"/>
+              </a:rPr>
+              <a:t>Conversa sobre tus métricas y entrega el Plan de hoy.</a:t>
+            </a:r>
+          </a:p>
+        </p:txBody>
+      </p:sp>
+      <p:sp>
+        <p:nvSpPr>
+          <p:cNvPr id="22" name="TextBox 21"/>
+          <p:cNvSpPr txBox="1"/>
+          <p:nvPr/>
+        </p:nvSpPr>
+        <p:spPr>
+          <a:xfrm>
+            <a:off x="640080" y="6473952"/>
             <a:ext cx="7315200" cy="274320"/>
           </a:xfrm>
           <a:prstGeom prst="rect">
@@ -5897,7 +6809,7 @@
             <a:r>
               <a:rPr sz="900" b="0">
                 <a:solidFill>
-                  <a:srgbClr val="5A7288"/>
+                  <a:srgbClr val="8AA0B2"/>
                 </a:solidFill>
                 <a:latin typeface="Arial"/>
               </a:rPr>
@@ -5908,14 +6820,14 @@
       </p:sp>
       <p:sp>
         <p:nvSpPr>
-          <p:cNvPr id="19" name="TextBox 18"/>
-          <p:cNvSpPr txBox="1"/>
-          <p:nvPr/>
-        </p:nvSpPr>
-        <p:spPr>
-          <a:xfrm>
-            <a:off x="10607040" y="6446520"/>
-            <a:ext cx="822960" cy="274320"/>
+          <p:cNvPr id="23" name="TextBox 22"/>
+          <p:cNvSpPr txBox="1"/>
+          <p:nvPr/>
+        </p:nvSpPr>
+        <p:spPr>
+          <a:xfrm>
+            <a:off x="11155680" y="6473952"/>
+            <a:ext cx="548640" cy="274320"/>
           </a:xfrm>
           <a:prstGeom prst="rect">
             <a:avLst/>
@@ -5931,7 +6843,7 @@
             <a:r>
               <a:rPr sz="900" b="0">
                 <a:solidFill>
-                  <a:srgbClr val="5A7288"/>
+                  <a:srgbClr val="8AA0B2"/>
                 </a:solidFill>
                 <a:latin typeface="Arial"/>
               </a:rPr>
@@ -5973,7 +6885,7 @@
             <a:avLst/>
           </a:prstGeom>
           <a:solidFill>
-            <a:srgbClr val="050A10"/>
+            <a:srgbClr val="0D1B2A"/>
           </a:solidFill>
           <a:ln>
             <a:noFill/>
@@ -6002,48 +6914,136 @@
           </a:p>
         </p:txBody>
       </p:sp>
-      <p:pic>
-        <p:nvPicPr>
-          <p:cNvPr id="3" name="Picture 2" descr="bp_rings.png"/>
-          <p:cNvPicPr>
-            <a:picLocks noChangeAspect="1"/>
-          </p:cNvPicPr>
-          <p:nvPr/>
-        </p:nvPicPr>
-        <p:blipFill>
-          <a:blip r:embed="rId2"/>
-          <a:stretch>
-            <a:fillRect/>
-          </a:stretch>
-        </p:blipFill>
-        <p:spPr>
-          <a:xfrm>
-            <a:off x="0" y="0"/>
-            <a:ext cx="12191695" cy="6858000"/>
-          </a:xfrm>
-          <a:prstGeom prst="rect">
-            <a:avLst/>
-          </a:prstGeom>
-        </p:spPr>
-      </p:pic>
-      <p:sp>
-        <p:nvSpPr>
-          <p:cNvPr id="4" name="Rectangle 3"/>
+      <p:sp>
+        <p:nvSpPr>
+          <p:cNvPr id="3" name="TextBox 2"/>
+          <p:cNvSpPr txBox="1"/>
+          <p:nvPr/>
+        </p:nvSpPr>
+        <p:spPr>
+          <a:xfrm>
+            <a:off x="640080" y="457200"/>
+            <a:ext cx="10881360" cy="274320"/>
+          </a:xfrm>
+          <a:prstGeom prst="rect">
+            <a:avLst/>
+          </a:prstGeom>
+          <a:noFill/>
+        </p:spPr>
+        <p:txBody>
+          <a:bodyPr wrap="square" anchor="t" lIns="0" rIns="0" tIns="0" bIns="0">
+            <a:spAutoFit/>
+          </a:bodyPr>
+          <a:lstStyle/>
+          <a:p>
+            <a:r>
+              <a:rPr sz="1200" b="1">
+                <a:solidFill>
+                  <a:srgbClr val="4FD8C4"/>
+                </a:solidFill>
+                <a:latin typeface="Arial"/>
+              </a:rPr>
+              <a:t>TU LABORATORIO</a:t>
+            </a:r>
+          </a:p>
+        </p:txBody>
+      </p:sp>
+      <p:sp>
+        <p:nvSpPr>
+          <p:cNvPr id="4" name="TextBox 3"/>
+          <p:cNvSpPr txBox="1"/>
+          <p:nvPr/>
+        </p:nvSpPr>
+        <p:spPr>
+          <a:xfrm>
+            <a:off x="640080" y="914400"/>
+            <a:ext cx="10881360" cy="1005840"/>
+          </a:xfrm>
+          <a:prstGeom prst="rect">
+            <a:avLst/>
+          </a:prstGeom>
+          <a:noFill/>
+        </p:spPr>
+        <p:txBody>
+          <a:bodyPr wrap="square" anchor="t" lIns="0" rIns="0" tIns="0" bIns="0">
+            <a:spAutoFit/>
+          </a:bodyPr>
+          <a:lstStyle/>
+          <a:p>
+            <a:pPr>
+              <a:lnSpc>
+                <a:spcPct val="102000"/>
+              </a:lnSpc>
+            </a:pPr>
+            <a:r>
+              <a:rPr sz="3400" b="1">
+                <a:solidFill>
+                  <a:srgbClr val="EAF2F5"/>
+                </a:solidFill>
+                <a:latin typeface="Arial"/>
+              </a:rPr>
+              <a:t>Predicciones personales desde tus métricas</a:t>
+            </a:r>
+          </a:p>
+        </p:txBody>
+      </p:sp>
+      <p:sp>
+        <p:nvSpPr>
+          <p:cNvPr id="5" name="TextBox 4"/>
+          <p:cNvSpPr txBox="1"/>
+          <p:nvPr/>
+        </p:nvSpPr>
+        <p:spPr>
+          <a:xfrm>
+            <a:off x="640080" y="1920240"/>
+            <a:ext cx="10881360" cy="1463040"/>
+          </a:xfrm>
+          <a:prstGeom prst="rect">
+            <a:avLst/>
+          </a:prstGeom>
+          <a:noFill/>
+        </p:spPr>
+        <p:txBody>
+          <a:bodyPr wrap="square" anchor="t" lIns="0" rIns="0" tIns="0" bIns="0">
+            <a:spAutoFit/>
+          </a:bodyPr>
+          <a:lstStyle/>
+          <a:p>
+            <a:pPr>
+              <a:lnSpc>
+                <a:spcPct val="120000"/>
+              </a:lnSpc>
+            </a:pPr>
+            <a:r>
+              <a:rPr sz="1300" b="0">
+                <a:solidFill>
+                  <a:srgbClr val="8AA0B2"/>
+                </a:solidFill>
+                <a:latin typeface="Arial"/>
+              </a:rPr>
+              <a:t>Tu laboratorio personal: energía del día, riesgo proyectado y calma guiada — todo desde tus propios datos.</a:t>
+            </a:r>
+          </a:p>
+        </p:txBody>
+      </p:sp>
+      <p:sp>
+        <p:nvSpPr>
+          <p:cNvPr id="6" name="Rounded Rectangle 5"/>
           <p:cNvSpPr/>
           <p:nvPr/>
         </p:nvSpPr>
         <p:spPr>
           <a:xfrm>
-            <a:off x="0" y="0"/>
-            <a:ext cx="12191695" cy="6858000"/>
-          </a:xfrm>
-          <a:prstGeom prst="rect">
-            <a:avLst/>
+            <a:off x="640080" y="4023360"/>
+            <a:ext cx="3474720" cy="1737360"/>
+          </a:xfrm>
+          <a:prstGeom prst="roundRect">
+            <a:avLst>
+              <a:gd name="adj" fmla="val 6000"/>
+            </a:avLst>
           </a:prstGeom>
           <a:solidFill>
-            <a:srgbClr val="050A10">
-              <a:alpha val="70000"/>
-            </a:srgbClr>
+            <a:srgbClr val="101F30"/>
           </a:solidFill>
           <a:ln>
             <a:noFill/>
@@ -6074,105 +7074,23 @@
       </p:sp>
       <p:sp>
         <p:nvSpPr>
-          <p:cNvPr id="5" name="TextBox 4"/>
-          <p:cNvSpPr txBox="1"/>
-          <p:nvPr/>
-        </p:nvSpPr>
-        <p:spPr>
-          <a:xfrm>
-            <a:off x="914400" y="685800"/>
-            <a:ext cx="8229600" cy="365760"/>
-          </a:xfrm>
-          <a:prstGeom prst="rect">
-            <a:avLst/>
-          </a:prstGeom>
-          <a:noFill/>
-        </p:spPr>
-        <p:txBody>
-          <a:bodyPr wrap="square" anchor="t" lIns="0" rIns="0" tIns="0" bIns="0">
-            <a:spAutoFit/>
-          </a:bodyPr>
-          <a:lstStyle/>
-          <a:p>
-            <a:r>
-              <a:rPr sz="1200" b="1">
-                <a:solidFill>
-                  <a:srgbClr val="00C8B4"/>
-                </a:solidFill>
-                <a:latin typeface="Arial"/>
-              </a:rPr>
-              <a:t>TU LABORATORIO</a:t>
-            </a:r>
-          </a:p>
-        </p:txBody>
-      </p:sp>
-      <p:sp>
-        <p:nvSpPr>
-          <p:cNvPr id="6" name="TextBox 5"/>
-          <p:cNvSpPr txBox="1"/>
-          <p:nvPr/>
-        </p:nvSpPr>
-        <p:spPr>
-          <a:xfrm>
-            <a:off x="914400" y="1143000"/>
-            <a:ext cx="8229600" cy="2194560"/>
-          </a:xfrm>
-          <a:prstGeom prst="rect">
-            <a:avLst/>
-          </a:prstGeom>
-          <a:noFill/>
-        </p:spPr>
-        <p:txBody>
-          <a:bodyPr wrap="square" anchor="t" lIns="0" rIns="0" tIns="0" bIns="0">
-            <a:spAutoFit/>
-          </a:bodyPr>
-          <a:lstStyle/>
-          <a:p>
-            <a:pPr>
-              <a:lnSpc>
-                <a:spcPct val="104000"/>
-              </a:lnSpc>
-            </a:pPr>
-            <a:r>
-              <a:rPr sz="3800" b="1">
-                <a:solidFill>
-                  <a:srgbClr val="F2F6F8"/>
-                </a:solidFill>
-                <a:latin typeface="Arial"/>
-              </a:rPr>
-              <a:t>Predicción personal,
-desde tus métricas.</a:t>
-            </a:r>
-          </a:p>
-        </p:txBody>
-      </p:sp>
-      <p:sp>
-        <p:nvSpPr>
-          <p:cNvPr id="7" name="Rounded Rectangle 6"/>
+          <p:cNvPr id="7" name="Oval 6"/>
           <p:cNvSpPr/>
           <p:nvPr/>
         </p:nvSpPr>
         <p:spPr>
           <a:xfrm>
-            <a:off x="914400" y="2743200"/>
-            <a:ext cx="5120640" cy="1554480"/>
-          </a:xfrm>
-          <a:prstGeom prst="roundRect">
-            <a:avLst>
-              <a:gd name="adj" fmla="val 10000"/>
-            </a:avLst>
+            <a:off x="914400" y="4297680"/>
+            <a:ext cx="457200" cy="457200"/>
+          </a:xfrm>
+          <a:prstGeom prst="ellipse">
+            <a:avLst/>
           </a:prstGeom>
           <a:solidFill>
-            <a:srgbClr val="00C8B4">
-              <a:alpha val="12000"/>
-            </a:srgbClr>
+            <a:srgbClr val="4FD8C4"/>
           </a:solidFill>
-          <a:ln w="12700">
-            <a:solidFill>
-              <a:srgbClr val="00C8B4">
-                <a:alpha val="30000"/>
-              </a:srgbClr>
-            </a:solidFill>
+          <a:ln>
+            <a:noFill/>
           </a:ln>
           <a:effectLst/>
         </p:spPr>
@@ -6206,8 +7124,8 @@
         </p:nvSpPr>
         <p:spPr>
           <a:xfrm>
-            <a:off x="1225296" y="3035808"/>
-            <a:ext cx="4498848" cy="457200"/>
+            <a:off x="1508760" y="4251960"/>
+            <a:ext cx="2468879" cy="548640"/>
           </a:xfrm>
           <a:prstGeom prst="rect">
             <a:avLst/>
@@ -6223,7 +7141,7 @@
             <a:r>
               <a:rPr sz="1600" b="1">
                 <a:solidFill>
-                  <a:srgbClr val="F2F6F8"/>
+                  <a:srgbClr val="EAF2F5"/>
                 </a:solidFill>
                 <a:latin typeface="Arial"/>
               </a:rPr>
@@ -6240,8 +7158,8 @@
         </p:nvSpPr>
         <p:spPr>
           <a:xfrm>
-            <a:off x="1225296" y="3584448"/>
-            <a:ext cx="4498848" cy="548640"/>
+            <a:off x="914400" y="4937760"/>
+            <a:ext cx="2926079" cy="731519"/>
           </a:xfrm>
           <a:prstGeom prst="rect">
             <a:avLst/>
@@ -6256,13 +7174,13 @@
           <a:p>
             <a:pPr>
               <a:lnSpc>
-                <a:spcPct val="118000"/>
+                <a:spcPct val="115000"/>
               </a:lnSpc>
             </a:pPr>
             <a:r>
               <a:rPr sz="1300" b="0">
                 <a:solidFill>
-                  <a:srgbClr val="93A8BC"/>
+                  <a:srgbClr val="8AA0B2"/>
                 </a:solidFill>
                 <a:latin typeface="Arial"/>
               </a:rPr>
@@ -6279,25 +7197,19 @@
         </p:nvSpPr>
         <p:spPr>
           <a:xfrm>
-            <a:off x="914400" y="4480560"/>
-            <a:ext cx="5120640" cy="1554480"/>
+            <a:off x="4480560" y="4023360"/>
+            <a:ext cx="3474720" cy="1737360"/>
           </a:xfrm>
           <a:prstGeom prst="roundRect">
             <a:avLst>
-              <a:gd name="adj" fmla="val 10000"/>
+              <a:gd name="adj" fmla="val 6000"/>
             </a:avLst>
           </a:prstGeom>
           <a:solidFill>
-            <a:srgbClr val="7C84F8">
-              <a:alpha val="12000"/>
-            </a:srgbClr>
+            <a:srgbClr val="101F30"/>
           </a:solidFill>
-          <a:ln w="12700">
-            <a:solidFill>
-              <a:srgbClr val="7C84F8">
-                <a:alpha val="30000"/>
-              </a:srgbClr>
-            </a:solidFill>
+          <a:ln>
+            <a:noFill/>
           </a:ln>
           <a:effectLst/>
         </p:spPr>
@@ -6325,14 +7237,58 @@
       </p:sp>
       <p:sp>
         <p:nvSpPr>
-          <p:cNvPr id="11" name="TextBox 10"/>
-          <p:cNvSpPr txBox="1"/>
-          <p:nvPr/>
-        </p:nvSpPr>
-        <p:spPr>
-          <a:xfrm>
-            <a:off x="1225296" y="4773168"/>
-            <a:ext cx="4498848" cy="457200"/>
+          <p:cNvPr id="11" name="Oval 10"/>
+          <p:cNvSpPr/>
+          <p:nvPr/>
+        </p:nvSpPr>
+        <p:spPr>
+          <a:xfrm>
+            <a:off x="4754880" y="4297680"/>
+            <a:ext cx="457200" cy="457200"/>
+          </a:xfrm>
+          <a:prstGeom prst="ellipse">
+            <a:avLst/>
+          </a:prstGeom>
+          <a:solidFill>
+            <a:srgbClr val="9BA8F2"/>
+          </a:solidFill>
+          <a:ln>
+            <a:noFill/>
+          </a:ln>
+          <a:effectLst/>
+        </p:spPr>
+        <p:style>
+          <a:lnRef idx="1">
+            <a:schemeClr val="accent1"/>
+          </a:lnRef>
+          <a:fillRef idx="3">
+            <a:schemeClr val="accent1"/>
+          </a:fillRef>
+          <a:effectRef idx="2">
+            <a:schemeClr val="accent1"/>
+          </a:effectRef>
+          <a:fontRef idx="minor">
+            <a:schemeClr val="lt1"/>
+          </a:fontRef>
+        </p:style>
+        <p:txBody>
+          <a:bodyPr rtlCol="0" anchor="ctr"/>
+          <a:lstStyle/>
+          <a:p>
+            <a:pPr algn="ctr"/>
+          </a:p>
+        </p:txBody>
+      </p:sp>
+      <p:sp>
+        <p:nvSpPr>
+          <p:cNvPr id="12" name="TextBox 11"/>
+          <p:cNvSpPr txBox="1"/>
+          <p:nvPr/>
+        </p:nvSpPr>
+        <p:spPr>
+          <a:xfrm>
+            <a:off x="5349240" y="4251960"/>
+            <a:ext cx="2468879" cy="548640"/>
           </a:xfrm>
           <a:prstGeom prst="rect">
             <a:avLst/>
@@ -6348,25 +7304,25 @@
             <a:r>
               <a:rPr sz="1600" b="1">
                 <a:solidFill>
-                  <a:srgbClr val="F2F6F8"/>
-                </a:solidFill>
-                <a:latin typeface="Arial"/>
-              </a:rPr>
-              <a:t>Proyección de riesgo a 3 días</a:t>
-            </a:r>
-          </a:p>
-        </p:txBody>
-      </p:sp>
-      <p:sp>
-        <p:nvSpPr>
-          <p:cNvPr id="12" name="TextBox 11"/>
-          <p:cNvSpPr txBox="1"/>
-          <p:nvPr/>
-        </p:nvSpPr>
-        <p:spPr>
-          <a:xfrm>
-            <a:off x="1225296" y="5321808"/>
-            <a:ext cx="4498848" cy="548640"/>
+                  <a:srgbClr val="EAF2F5"/>
+                </a:solidFill>
+                <a:latin typeface="Arial"/>
+              </a:rPr>
+              <a:t>Proyección de riesgo 3 días</a:t>
+            </a:r>
+          </a:p>
+        </p:txBody>
+      </p:sp>
+      <p:sp>
+        <p:nvSpPr>
+          <p:cNvPr id="13" name="TextBox 12"/>
+          <p:cNvSpPr txBox="1"/>
+          <p:nvPr/>
+        </p:nvSpPr>
+        <p:spPr>
+          <a:xfrm>
+            <a:off x="4754880" y="4937760"/>
+            <a:ext cx="2926079" cy="731519"/>
           </a:xfrm>
           <a:prstGeom prst="rect">
             <a:avLst/>
@@ -6381,30 +7337,193 @@
           <a:p>
             <a:pPr>
               <a:lnSpc>
-                <a:spcPct val="118000"/>
+                <a:spcPct val="115000"/>
               </a:lnSpc>
             </a:pPr>
             <a:r>
               <a:rPr sz="1300" b="0">
                 <a:solidFill>
-                  <a:srgbClr val="93A8BC"/>
-                </a:solidFill>
-                <a:latin typeface="Arial"/>
-              </a:rPr>
-              <a:t>Regresión sobre tus 7 días: 'si sigues así, en 3 días tu riesgo llegaría a X'. Actúas hoy.</a:t>
-            </a:r>
-          </a:p>
-        </p:txBody>
-      </p:sp>
-      <p:sp>
-        <p:nvSpPr>
-          <p:cNvPr id="13" name="TextBox 12"/>
-          <p:cNvSpPr txBox="1"/>
-          <p:nvPr/>
-        </p:nvSpPr>
-        <p:spPr>
-          <a:xfrm>
-            <a:off x="914400" y="6446520"/>
+                  <a:srgbClr val="8AA0B2"/>
+                </a:solidFill>
+                <a:latin typeface="Arial"/>
+              </a:rPr>
+              <a:t>Regresión sobre 7 días: 'si sigues así, en 3 días tu riesgo llegaría a X'. Actúas hoy.</a:t>
+            </a:r>
+          </a:p>
+        </p:txBody>
+      </p:sp>
+      <p:sp>
+        <p:nvSpPr>
+          <p:cNvPr id="14" name="Rounded Rectangle 13"/>
+          <p:cNvSpPr/>
+          <p:nvPr/>
+        </p:nvSpPr>
+        <p:spPr>
+          <a:xfrm>
+            <a:off x="8321040" y="4023360"/>
+            <a:ext cx="3474720" cy="1737360"/>
+          </a:xfrm>
+          <a:prstGeom prst="roundRect">
+            <a:avLst>
+              <a:gd name="adj" fmla="val 6000"/>
+            </a:avLst>
+          </a:prstGeom>
+          <a:solidFill>
+            <a:srgbClr val="101F30"/>
+          </a:solidFill>
+          <a:ln>
+            <a:noFill/>
+          </a:ln>
+          <a:effectLst/>
+        </p:spPr>
+        <p:style>
+          <a:lnRef idx="1">
+            <a:schemeClr val="accent1"/>
+          </a:lnRef>
+          <a:fillRef idx="3">
+            <a:schemeClr val="accent1"/>
+          </a:fillRef>
+          <a:effectRef idx="2">
+            <a:schemeClr val="accent1"/>
+          </a:effectRef>
+          <a:fontRef idx="minor">
+            <a:schemeClr val="lt1"/>
+          </a:fontRef>
+        </p:style>
+        <p:txBody>
+          <a:bodyPr rtlCol="0" anchor="ctr"/>
+          <a:lstStyle/>
+          <a:p>
+            <a:pPr algn="ctr"/>
+          </a:p>
+        </p:txBody>
+      </p:sp>
+      <p:sp>
+        <p:nvSpPr>
+          <p:cNvPr id="15" name="Oval 14"/>
+          <p:cNvSpPr/>
+          <p:nvPr/>
+        </p:nvSpPr>
+        <p:spPr>
+          <a:xfrm>
+            <a:off x="8595360" y="4297680"/>
+            <a:ext cx="457200" cy="457200"/>
+          </a:xfrm>
+          <a:prstGeom prst="ellipse">
+            <a:avLst/>
+          </a:prstGeom>
+          <a:solidFill>
+            <a:srgbClr val="F0687A"/>
+          </a:solidFill>
+          <a:ln>
+            <a:noFill/>
+          </a:ln>
+          <a:effectLst/>
+        </p:spPr>
+        <p:style>
+          <a:lnRef idx="1">
+            <a:schemeClr val="accent1"/>
+          </a:lnRef>
+          <a:fillRef idx="3">
+            <a:schemeClr val="accent1"/>
+          </a:fillRef>
+          <a:effectRef idx="2">
+            <a:schemeClr val="accent1"/>
+          </a:effectRef>
+          <a:fontRef idx="minor">
+            <a:schemeClr val="lt1"/>
+          </a:fontRef>
+        </p:style>
+        <p:txBody>
+          <a:bodyPr rtlCol="0" anchor="ctr"/>
+          <a:lstStyle/>
+          <a:p>
+            <a:pPr algn="ctr"/>
+          </a:p>
+        </p:txBody>
+      </p:sp>
+      <p:sp>
+        <p:nvSpPr>
+          <p:cNvPr id="16" name="TextBox 15"/>
+          <p:cNvSpPr txBox="1"/>
+          <p:nvPr/>
+        </p:nvSpPr>
+        <p:spPr>
+          <a:xfrm>
+            <a:off x="9189719" y="4251960"/>
+            <a:ext cx="2468879" cy="548640"/>
+          </a:xfrm>
+          <a:prstGeom prst="rect">
+            <a:avLst/>
+          </a:prstGeom>
+          <a:noFill/>
+        </p:spPr>
+        <p:txBody>
+          <a:bodyPr wrap="square" anchor="t" lIns="0" rIns="0" tIns="0" bIns="0">
+            <a:spAutoFit/>
+          </a:bodyPr>
+          <a:lstStyle/>
+          <a:p>
+            <a:r>
+              <a:rPr sz="1600" b="1">
+                <a:solidFill>
+                  <a:srgbClr val="EAF2F5"/>
+                </a:solidFill>
+                <a:latin typeface="Arial"/>
+              </a:rPr>
+              <a:t>Respiración guiada 2 min</a:t>
+            </a:r>
+          </a:p>
+        </p:txBody>
+      </p:sp>
+      <p:sp>
+        <p:nvSpPr>
+          <p:cNvPr id="17" name="TextBox 16"/>
+          <p:cNvSpPr txBox="1"/>
+          <p:nvPr/>
+        </p:nvSpPr>
+        <p:spPr>
+          <a:xfrm>
+            <a:off x="8595360" y="4937760"/>
+            <a:ext cx="2926079" cy="731519"/>
+          </a:xfrm>
+          <a:prstGeom prst="rect">
+            <a:avLst/>
+          </a:prstGeom>
+          <a:noFill/>
+        </p:spPr>
+        <p:txBody>
+          <a:bodyPr wrap="square" anchor="t" lIns="0" rIns="0" tIns="0" bIns="0">
+            <a:spAutoFit/>
+          </a:bodyPr>
+          <a:lstStyle/>
+          <a:p>
+            <a:pPr>
+              <a:lnSpc>
+                <a:spcPct val="115000"/>
+              </a:lnSpc>
+            </a:pPr>
+            <a:r>
+              <a:rPr sz="1300" b="0">
+                <a:solidFill>
+                  <a:srgbClr val="8AA0B2"/>
+                </a:solidFill>
+                <a:latin typeface="Arial"/>
+              </a:rPr>
+              <a:t>Anillo que respira contigo para calmar el sistema nervioso al instante.</a:t>
+            </a:r>
+          </a:p>
+        </p:txBody>
+      </p:sp>
+      <p:sp>
+        <p:nvSpPr>
+          <p:cNvPr id="18" name="TextBox 17"/>
+          <p:cNvSpPr txBox="1"/>
+          <p:nvPr/>
+        </p:nvSpPr>
+        <p:spPr>
+          <a:xfrm>
+            <a:off x="640080" y="6473952"/>
             <a:ext cx="7315200" cy="274320"/>
           </a:xfrm>
           <a:prstGeom prst="rect">
@@ -6421,7 +7540,7 @@
             <a:r>
               <a:rPr sz="900" b="0">
                 <a:solidFill>
-                  <a:srgbClr val="5A7288"/>
+                  <a:srgbClr val="8AA0B2"/>
                 </a:solidFill>
                 <a:latin typeface="Arial"/>
               </a:rPr>
@@ -6432,14 +7551,14 @@
       </p:sp>
       <p:sp>
         <p:nvSpPr>
-          <p:cNvPr id="14" name="TextBox 13"/>
-          <p:cNvSpPr txBox="1"/>
-          <p:nvPr/>
-        </p:nvSpPr>
-        <p:spPr>
-          <a:xfrm>
-            <a:off x="10607040" y="6446520"/>
-            <a:ext cx="822960" cy="274320"/>
+          <p:cNvPr id="19" name="TextBox 18"/>
+          <p:cNvSpPr txBox="1"/>
+          <p:nvPr/>
+        </p:nvSpPr>
+        <p:spPr>
+          <a:xfrm>
+            <a:off x="11155680" y="6473952"/>
+            <a:ext cx="548640" cy="274320"/>
           </a:xfrm>
           <a:prstGeom prst="rect">
             <a:avLst/>
@@ -6455,7 +7574,7 @@
             <a:r>
               <a:rPr sz="900" b="0">
                 <a:solidFill>
-                  <a:srgbClr val="5A7288"/>
+                  <a:srgbClr val="8AA0B2"/>
                 </a:solidFill>
                 <a:latin typeface="Arial"/>
               </a:rPr>
@@ -6497,7 +7616,7 @@
             <a:avLst/>
           </a:prstGeom>
           <a:solidFill>
-            <a:srgbClr val="050A10"/>
+            <a:srgbClr val="0D1B2A"/>
           </a:solidFill>
           <a:ln>
             <a:noFill/>
@@ -6534,8 +7653,8 @@
         </p:nvSpPr>
         <p:spPr>
           <a:xfrm>
-            <a:off x="914400" y="685800"/>
-            <a:ext cx="8229600" cy="365760"/>
+            <a:off x="640080" y="457200"/>
+            <a:ext cx="10881360" cy="274320"/>
           </a:xfrm>
           <a:prstGeom prst="rect">
             <a:avLst/>
@@ -6551,7 +7670,7 @@
             <a:r>
               <a:rPr sz="1200" b="1">
                 <a:solidFill>
-                  <a:srgbClr val="00C8B4"/>
+                  <a:srgbClr val="4FD8C4"/>
                 </a:solidFill>
                 <a:latin typeface="Arial"/>
               </a:rPr>
@@ -6568,8 +7687,8 @@
         </p:nvSpPr>
         <p:spPr>
           <a:xfrm>
-            <a:off x="914400" y="1143000"/>
-            <a:ext cx="10332720" cy="2194560"/>
+            <a:off x="640080" y="914400"/>
+            <a:ext cx="10881360" cy="1005840"/>
           </a:xfrm>
           <a:prstGeom prst="rect">
             <a:avLst/>
@@ -6584,49 +7703,81 @@
           <a:p>
             <a:pPr>
               <a:lnSpc>
-                <a:spcPct val="104000"/>
+                <a:spcPct val="102000"/>
               </a:lnSpc>
             </a:pPr>
             <a:r>
-              <a:rPr sz="3800" b="1">
-                <a:solidFill>
-                  <a:srgbClr val="F2F6F8"/>
-                </a:solidFill>
-                <a:latin typeface="Arial"/>
-              </a:rPr>
-              <a:t>No solo el riesgo:
-tu recuperación y un plan.</a:t>
-            </a:r>
-          </a:p>
-        </p:txBody>
-      </p:sp>
-      <p:sp>
-        <p:nvSpPr>
-          <p:cNvPr id="5" name="Rounded Rectangle 4"/>
+              <a:rPr sz="3400" b="1">
+                <a:solidFill>
+                  <a:srgbClr val="EAF2F5"/>
+                </a:solidFill>
+                <a:latin typeface="Arial"/>
+              </a:rPr>
+              <a:t>No solo el riesgo: tu recuperación y un plan</a:t>
+            </a:r>
+          </a:p>
+        </p:txBody>
+      </p:sp>
+      <p:sp>
+        <p:nvSpPr>
+          <p:cNvPr id="5" name="TextBox 4"/>
+          <p:cNvSpPr txBox="1"/>
+          <p:nvPr/>
+        </p:nvSpPr>
+        <p:spPr>
+          <a:xfrm>
+            <a:off x="640080" y="1920240"/>
+            <a:ext cx="10881360" cy="1463040"/>
+          </a:xfrm>
+          <a:prstGeom prst="rect">
+            <a:avLst/>
+          </a:prstGeom>
+          <a:noFill/>
+        </p:spPr>
+        <p:txBody>
+          <a:bodyPr wrap="square" anchor="t" lIns="0" rIns="0" tIns="0" bIns="0">
+            <a:spAutoFit/>
+          </a:bodyPr>
+          <a:lstStyle/>
+          <a:p>
+            <a:pPr>
+              <a:lnSpc>
+                <a:spcPct val="120000"/>
+              </a:lnSpc>
+            </a:pPr>
+            <a:r>
+              <a:rPr sz="1300" b="0">
+                <a:solidFill>
+                  <a:srgbClr val="8AA0B2"/>
+                </a:solidFill>
+                <a:latin typeface="Arial"/>
+              </a:rPr>
+              <a:t>BioScore y Sleep Score para bienestar; Coach con Plan de hoy accionable; diseño iOS 26 claro/oscuro.</a:t>
+            </a:r>
+          </a:p>
+        </p:txBody>
+      </p:sp>
+      <p:sp>
+        <p:nvSpPr>
+          <p:cNvPr id="6" name="Rounded Rectangle 5"/>
           <p:cNvSpPr/>
           <p:nvPr/>
         </p:nvSpPr>
         <p:spPr>
           <a:xfrm>
-            <a:off x="914400" y="2743200"/>
-            <a:ext cx="3429000" cy="2377440"/>
+            <a:off x="640080" y="4023360"/>
+            <a:ext cx="3474720" cy="1737360"/>
           </a:xfrm>
           <a:prstGeom prst="roundRect">
             <a:avLst>
-              <a:gd name="adj" fmla="val 10000"/>
+              <a:gd name="adj" fmla="val 6000"/>
             </a:avLst>
           </a:prstGeom>
           <a:solidFill>
-            <a:srgbClr val="00C8B4">
-              <a:alpha val="12000"/>
-            </a:srgbClr>
+            <a:srgbClr val="101F30"/>
           </a:solidFill>
-          <a:ln w="12700">
-            <a:solidFill>
-              <a:srgbClr val="00C8B4">
-                <a:alpha val="30000"/>
-              </a:srgbClr>
-            </a:solidFill>
+          <a:ln>
+            <a:noFill/>
           </a:ln>
           <a:effectLst/>
         </p:spPr>
@@ -6654,104 +7805,23 @@
       </p:sp>
       <p:sp>
         <p:nvSpPr>
-          <p:cNvPr id="6" name="TextBox 5"/>
-          <p:cNvSpPr txBox="1"/>
-          <p:nvPr/>
-        </p:nvSpPr>
-        <p:spPr>
-          <a:xfrm>
-            <a:off x="1225296" y="3035808"/>
-            <a:ext cx="2807208" cy="457200"/>
-          </a:xfrm>
-          <a:prstGeom prst="rect">
-            <a:avLst/>
-          </a:prstGeom>
-          <a:noFill/>
-        </p:spPr>
-        <p:txBody>
-          <a:bodyPr wrap="square" anchor="t" lIns="0" rIns="0" tIns="0" bIns="0">
-            <a:spAutoFit/>
-          </a:bodyPr>
-          <a:lstStyle/>
-          <a:p>
-            <a:r>
-              <a:rPr sz="1600" b="1">
-                <a:solidFill>
-                  <a:srgbClr val="F2F6F8"/>
-                </a:solidFill>
-                <a:latin typeface="Arial"/>
-              </a:rPr>
-              <a:t>BioScore + Sleep</a:t>
-            </a:r>
-          </a:p>
-        </p:txBody>
-      </p:sp>
-      <p:sp>
-        <p:nvSpPr>
-          <p:cNvPr id="7" name="TextBox 6"/>
-          <p:cNvSpPr txBox="1"/>
-          <p:nvPr/>
-        </p:nvSpPr>
-        <p:spPr>
-          <a:xfrm>
-            <a:off x="1225296" y="3584448"/>
-            <a:ext cx="2807208" cy="1371600"/>
-          </a:xfrm>
-          <a:prstGeom prst="rect">
-            <a:avLst/>
-          </a:prstGeom>
-          <a:noFill/>
-        </p:spPr>
-        <p:txBody>
-          <a:bodyPr wrap="square" anchor="t" lIns="0" rIns="0" tIns="0" bIns="0">
-            <a:spAutoFit/>
-          </a:bodyPr>
-          <a:lstStyle/>
-          <a:p>
-            <a:pPr>
-              <a:lnSpc>
-                <a:spcPct val="118000"/>
-              </a:lnSpc>
-            </a:pPr>
-            <a:r>
-              <a:rPr sz="1300" b="0">
-                <a:solidFill>
-                  <a:srgbClr val="93A8BC"/>
-                </a:solidFill>
-                <a:latin typeface="Arial"/>
-              </a:rPr>
-              <a:t>Índice de bienestar (mayor = mejor) y sueño predictivo desde datos reales.</a:t>
-            </a:r>
-          </a:p>
-        </p:txBody>
-      </p:sp>
-      <p:sp>
-        <p:nvSpPr>
-          <p:cNvPr id="8" name="Rounded Rectangle 7"/>
+          <p:cNvPr id="7" name="Oval 6"/>
           <p:cNvSpPr/>
           <p:nvPr/>
         </p:nvSpPr>
         <p:spPr>
           <a:xfrm>
-            <a:off x="4526280" y="2743200"/>
-            <a:ext cx="3429000" cy="2377440"/>
-          </a:xfrm>
-          <a:prstGeom prst="roundRect">
-            <a:avLst>
-              <a:gd name="adj" fmla="val 10000"/>
-            </a:avLst>
+            <a:off x="914400" y="4297680"/>
+            <a:ext cx="457200" cy="457200"/>
+          </a:xfrm>
+          <a:prstGeom prst="ellipse">
+            <a:avLst/>
           </a:prstGeom>
           <a:solidFill>
-            <a:srgbClr val="F2B84B">
-              <a:alpha val="12000"/>
-            </a:srgbClr>
+            <a:srgbClr val="4FD8C4"/>
           </a:solidFill>
-          <a:ln w="12700">
-            <a:solidFill>
-              <a:srgbClr val="F2B84B">
-                <a:alpha val="30000"/>
-              </a:srgbClr>
-            </a:solidFill>
+          <a:ln>
+            <a:noFill/>
           </a:ln>
           <a:effectLst/>
         </p:spPr>
@@ -6779,48 +7849,48 @@
       </p:sp>
       <p:sp>
         <p:nvSpPr>
+          <p:cNvPr id="8" name="TextBox 7"/>
+          <p:cNvSpPr txBox="1"/>
+          <p:nvPr/>
+        </p:nvSpPr>
+        <p:spPr>
+          <a:xfrm>
+            <a:off x="1508760" y="4251960"/>
+            <a:ext cx="2468879" cy="548640"/>
+          </a:xfrm>
+          <a:prstGeom prst="rect">
+            <a:avLst/>
+          </a:prstGeom>
+          <a:noFill/>
+        </p:spPr>
+        <p:txBody>
+          <a:bodyPr wrap="square" anchor="t" lIns="0" rIns="0" tIns="0" bIns="0">
+            <a:spAutoFit/>
+          </a:bodyPr>
+          <a:lstStyle/>
+          <a:p>
+            <a:r>
+              <a:rPr sz="1600" b="1">
+                <a:solidFill>
+                  <a:srgbClr val="EAF2F5"/>
+                </a:solidFill>
+                <a:latin typeface="Arial"/>
+              </a:rPr>
+              <a:t>BioScore + Sleep</a:t>
+            </a:r>
+          </a:p>
+        </p:txBody>
+      </p:sp>
+      <p:sp>
+        <p:nvSpPr>
           <p:cNvPr id="9" name="TextBox 8"/>
           <p:cNvSpPr txBox="1"/>
           <p:nvPr/>
         </p:nvSpPr>
         <p:spPr>
           <a:xfrm>
-            <a:off x="4837176" y="3035808"/>
-            <a:ext cx="2807208" cy="457200"/>
-          </a:xfrm>
-          <a:prstGeom prst="rect">
-            <a:avLst/>
-          </a:prstGeom>
-          <a:noFill/>
-        </p:spPr>
-        <p:txBody>
-          <a:bodyPr wrap="square" anchor="t" lIns="0" rIns="0" tIns="0" bIns="0">
-            <a:spAutoFit/>
-          </a:bodyPr>
-          <a:lstStyle/>
-          <a:p>
-            <a:r>
-              <a:rPr sz="1600" b="1">
-                <a:solidFill>
-                  <a:srgbClr val="F2F6F8"/>
-                </a:solidFill>
-                <a:latin typeface="Arial"/>
-              </a:rPr>
-              <a:t>Plan de hoy (IA)</a:t>
-            </a:r>
-          </a:p>
-        </p:txBody>
-      </p:sp>
-      <p:sp>
-        <p:nvSpPr>
-          <p:cNvPr id="10" name="TextBox 9"/>
-          <p:cNvSpPr txBox="1"/>
-          <p:nvPr/>
-        </p:nvSpPr>
-        <p:spPr>
-          <a:xfrm>
-            <a:off x="4837176" y="3584448"/>
-            <a:ext cx="2807208" cy="1371600"/>
+            <a:off x="914400" y="4937760"/>
+            <a:ext cx="2926079" cy="731519"/>
           </a:xfrm>
           <a:prstGeom prst="rect">
             <a:avLst/>
@@ -6835,48 +7905,42 @@
           <a:p>
             <a:pPr>
               <a:lnSpc>
-                <a:spcPct val="118000"/>
+                <a:spcPct val="115000"/>
               </a:lnSpc>
             </a:pPr>
             <a:r>
               <a:rPr sz="1300" b="0">
                 <a:solidFill>
-                  <a:srgbClr val="93A8BC"/>
-                </a:solidFill>
-                <a:latin typeface="Arial"/>
-              </a:rPr>
-              <a:t>3 pasos accionables personalizados con tus métricas cuando el riesgo sube.</a:t>
-            </a:r>
-          </a:p>
-        </p:txBody>
-      </p:sp>
-      <p:sp>
-        <p:nvSpPr>
-          <p:cNvPr id="11" name="Rounded Rectangle 10"/>
+                  <a:srgbClr val="8AA0B2"/>
+                </a:solidFill>
+                <a:latin typeface="Arial"/>
+              </a:rPr>
+              <a:t>Índice de bienestar (mayor=mejor) y sueño predictivo desde datos reales.</a:t>
+            </a:r>
+          </a:p>
+        </p:txBody>
+      </p:sp>
+      <p:sp>
+        <p:nvSpPr>
+          <p:cNvPr id="10" name="Rounded Rectangle 9"/>
           <p:cNvSpPr/>
           <p:nvPr/>
         </p:nvSpPr>
         <p:spPr>
           <a:xfrm>
-            <a:off x="8138160" y="2743200"/>
-            <a:ext cx="3108960" cy="2377440"/>
+            <a:off x="4480560" y="4023360"/>
+            <a:ext cx="3474720" cy="1737360"/>
           </a:xfrm>
           <a:prstGeom prst="roundRect">
             <a:avLst>
-              <a:gd name="adj" fmla="val 10000"/>
+              <a:gd name="adj" fmla="val 6000"/>
             </a:avLst>
           </a:prstGeom>
           <a:solidFill>
-            <a:srgbClr val="F05C7A">
-              <a:alpha val="12000"/>
-            </a:srgbClr>
+            <a:srgbClr val="101F30"/>
           </a:solidFill>
-          <a:ln w="12700">
-            <a:solidFill>
-              <a:srgbClr val="F05C7A">
-                <a:alpha val="30000"/>
-              </a:srgbClr>
-            </a:solidFill>
+          <a:ln>
+            <a:noFill/>
           </a:ln>
           <a:effectLst/>
         </p:spPr>
@@ -6904,14 +7968,58 @@
       </p:sp>
       <p:sp>
         <p:nvSpPr>
+          <p:cNvPr id="11" name="Oval 10"/>
+          <p:cNvSpPr/>
+          <p:nvPr/>
+        </p:nvSpPr>
+        <p:spPr>
+          <a:xfrm>
+            <a:off x="4754880" y="4297680"/>
+            <a:ext cx="457200" cy="457200"/>
+          </a:xfrm>
+          <a:prstGeom prst="ellipse">
+            <a:avLst/>
+          </a:prstGeom>
+          <a:solidFill>
+            <a:srgbClr val="F2B84B"/>
+          </a:solidFill>
+          <a:ln>
+            <a:noFill/>
+          </a:ln>
+          <a:effectLst/>
+        </p:spPr>
+        <p:style>
+          <a:lnRef idx="1">
+            <a:schemeClr val="accent1"/>
+          </a:lnRef>
+          <a:fillRef idx="3">
+            <a:schemeClr val="accent1"/>
+          </a:fillRef>
+          <a:effectRef idx="2">
+            <a:schemeClr val="accent1"/>
+          </a:effectRef>
+          <a:fontRef idx="minor">
+            <a:schemeClr val="lt1"/>
+          </a:fontRef>
+        </p:style>
+        <p:txBody>
+          <a:bodyPr rtlCol="0" anchor="ctr"/>
+          <a:lstStyle/>
+          <a:p>
+            <a:pPr algn="ctr"/>
+          </a:p>
+        </p:txBody>
+      </p:sp>
+      <p:sp>
+        <p:nvSpPr>
           <p:cNvPr id="12" name="TextBox 11"/>
           <p:cNvSpPr txBox="1"/>
           <p:nvPr/>
         </p:nvSpPr>
         <p:spPr>
           <a:xfrm>
-            <a:off x="8449056" y="3035808"/>
-            <a:ext cx="2487168" cy="457200"/>
+            <a:off x="5349240" y="4251960"/>
+            <a:ext cx="2468879" cy="548640"/>
           </a:xfrm>
           <a:prstGeom prst="rect">
             <a:avLst/>
@@ -6927,11 +8035,11 @@
             <a:r>
               <a:rPr sz="1600" b="1">
                 <a:solidFill>
-                  <a:srgbClr val="F2F6F8"/>
-                </a:solidFill>
-                <a:latin typeface="Arial"/>
-              </a:rPr>
-              <a:t>Respiración 2 min</a:t>
+                  <a:srgbClr val="EAF2F5"/>
+                </a:solidFill>
+                <a:latin typeface="Arial"/>
+              </a:rPr>
+              <a:t>Plan de hoy (IA)</a:t>
             </a:r>
           </a:p>
         </p:txBody>
@@ -6944,8 +8052,8 @@
         </p:nvSpPr>
         <p:spPr>
           <a:xfrm>
-            <a:off x="8449056" y="3584448"/>
-            <a:ext cx="2487168" cy="1371600"/>
+            <a:off x="4754880" y="4937760"/>
+            <a:ext cx="2926079" cy="731519"/>
           </a:xfrm>
           <a:prstGeom prst="rect">
             <a:avLst/>
@@ -6960,30 +8068,193 @@
           <a:p>
             <a:pPr>
               <a:lnSpc>
-                <a:spcPct val="118000"/>
+                <a:spcPct val="115000"/>
               </a:lnSpc>
             </a:pPr>
             <a:r>
               <a:rPr sz="1300" b="0">
                 <a:solidFill>
-                  <a:srgbClr val="93A8BC"/>
-                </a:solidFill>
-                <a:latin typeface="Arial"/>
-              </a:rPr>
-              <a:t>Anillo que respira contigo para calmar el sistema nervioso al instante.</a:t>
-            </a:r>
-          </a:p>
-        </p:txBody>
-      </p:sp>
-      <p:sp>
-        <p:nvSpPr>
-          <p:cNvPr id="14" name="TextBox 13"/>
-          <p:cNvSpPr txBox="1"/>
-          <p:nvPr/>
-        </p:nvSpPr>
-        <p:spPr>
-          <a:xfrm>
-            <a:off x="914400" y="6446520"/>
+                  <a:srgbClr val="8AA0B2"/>
+                </a:solidFill>
+                <a:latin typeface="Arial"/>
+              </a:rPr>
+              <a:t>Si el riesgo sube, 3 pasos accionables personalizados con tus métricas del día.</a:t>
+            </a:r>
+          </a:p>
+        </p:txBody>
+      </p:sp>
+      <p:sp>
+        <p:nvSpPr>
+          <p:cNvPr id="14" name="Rounded Rectangle 13"/>
+          <p:cNvSpPr/>
+          <p:nvPr/>
+        </p:nvSpPr>
+        <p:spPr>
+          <a:xfrm>
+            <a:off x="8321040" y="4023360"/>
+            <a:ext cx="3474720" cy="1737360"/>
+          </a:xfrm>
+          <a:prstGeom prst="roundRect">
+            <a:avLst>
+              <a:gd name="adj" fmla="val 6000"/>
+            </a:avLst>
+          </a:prstGeom>
+          <a:solidFill>
+            <a:srgbClr val="101F30"/>
+          </a:solidFill>
+          <a:ln>
+            <a:noFill/>
+          </a:ln>
+          <a:effectLst/>
+        </p:spPr>
+        <p:style>
+          <a:lnRef idx="1">
+            <a:schemeClr val="accent1"/>
+          </a:lnRef>
+          <a:fillRef idx="3">
+            <a:schemeClr val="accent1"/>
+          </a:fillRef>
+          <a:effectRef idx="2">
+            <a:schemeClr val="accent1"/>
+          </a:effectRef>
+          <a:fontRef idx="minor">
+            <a:schemeClr val="lt1"/>
+          </a:fontRef>
+        </p:style>
+        <p:txBody>
+          <a:bodyPr rtlCol="0" anchor="ctr"/>
+          <a:lstStyle/>
+          <a:p>
+            <a:pPr algn="ctr"/>
+          </a:p>
+        </p:txBody>
+      </p:sp>
+      <p:sp>
+        <p:nvSpPr>
+          <p:cNvPr id="15" name="Oval 14"/>
+          <p:cNvSpPr/>
+          <p:nvPr/>
+        </p:nvSpPr>
+        <p:spPr>
+          <a:xfrm>
+            <a:off x="8595360" y="4297680"/>
+            <a:ext cx="457200" cy="457200"/>
+          </a:xfrm>
+          <a:prstGeom prst="ellipse">
+            <a:avLst/>
+          </a:prstGeom>
+          <a:solidFill>
+            <a:srgbClr val="F0687A"/>
+          </a:solidFill>
+          <a:ln>
+            <a:noFill/>
+          </a:ln>
+          <a:effectLst/>
+        </p:spPr>
+        <p:style>
+          <a:lnRef idx="1">
+            <a:schemeClr val="accent1"/>
+          </a:lnRef>
+          <a:fillRef idx="3">
+            <a:schemeClr val="accent1"/>
+          </a:fillRef>
+          <a:effectRef idx="2">
+            <a:schemeClr val="accent1"/>
+          </a:effectRef>
+          <a:fontRef idx="minor">
+            <a:schemeClr val="lt1"/>
+          </a:fontRef>
+        </p:style>
+        <p:txBody>
+          <a:bodyPr rtlCol="0" anchor="ctr"/>
+          <a:lstStyle/>
+          <a:p>
+            <a:pPr algn="ctr"/>
+          </a:p>
+        </p:txBody>
+      </p:sp>
+      <p:sp>
+        <p:nvSpPr>
+          <p:cNvPr id="16" name="TextBox 15"/>
+          <p:cNvSpPr txBox="1"/>
+          <p:nvPr/>
+        </p:nvSpPr>
+        <p:spPr>
+          <a:xfrm>
+            <a:off x="9189719" y="4251960"/>
+            <a:ext cx="2468879" cy="548640"/>
+          </a:xfrm>
+          <a:prstGeom prst="rect">
+            <a:avLst/>
+          </a:prstGeom>
+          <a:noFill/>
+        </p:spPr>
+        <p:txBody>
+          <a:bodyPr wrap="square" anchor="t" lIns="0" rIns="0" tIns="0" bIns="0">
+            <a:spAutoFit/>
+          </a:bodyPr>
+          <a:lstStyle/>
+          <a:p>
+            <a:r>
+              <a:rPr sz="1600" b="1">
+                <a:solidFill>
+                  <a:srgbClr val="EAF2F5"/>
+                </a:solidFill>
+                <a:latin typeface="Arial"/>
+              </a:rPr>
+              <a:t>Diseño iOS 26 + claro/oscuro</a:t>
+            </a:r>
+          </a:p>
+        </p:txBody>
+      </p:sp>
+      <p:sp>
+        <p:nvSpPr>
+          <p:cNvPr id="17" name="TextBox 16"/>
+          <p:cNvSpPr txBox="1"/>
+          <p:nvPr/>
+        </p:nvSpPr>
+        <p:spPr>
+          <a:xfrm>
+            <a:off x="8595360" y="4937760"/>
+            <a:ext cx="2926079" cy="731519"/>
+          </a:xfrm>
+          <a:prstGeom prst="rect">
+            <a:avLst/>
+          </a:prstGeom>
+          <a:noFill/>
+        </p:spPr>
+        <p:txBody>
+          <a:bodyPr wrap="square" anchor="t" lIns="0" rIns="0" tIns="0" bIns="0">
+            <a:spAutoFit/>
+          </a:bodyPr>
+          <a:lstStyle/>
+          <a:p>
+            <a:pPr>
+              <a:lnSpc>
+                <a:spcPct val="115000"/>
+              </a:lnSpc>
+            </a:pPr>
+            <a:r>
+              <a:rPr sz="1300" b="0">
+                <a:solidFill>
+                  <a:srgbClr val="8AA0B2"/>
+                </a:solidFill>
+                <a:latin typeface="Arial"/>
+              </a:rPr>
+              <a:t>Vidrio translúcido con blur y modo claro/oscuro instantáneo. Tus datos, tu estilo.</a:t>
+            </a:r>
+          </a:p>
+        </p:txBody>
+      </p:sp>
+      <p:sp>
+        <p:nvSpPr>
+          <p:cNvPr id="18" name="TextBox 17"/>
+          <p:cNvSpPr txBox="1"/>
+          <p:nvPr/>
+        </p:nvSpPr>
+        <p:spPr>
+          <a:xfrm>
+            <a:off x="640080" y="6473952"/>
             <a:ext cx="7315200" cy="274320"/>
           </a:xfrm>
           <a:prstGeom prst="rect">
@@ -7000,7 +8271,7 @@
             <a:r>
               <a:rPr sz="900" b="0">
                 <a:solidFill>
-                  <a:srgbClr val="5A7288"/>
+                  <a:srgbClr val="8AA0B2"/>
                 </a:solidFill>
                 <a:latin typeface="Arial"/>
               </a:rPr>
@@ -7011,14 +8282,14 @@
       </p:sp>
       <p:sp>
         <p:nvSpPr>
-          <p:cNvPr id="15" name="TextBox 14"/>
-          <p:cNvSpPr txBox="1"/>
-          <p:nvPr/>
-        </p:nvSpPr>
-        <p:spPr>
-          <a:xfrm>
-            <a:off x="10607040" y="6446520"/>
-            <a:ext cx="822960" cy="274320"/>
+          <p:cNvPr id="19" name="TextBox 18"/>
+          <p:cNvSpPr txBox="1"/>
+          <p:nvPr/>
+        </p:nvSpPr>
+        <p:spPr>
+          <a:xfrm>
+            <a:off x="11155680" y="6473952"/>
+            <a:ext cx="548640" cy="274320"/>
           </a:xfrm>
           <a:prstGeom prst="rect">
             <a:avLst/>
@@ -7034,7 +8305,7 @@
             <a:r>
               <a:rPr sz="900" b="0">
                 <a:solidFill>
-                  <a:srgbClr val="5A7288"/>
+                  <a:srgbClr val="8AA0B2"/>
                 </a:solidFill>
                 <a:latin typeface="Arial"/>
               </a:rPr>
@@ -7076,7 +8347,7 @@
             <a:avLst/>
           </a:prstGeom>
           <a:solidFill>
-            <a:srgbClr val="050A10"/>
+            <a:srgbClr val="0D1B2A"/>
           </a:solidFill>
           <a:ln>
             <a:noFill/>
@@ -7113,8 +8384,8 @@
         </p:nvSpPr>
         <p:spPr>
           <a:xfrm>
-            <a:off x="914400" y="685800"/>
-            <a:ext cx="8229600" cy="365760"/>
+            <a:off x="640080" y="457200"/>
+            <a:ext cx="10881360" cy="274320"/>
           </a:xfrm>
           <a:prstGeom prst="rect">
             <a:avLst/>
@@ -7130,7 +8401,7 @@
             <a:r>
               <a:rPr sz="1200" b="1">
                 <a:solidFill>
-                  <a:srgbClr val="00C8B4"/>
+                  <a:srgbClr val="4FD8C4"/>
                 </a:solidFill>
                 <a:latin typeface="Arial"/>
               </a:rPr>
@@ -7147,8 +8418,8 @@
         </p:nvSpPr>
         <p:spPr>
           <a:xfrm>
-            <a:off x="914400" y="1234440"/>
-            <a:ext cx="10332720" cy="2194560"/>
+            <a:off x="640080" y="914400"/>
+            <a:ext cx="10881360" cy="1005840"/>
           </a:xfrm>
           <a:prstGeom prst="rect">
             <a:avLst/>
@@ -7163,13 +8434,13 @@
           <a:p>
             <a:pPr>
               <a:lnSpc>
-                <a:spcPct val="104000"/>
+                <a:spcPct val="102000"/>
               </a:lnSpc>
             </a:pPr>
             <a:r>
-              <a:rPr sz="4000" b="1">
-                <a:solidFill>
-                  <a:srgbClr val="F2F6F8"/>
+              <a:rPr sz="3400" b="1">
+                <a:solidFill>
+                  <a:srgbClr val="EAF2F5"/>
                 </a:solidFill>
                 <a:latin typeface="Arial"/>
               </a:rPr>
@@ -7187,25 +8458,19 @@
         </p:nvSpPr>
         <p:spPr>
           <a:xfrm>
-            <a:off x="914400" y="2926080"/>
-            <a:ext cx="4937760" cy="2468880"/>
+            <a:off x="640080" y="4023360"/>
+            <a:ext cx="5029200" cy="1737360"/>
           </a:xfrm>
           <a:prstGeom prst="roundRect">
             <a:avLst>
-              <a:gd name="adj" fmla="val 10000"/>
+              <a:gd name="adj" fmla="val 6000"/>
             </a:avLst>
           </a:prstGeom>
           <a:solidFill>
-            <a:srgbClr val="93A8BC">
-              <a:alpha val="12000"/>
-            </a:srgbClr>
+            <a:srgbClr val="101F30"/>
           </a:solidFill>
-          <a:ln w="12700">
-            <a:solidFill>
-              <a:srgbClr val="93A8BC">
-                <a:alpha val="30000"/>
-              </a:srgbClr>
-            </a:solidFill>
+          <a:ln>
+            <a:noFill/>
           </a:ln>
           <a:effectLst/>
         </p:spPr>
@@ -7233,104 +8498,23 @@
       </p:sp>
       <p:sp>
         <p:nvSpPr>
-          <p:cNvPr id="6" name="TextBox 5"/>
-          <p:cNvSpPr txBox="1"/>
-          <p:nvPr/>
-        </p:nvSpPr>
-        <p:spPr>
-          <a:xfrm>
-            <a:off x="1225296" y="3218688"/>
-            <a:ext cx="4315968" cy="457200"/>
-          </a:xfrm>
-          <a:prstGeom prst="rect">
-            <a:avLst/>
-          </a:prstGeom>
-          <a:noFill/>
-        </p:spPr>
-        <p:txBody>
-          <a:bodyPr wrap="square" anchor="t" lIns="0" rIns="0" tIns="0" bIns="0">
-            <a:spAutoFit/>
-          </a:bodyPr>
-          <a:lstStyle/>
-          <a:p>
-            <a:r>
-              <a:rPr sz="1700" b="1">
-                <a:solidFill>
-                  <a:srgbClr val="F2F6F8"/>
-                </a:solidFill>
-                <a:latin typeface="Arial"/>
-              </a:rPr>
-              <a:t>WHOOP · FITBIT · APPLE</a:t>
-            </a:r>
-          </a:p>
-        </p:txBody>
-      </p:sp>
-      <p:sp>
-        <p:nvSpPr>
-          <p:cNvPr id="7" name="TextBox 6"/>
-          <p:cNvSpPr txBox="1"/>
-          <p:nvPr/>
-        </p:nvSpPr>
-        <p:spPr>
-          <a:xfrm>
-            <a:off x="1225296" y="3767328"/>
-            <a:ext cx="4315968" cy="1463040"/>
-          </a:xfrm>
-          <a:prstGeom prst="rect">
-            <a:avLst/>
-          </a:prstGeom>
-          <a:noFill/>
-        </p:spPr>
-        <p:txBody>
-          <a:bodyPr wrap="square" anchor="t" lIns="0" rIns="0" tIns="0" bIns="0">
-            <a:spAutoFit/>
-          </a:bodyPr>
-          <a:lstStyle/>
-          <a:p>
-            <a:pPr>
-              <a:lnSpc>
-                <a:spcPct val="118000"/>
-              </a:lnSpc>
-            </a:pPr>
-            <a:r>
-              <a:rPr sz="1400" b="0">
-                <a:solidFill>
-                  <a:srgbClr val="93A8BC"/>
-                </a:solidFill>
-                <a:latin typeface="Arial"/>
-              </a:rPr>
-              <a:t>Millones de números y gráficas. Promedios estáticos. Tú solo descubres lo malo cuando ya pasó.</a:t>
-            </a:r>
-          </a:p>
-        </p:txBody>
-      </p:sp>
-      <p:sp>
-        <p:nvSpPr>
-          <p:cNvPr id="8" name="Rounded Rectangle 7"/>
+          <p:cNvPr id="6" name="Oval 5"/>
           <p:cNvSpPr/>
           <p:nvPr/>
         </p:nvSpPr>
         <p:spPr>
           <a:xfrm>
-            <a:off x="6309360" y="2926080"/>
-            <a:ext cx="4937760" cy="2468880"/>
-          </a:xfrm>
-          <a:prstGeom prst="roundRect">
-            <a:avLst>
-              <a:gd name="adj" fmla="val 10000"/>
-            </a:avLst>
+            <a:off x="914400" y="4297680"/>
+            <a:ext cx="457200" cy="457200"/>
+          </a:xfrm>
+          <a:prstGeom prst="ellipse">
+            <a:avLst/>
           </a:prstGeom>
           <a:solidFill>
-            <a:srgbClr val="00C8B4">
-              <a:alpha val="12000"/>
-            </a:srgbClr>
+            <a:srgbClr val="8AA0B2"/>
           </a:solidFill>
-          <a:ln w="12700">
-            <a:solidFill>
-              <a:srgbClr val="00C8B4">
-                <a:alpha val="30000"/>
-              </a:srgbClr>
-            </a:solidFill>
+          <a:ln>
+            <a:noFill/>
           </a:ln>
           <a:effectLst/>
         </p:spPr>
@@ -7358,48 +8542,48 @@
       </p:sp>
       <p:sp>
         <p:nvSpPr>
-          <p:cNvPr id="9" name="TextBox 8"/>
-          <p:cNvSpPr txBox="1"/>
-          <p:nvPr/>
-        </p:nvSpPr>
-        <p:spPr>
-          <a:xfrm>
-            <a:off x="6620256" y="3218688"/>
-            <a:ext cx="4315968" cy="457200"/>
-          </a:xfrm>
-          <a:prstGeom prst="rect">
-            <a:avLst/>
-          </a:prstGeom>
-          <a:noFill/>
-        </p:spPr>
-        <p:txBody>
-          <a:bodyPr wrap="square" anchor="t" lIns="0" rIns="0" tIns="0" bIns="0">
-            <a:spAutoFit/>
-          </a:bodyPr>
-          <a:lstStyle/>
-          <a:p>
-            <a:r>
-              <a:rPr sz="1700" b="1">
-                <a:solidFill>
-                  <a:srgbClr val="F2F6F8"/>
-                </a:solidFill>
-                <a:latin typeface="Arial"/>
-              </a:rPr>
-              <a:t>BIOPULSE</a:t>
-            </a:r>
-          </a:p>
-        </p:txBody>
-      </p:sp>
-      <p:sp>
-        <p:nvSpPr>
-          <p:cNvPr id="10" name="TextBox 9"/>
-          <p:cNvSpPr txBox="1"/>
-          <p:nvPr/>
-        </p:nvSpPr>
-        <p:spPr>
-          <a:xfrm>
-            <a:off x="6620256" y="3767328"/>
-            <a:ext cx="4315968" cy="1463040"/>
+          <p:cNvPr id="7" name="TextBox 6"/>
+          <p:cNvSpPr txBox="1"/>
+          <p:nvPr/>
+        </p:nvSpPr>
+        <p:spPr>
+          <a:xfrm>
+            <a:off x="1508760" y="4251960"/>
+            <a:ext cx="4023360" cy="548640"/>
+          </a:xfrm>
+          <a:prstGeom prst="rect">
+            <a:avLst/>
+          </a:prstGeom>
+          <a:noFill/>
+        </p:spPr>
+        <p:txBody>
+          <a:bodyPr wrap="square" anchor="t" lIns="0" rIns="0" tIns="0" bIns="0">
+            <a:spAutoFit/>
+          </a:bodyPr>
+          <a:lstStyle/>
+          <a:p>
+            <a:r>
+              <a:rPr sz="1600" b="1">
+                <a:solidFill>
+                  <a:srgbClr val="EAF2F5"/>
+                </a:solidFill>
+                <a:latin typeface="Arial"/>
+              </a:rPr>
+              <a:t>WHOOP · FITBIT · APPLE</a:t>
+            </a:r>
+          </a:p>
+        </p:txBody>
+      </p:sp>
+      <p:sp>
+        <p:nvSpPr>
+          <p:cNvPr id="8" name="TextBox 7"/>
+          <p:cNvSpPr txBox="1"/>
+          <p:nvPr/>
+        </p:nvSpPr>
+        <p:spPr>
+          <a:xfrm>
+            <a:off x="914400" y="4937760"/>
+            <a:ext cx="4480560" cy="731519"/>
           </a:xfrm>
           <a:prstGeom prst="rect">
             <a:avLst/>
@@ -7414,13 +8598,176 @@
           <a:p>
             <a:pPr>
               <a:lnSpc>
-                <a:spcPct val="118000"/>
+                <a:spcPct val="115000"/>
               </a:lnSpc>
             </a:pPr>
             <a:r>
-              <a:rPr sz="1400" b="0">
-                <a:solidFill>
-                  <a:srgbClr val="93A8BC"/>
+              <a:rPr sz="1300" b="0">
+                <a:solidFill>
+                  <a:srgbClr val="8AA0B2"/>
+                </a:solidFill>
+                <a:latin typeface="Arial"/>
+              </a:rPr>
+              <a:t>Millones de números y gráficas. Promedios estáticos. Tú solo descubres lo malo cuando ya pasó.</a:t>
+            </a:r>
+          </a:p>
+        </p:txBody>
+      </p:sp>
+      <p:sp>
+        <p:nvSpPr>
+          <p:cNvPr id="9" name="Rounded Rectangle 8"/>
+          <p:cNvSpPr/>
+          <p:nvPr/>
+        </p:nvSpPr>
+        <p:spPr>
+          <a:xfrm>
+            <a:off x="6217920" y="4023360"/>
+            <a:ext cx="5029200" cy="1737360"/>
+          </a:xfrm>
+          <a:prstGeom prst="roundRect">
+            <a:avLst>
+              <a:gd name="adj" fmla="val 6000"/>
+            </a:avLst>
+          </a:prstGeom>
+          <a:solidFill>
+            <a:srgbClr val="101F30"/>
+          </a:solidFill>
+          <a:ln>
+            <a:noFill/>
+          </a:ln>
+          <a:effectLst/>
+        </p:spPr>
+        <p:style>
+          <a:lnRef idx="1">
+            <a:schemeClr val="accent1"/>
+          </a:lnRef>
+          <a:fillRef idx="3">
+            <a:schemeClr val="accent1"/>
+          </a:fillRef>
+          <a:effectRef idx="2">
+            <a:schemeClr val="accent1"/>
+          </a:effectRef>
+          <a:fontRef idx="minor">
+            <a:schemeClr val="lt1"/>
+          </a:fontRef>
+        </p:style>
+        <p:txBody>
+          <a:bodyPr rtlCol="0" anchor="ctr"/>
+          <a:lstStyle/>
+          <a:p>
+            <a:pPr algn="ctr"/>
+          </a:p>
+        </p:txBody>
+      </p:sp>
+      <p:sp>
+        <p:nvSpPr>
+          <p:cNvPr id="10" name="Oval 9"/>
+          <p:cNvSpPr/>
+          <p:nvPr/>
+        </p:nvSpPr>
+        <p:spPr>
+          <a:xfrm>
+            <a:off x="6492240" y="4297680"/>
+            <a:ext cx="457200" cy="457200"/>
+          </a:xfrm>
+          <a:prstGeom prst="ellipse">
+            <a:avLst/>
+          </a:prstGeom>
+          <a:solidFill>
+            <a:srgbClr val="4FD8C4"/>
+          </a:solidFill>
+          <a:ln>
+            <a:noFill/>
+          </a:ln>
+          <a:effectLst/>
+        </p:spPr>
+        <p:style>
+          <a:lnRef idx="1">
+            <a:schemeClr val="accent1"/>
+          </a:lnRef>
+          <a:fillRef idx="3">
+            <a:schemeClr val="accent1"/>
+          </a:fillRef>
+          <a:effectRef idx="2">
+            <a:schemeClr val="accent1"/>
+          </a:effectRef>
+          <a:fontRef idx="minor">
+            <a:schemeClr val="lt1"/>
+          </a:fontRef>
+        </p:style>
+        <p:txBody>
+          <a:bodyPr rtlCol="0" anchor="ctr"/>
+          <a:lstStyle/>
+          <a:p>
+            <a:pPr algn="ctr"/>
+          </a:p>
+        </p:txBody>
+      </p:sp>
+      <p:sp>
+        <p:nvSpPr>
+          <p:cNvPr id="11" name="TextBox 10"/>
+          <p:cNvSpPr txBox="1"/>
+          <p:nvPr/>
+        </p:nvSpPr>
+        <p:spPr>
+          <a:xfrm>
+            <a:off x="7086600" y="4251960"/>
+            <a:ext cx="4023360" cy="548640"/>
+          </a:xfrm>
+          <a:prstGeom prst="rect">
+            <a:avLst/>
+          </a:prstGeom>
+          <a:noFill/>
+        </p:spPr>
+        <p:txBody>
+          <a:bodyPr wrap="square" anchor="t" lIns="0" rIns="0" tIns="0" bIns="0">
+            <a:spAutoFit/>
+          </a:bodyPr>
+          <a:lstStyle/>
+          <a:p>
+            <a:r>
+              <a:rPr sz="1600" b="1">
+                <a:solidFill>
+                  <a:srgbClr val="EAF2F5"/>
+                </a:solidFill>
+                <a:latin typeface="Arial"/>
+              </a:rPr>
+              <a:t>BIOPULSE</a:t>
+            </a:r>
+          </a:p>
+        </p:txBody>
+      </p:sp>
+      <p:sp>
+        <p:nvSpPr>
+          <p:cNvPr id="12" name="TextBox 11"/>
+          <p:cNvSpPr txBox="1"/>
+          <p:nvPr/>
+        </p:nvSpPr>
+        <p:spPr>
+          <a:xfrm>
+            <a:off x="6492240" y="4937760"/>
+            <a:ext cx="4480560" cy="731519"/>
+          </a:xfrm>
+          <a:prstGeom prst="rect">
+            <a:avLst/>
+          </a:prstGeom>
+          <a:noFill/>
+        </p:spPr>
+        <p:txBody>
+          <a:bodyPr wrap="square" anchor="t" lIns="0" rIns="0" tIns="0" bIns="0">
+            <a:spAutoFit/>
+          </a:bodyPr>
+          <a:lstStyle/>
+          <a:p>
+            <a:pPr>
+              <a:lnSpc>
+                <a:spcPct val="115000"/>
+              </a:lnSpc>
+            </a:pPr>
+            <a:r>
+              <a:rPr sz="1300" b="0">
+                <a:solidFill>
+                  <a:srgbClr val="8AA0B2"/>
                 </a:solidFill>
                 <a:latin typeface="Arial"/>
               </a:rPr>
@@ -7431,13 +8778,13 @@
       </p:sp>
       <p:sp>
         <p:nvSpPr>
-          <p:cNvPr id="11" name="TextBox 10"/>
-          <p:cNvSpPr txBox="1"/>
-          <p:nvPr/>
-        </p:nvSpPr>
-        <p:spPr>
-          <a:xfrm>
-            <a:off x="914400" y="6446520"/>
+          <p:cNvPr id="13" name="TextBox 12"/>
+          <p:cNvSpPr txBox="1"/>
+          <p:nvPr/>
+        </p:nvSpPr>
+        <p:spPr>
+          <a:xfrm>
+            <a:off x="640080" y="6473952"/>
             <a:ext cx="7315200" cy="274320"/>
           </a:xfrm>
           <a:prstGeom prst="rect">
@@ -7454,7 +8801,7 @@
             <a:r>
               <a:rPr sz="900" b="0">
                 <a:solidFill>
-                  <a:srgbClr val="5A7288"/>
+                  <a:srgbClr val="8AA0B2"/>
                 </a:solidFill>
                 <a:latin typeface="Arial"/>
               </a:rPr>
@@ -7465,14 +8812,14 @@
       </p:sp>
       <p:sp>
         <p:nvSpPr>
-          <p:cNvPr id="12" name="TextBox 11"/>
-          <p:cNvSpPr txBox="1"/>
-          <p:nvPr/>
-        </p:nvSpPr>
-        <p:spPr>
-          <a:xfrm>
-            <a:off x="10607040" y="6446520"/>
-            <a:ext cx="822960" cy="274320"/>
+          <p:cNvPr id="14" name="TextBox 13"/>
+          <p:cNvSpPr txBox="1"/>
+          <p:nvPr/>
+        </p:nvSpPr>
+        <p:spPr>
+          <a:xfrm>
+            <a:off x="11155680" y="6473952"/>
+            <a:ext cx="548640" cy="274320"/>
           </a:xfrm>
           <a:prstGeom prst="rect">
             <a:avLst/>
@@ -7488,7 +8835,7 @@
             <a:r>
               <a:rPr sz="900" b="0">
                 <a:solidFill>
-                  <a:srgbClr val="5A7288"/>
+                  <a:srgbClr val="8AA0B2"/>
                 </a:solidFill>
                 <a:latin typeface="Arial"/>
               </a:rPr>
@@ -7530,7 +8877,7 @@
             <a:avLst/>
           </a:prstGeom>
           <a:solidFill>
-            <a:srgbClr val="050A10"/>
+            <a:srgbClr val="0D1B2A"/>
           </a:solidFill>
           <a:ln>
             <a:noFill/>
@@ -7567,8 +8914,8 @@
         </p:nvSpPr>
         <p:spPr>
           <a:xfrm>
-            <a:off x="914400" y="685800"/>
-            <a:ext cx="8229600" cy="365760"/>
+            <a:off x="640080" y="457200"/>
+            <a:ext cx="10881360" cy="274320"/>
           </a:xfrm>
           <a:prstGeom prst="rect">
             <a:avLst/>
@@ -7584,7 +8931,7 @@
             <a:r>
               <a:rPr sz="1200" b="1">
                 <a:solidFill>
-                  <a:srgbClr val="00C8B4"/>
+                  <a:srgbClr val="4FD8C4"/>
                 </a:solidFill>
                 <a:latin typeface="Arial"/>
               </a:rPr>
@@ -7601,8 +8948,8 @@
         </p:nvSpPr>
         <p:spPr>
           <a:xfrm>
-            <a:off x="914400" y="1143000"/>
-            <a:ext cx="10332720" cy="2194560"/>
+            <a:off x="640080" y="914400"/>
+            <a:ext cx="10881360" cy="1005840"/>
           </a:xfrm>
           <a:prstGeom prst="rect">
             <a:avLst/>
@@ -7617,13 +8964,13 @@
           <a:p>
             <a:pPr>
               <a:lnSpc>
-                <a:spcPct val="104000"/>
+                <a:spcPct val="102000"/>
               </a:lnSpc>
             </a:pPr>
             <a:r>
-              <a:rPr sz="3800" b="1">
-                <a:solidFill>
-                  <a:srgbClr val="F2F6F8"/>
+              <a:rPr sz="3400" b="1">
+                <a:solidFill>
+                  <a:srgbClr val="EAF2F5"/>
                 </a:solidFill>
                 <a:latin typeface="Arial"/>
               </a:rPr>
@@ -7640,25 +8987,19 @@
         </p:nvSpPr>
         <p:spPr>
           <a:xfrm>
-            <a:off x="914400" y="2377440"/>
-            <a:ext cx="2670048" cy="2011680"/>
+            <a:off x="640080" y="1828800"/>
+            <a:ext cx="3474720" cy="1737360"/>
           </a:xfrm>
           <a:prstGeom prst="roundRect">
             <a:avLst>
-              <a:gd name="adj" fmla="val 10000"/>
+              <a:gd name="adj" fmla="val 6000"/>
             </a:avLst>
           </a:prstGeom>
           <a:solidFill>
-            <a:srgbClr val="00C8B4">
-              <a:alpha val="10000"/>
-            </a:srgbClr>
+            <a:srgbClr val="101F30"/>
           </a:solidFill>
-          <a:ln w="12700">
-            <a:solidFill>
-              <a:srgbClr val="00C8B4">
-                <a:alpha val="26000"/>
-              </a:srgbClr>
-            </a:solidFill>
+          <a:ln>
+            <a:noFill/>
           </a:ln>
           <a:effectLst/>
         </p:spPr>
@@ -7692,16 +9033,16 @@
         </p:nvSpPr>
         <p:spPr>
           <a:xfrm>
-            <a:off x="914400" y="2633472"/>
-            <a:ext cx="2670048" cy="822960"/>
-          </a:xfrm>
-          <a:prstGeom prst="rect">
-            <a:avLst/>
-          </a:prstGeom>
-          <a:noFill/>
-        </p:spPr>
-        <p:txBody>
-          <a:bodyPr wrap="square" anchor="ctr" lIns="0" rIns="0" tIns="0" bIns="0">
+            <a:off x="914400" y="2148840"/>
+            <a:ext cx="2926079" cy="1005840"/>
+          </a:xfrm>
+          <a:prstGeom prst="rect">
+            <a:avLst/>
+          </a:prstGeom>
+          <a:noFill/>
+        </p:spPr>
+        <p:txBody>
+          <a:bodyPr wrap="square" anchor="t" lIns="0" rIns="0" tIns="0" bIns="0">
             <a:spAutoFit/>
           </a:bodyPr>
           <a:lstStyle/>
@@ -7709,7 +9050,7 @@
             <a:r>
               <a:rPr sz="4000" b="1">
                 <a:solidFill>
-                  <a:srgbClr val="00C8B4"/>
+                  <a:srgbClr val="4FD8C4"/>
                 </a:solidFill>
                 <a:latin typeface="Arial"/>
               </a:rPr>
@@ -7726,8 +9067,8 @@
         </p:nvSpPr>
         <p:spPr>
           <a:xfrm>
-            <a:off x="1097280" y="3520440"/>
-            <a:ext cx="2304288" cy="731520"/>
+            <a:off x="914400" y="3108960"/>
+            <a:ext cx="2926079" cy="822960"/>
           </a:xfrm>
           <a:prstGeom prst="rect">
             <a:avLst/>
@@ -7746,9 +9087,9 @@
               </a:lnSpc>
             </a:pPr>
             <a:r>
-              <a:rPr sz="1200" b="0">
-                <a:solidFill>
-                  <a:srgbClr val="93A8BC"/>
+              <a:rPr sz="1300" b="0">
+                <a:solidFill>
+                  <a:srgbClr val="8AA0B2"/>
                 </a:solidFill>
                 <a:latin typeface="Arial"/>
               </a:rPr>
@@ -7765,25 +9106,19 @@
         </p:nvSpPr>
         <p:spPr>
           <a:xfrm>
-            <a:off x="3749040" y="2377440"/>
-            <a:ext cx="2670048" cy="2011680"/>
+            <a:off x="4480560" y="1828800"/>
+            <a:ext cx="3474720" cy="1737360"/>
           </a:xfrm>
           <a:prstGeom prst="roundRect">
             <a:avLst>
-              <a:gd name="adj" fmla="val 10000"/>
+              <a:gd name="adj" fmla="val 6000"/>
             </a:avLst>
           </a:prstGeom>
           <a:solidFill>
-            <a:srgbClr val="00C8B4">
-              <a:alpha val="10000"/>
-            </a:srgbClr>
+            <a:srgbClr val="101F30"/>
           </a:solidFill>
-          <a:ln w="12700">
-            <a:solidFill>
-              <a:srgbClr val="00C8B4">
-                <a:alpha val="26000"/>
-              </a:srgbClr>
-            </a:solidFill>
+          <a:ln>
+            <a:noFill/>
           </a:ln>
           <a:effectLst/>
         </p:spPr>
@@ -7817,16 +9152,16 @@
         </p:nvSpPr>
         <p:spPr>
           <a:xfrm>
-            <a:off x="3749040" y="2633472"/>
-            <a:ext cx="2670048" cy="822960"/>
-          </a:xfrm>
-          <a:prstGeom prst="rect">
-            <a:avLst/>
-          </a:prstGeom>
-          <a:noFill/>
-        </p:spPr>
-        <p:txBody>
-          <a:bodyPr wrap="square" anchor="ctr" lIns="0" rIns="0" tIns="0" bIns="0">
+            <a:off x="4754880" y="2148840"/>
+            <a:ext cx="2926079" cy="1005840"/>
+          </a:xfrm>
+          <a:prstGeom prst="rect">
+            <a:avLst/>
+          </a:prstGeom>
+          <a:noFill/>
+        </p:spPr>
+        <p:txBody>
+          <a:bodyPr wrap="square" anchor="t" lIns="0" rIns="0" tIns="0" bIns="0">
             <a:spAutoFit/>
           </a:bodyPr>
           <a:lstStyle/>
@@ -7834,7 +9169,7 @@
             <a:r>
               <a:rPr sz="4000" b="1">
                 <a:solidFill>
-                  <a:srgbClr val="00C8B4"/>
+                  <a:srgbClr val="4FD8C4"/>
                 </a:solidFill>
                 <a:latin typeface="Arial"/>
               </a:rPr>
@@ -7851,8 +9186,8 @@
         </p:nvSpPr>
         <p:spPr>
           <a:xfrm>
-            <a:off x="3931920" y="3520440"/>
-            <a:ext cx="2304288" cy="731520"/>
+            <a:off x="4754880" y="3108960"/>
+            <a:ext cx="2926079" cy="822960"/>
           </a:xfrm>
           <a:prstGeom prst="rect">
             <a:avLst/>
@@ -7871,9 +9206,9 @@
               </a:lnSpc>
             </a:pPr>
             <a:r>
-              <a:rPr sz="1200" b="0">
-                <a:solidFill>
-                  <a:srgbClr val="93A8BC"/>
+              <a:rPr sz="1300" b="0">
+                <a:solidFill>
+                  <a:srgbClr val="8AA0B2"/>
                 </a:solidFill>
                 <a:latin typeface="Arial"/>
               </a:rPr>
@@ -7890,25 +9225,19 @@
         </p:nvSpPr>
         <p:spPr>
           <a:xfrm>
-            <a:off x="6583680" y="2377440"/>
-            <a:ext cx="2670048" cy="2011680"/>
+            <a:off x="8321040" y="1828800"/>
+            <a:ext cx="3474720" cy="1737360"/>
           </a:xfrm>
           <a:prstGeom prst="roundRect">
             <a:avLst>
-              <a:gd name="adj" fmla="val 10000"/>
+              <a:gd name="adj" fmla="val 6000"/>
             </a:avLst>
           </a:prstGeom>
           <a:solidFill>
-            <a:srgbClr val="00C8B4">
-              <a:alpha val="10000"/>
-            </a:srgbClr>
+            <a:srgbClr val="101F30"/>
           </a:solidFill>
-          <a:ln w="12700">
-            <a:solidFill>
-              <a:srgbClr val="00C8B4">
-                <a:alpha val="26000"/>
-              </a:srgbClr>
-            </a:solidFill>
+          <a:ln>
+            <a:noFill/>
           </a:ln>
           <a:effectLst/>
         </p:spPr>
@@ -7942,16 +9271,16 @@
         </p:nvSpPr>
         <p:spPr>
           <a:xfrm>
-            <a:off x="6583680" y="2633472"/>
-            <a:ext cx="2670048" cy="822960"/>
-          </a:xfrm>
-          <a:prstGeom prst="rect">
-            <a:avLst/>
-          </a:prstGeom>
-          <a:noFill/>
-        </p:spPr>
-        <p:txBody>
-          <a:bodyPr wrap="square" anchor="ctr" lIns="0" rIns="0" tIns="0" bIns="0">
+            <a:off x="8595360" y="2148840"/>
+            <a:ext cx="2926079" cy="1005840"/>
+          </a:xfrm>
+          <a:prstGeom prst="rect">
+            <a:avLst/>
+          </a:prstGeom>
+          <a:noFill/>
+        </p:spPr>
+        <p:txBody>
+          <a:bodyPr wrap="square" anchor="t" lIns="0" rIns="0" tIns="0" bIns="0">
             <a:spAutoFit/>
           </a:bodyPr>
           <a:lstStyle/>
@@ -7959,7 +9288,7 @@
             <a:r>
               <a:rPr sz="4000" b="1">
                 <a:solidFill>
-                  <a:srgbClr val="00C8B4"/>
+                  <a:srgbClr val="4FD8C4"/>
                 </a:solidFill>
                 <a:latin typeface="Arial"/>
               </a:rPr>
@@ -7976,8 +9305,8 @@
         </p:nvSpPr>
         <p:spPr>
           <a:xfrm>
-            <a:off x="6766560" y="3520440"/>
-            <a:ext cx="2304288" cy="731520"/>
+            <a:off x="8595360" y="3108960"/>
+            <a:ext cx="2926079" cy="822960"/>
           </a:xfrm>
           <a:prstGeom prst="rect">
             <a:avLst/>
@@ -7996,9 +9325,9 @@
               </a:lnSpc>
             </a:pPr>
             <a:r>
-              <a:rPr sz="1200" b="0">
-                <a:solidFill>
-                  <a:srgbClr val="93A8BC"/>
+              <a:rPr sz="1300" b="0">
+                <a:solidFill>
+                  <a:srgbClr val="8AA0B2"/>
                 </a:solidFill>
                 <a:latin typeface="Arial"/>
               </a:rPr>
@@ -8009,139 +9338,14 @@
       </p:sp>
       <p:sp>
         <p:nvSpPr>
-          <p:cNvPr id="14" name="Rounded Rectangle 13"/>
-          <p:cNvSpPr/>
-          <p:nvPr/>
-        </p:nvSpPr>
-        <p:spPr>
-          <a:xfrm>
-            <a:off x="9418320" y="2377440"/>
-            <a:ext cx="2670048" cy="2011680"/>
-          </a:xfrm>
-          <a:prstGeom prst="roundRect">
-            <a:avLst>
-              <a:gd name="adj" fmla="val 10000"/>
-            </a:avLst>
-          </a:prstGeom>
-          <a:solidFill>
-            <a:srgbClr val="F2B84B">
-              <a:alpha val="10000"/>
-            </a:srgbClr>
-          </a:solidFill>
-          <a:ln w="12700">
-            <a:solidFill>
-              <a:srgbClr val="F2B84B">
-                <a:alpha val="26000"/>
-              </a:srgbClr>
-            </a:solidFill>
-          </a:ln>
-          <a:effectLst/>
-        </p:spPr>
-        <p:style>
-          <a:lnRef idx="1">
-            <a:schemeClr val="accent1"/>
-          </a:lnRef>
-          <a:fillRef idx="3">
-            <a:schemeClr val="accent1"/>
-          </a:fillRef>
-          <a:effectRef idx="2">
-            <a:schemeClr val="accent1"/>
-          </a:effectRef>
-          <a:fontRef idx="minor">
-            <a:schemeClr val="lt1"/>
-          </a:fontRef>
-        </p:style>
-        <p:txBody>
-          <a:bodyPr rtlCol="0" anchor="ctr"/>
-          <a:lstStyle/>
-          <a:p>
-            <a:pPr algn="ctr"/>
-          </a:p>
-        </p:txBody>
-      </p:sp>
-      <p:sp>
-        <p:nvSpPr>
-          <p:cNvPr id="15" name="TextBox 14"/>
-          <p:cNvSpPr txBox="1"/>
-          <p:nvPr/>
-        </p:nvSpPr>
-        <p:spPr>
-          <a:xfrm>
-            <a:off x="9418320" y="2633472"/>
-            <a:ext cx="2670048" cy="822960"/>
-          </a:xfrm>
-          <a:prstGeom prst="rect">
-            <a:avLst/>
-          </a:prstGeom>
-          <a:noFill/>
-        </p:spPr>
-        <p:txBody>
-          <a:bodyPr wrap="square" anchor="ctr" lIns="0" rIns="0" tIns="0" bIns="0">
-            <a:spAutoFit/>
-          </a:bodyPr>
-          <a:lstStyle/>
-          <a:p>
-            <a:r>
-              <a:rPr sz="4000" b="1">
-                <a:solidFill>
-                  <a:srgbClr val="F2B84B"/>
-                </a:solidFill>
-                <a:latin typeface="Arial"/>
-              </a:rPr>
-              <a:t>0.99</a:t>
-            </a:r>
-          </a:p>
-        </p:txBody>
-      </p:sp>
-      <p:sp>
-        <p:nvSpPr>
-          <p:cNvPr id="16" name="TextBox 15"/>
-          <p:cNvSpPr txBox="1"/>
-          <p:nvPr/>
-        </p:nvSpPr>
-        <p:spPr>
-          <a:xfrm>
-            <a:off x="9601200" y="3520440"/>
-            <a:ext cx="2304288" cy="731520"/>
-          </a:xfrm>
-          <a:prstGeom prst="rect">
-            <a:avLst/>
-          </a:prstGeom>
-          <a:noFill/>
-        </p:spPr>
-        <p:txBody>
-          <a:bodyPr wrap="square" anchor="t" lIns="0" rIns="0" tIns="0" bIns="0">
-            <a:spAutoFit/>
-          </a:bodyPr>
-          <a:lstStyle/>
-          <a:p>
-            <a:pPr>
-              <a:lnSpc>
-                <a:spcPct val="110000"/>
-              </a:lnSpc>
-            </a:pPr>
-            <a:r>
-              <a:rPr sz="1200" b="0">
-                <a:solidFill>
-                  <a:srgbClr val="93A8BC"/>
-                </a:solidFill>
-                <a:latin typeface="Arial"/>
-              </a:rPr>
-              <a:t>AUC de discriminación</a:t>
-            </a:r>
-          </a:p>
-        </p:txBody>
-      </p:sp>
-      <p:sp>
-        <p:nvSpPr>
-          <p:cNvPr id="17" name="TextBox 16"/>
-          <p:cNvSpPr txBox="1"/>
-          <p:nvPr/>
-        </p:nvSpPr>
-        <p:spPr>
-          <a:xfrm>
-            <a:off x="914400" y="4892040"/>
-            <a:ext cx="10332720" cy="1005840"/>
+          <p:cNvPr id="14" name="TextBox 13"/>
+          <p:cNvSpPr txBox="1"/>
+          <p:nvPr/>
+        </p:nvSpPr>
+        <p:spPr>
+          <a:xfrm>
+            <a:off x="640080" y="5989320"/>
+            <a:ext cx="10881360" cy="1463040"/>
           </a:xfrm>
           <a:prstGeom prst="rect">
             <a:avLst/>
@@ -8162,7 +9366,7 @@
             <a:r>
               <a:rPr sz="1400" b="0">
                 <a:solidFill>
-                  <a:srgbClr val="93A8BC"/>
+                  <a:srgbClr val="8AA0B2"/>
                 </a:solidFill>
                 <a:latin typeface="Arial"/>
               </a:rPr>
@@ -8173,13 +9377,13 @@
       </p:sp>
       <p:sp>
         <p:nvSpPr>
-          <p:cNvPr id="18" name="TextBox 17"/>
-          <p:cNvSpPr txBox="1"/>
-          <p:nvPr/>
-        </p:nvSpPr>
-        <p:spPr>
-          <a:xfrm>
-            <a:off x="914400" y="6446520"/>
+          <p:cNvPr id="15" name="TextBox 14"/>
+          <p:cNvSpPr txBox="1"/>
+          <p:nvPr/>
+        </p:nvSpPr>
+        <p:spPr>
+          <a:xfrm>
+            <a:off x="640080" y="6473952"/>
             <a:ext cx="7315200" cy="274320"/>
           </a:xfrm>
           <a:prstGeom prst="rect">
@@ -8196,7 +9400,7 @@
             <a:r>
               <a:rPr sz="900" b="0">
                 <a:solidFill>
-                  <a:srgbClr val="5A7288"/>
+                  <a:srgbClr val="8AA0B2"/>
                 </a:solidFill>
                 <a:latin typeface="Arial"/>
               </a:rPr>
@@ -8207,14 +9411,14 @@
       </p:sp>
       <p:sp>
         <p:nvSpPr>
-          <p:cNvPr id="19" name="TextBox 18"/>
-          <p:cNvSpPr txBox="1"/>
-          <p:nvPr/>
-        </p:nvSpPr>
-        <p:spPr>
-          <a:xfrm>
-            <a:off x="10607040" y="6446520"/>
-            <a:ext cx="822960" cy="274320"/>
+          <p:cNvPr id="16" name="TextBox 15"/>
+          <p:cNvSpPr txBox="1"/>
+          <p:nvPr/>
+        </p:nvSpPr>
+        <p:spPr>
+          <a:xfrm>
+            <a:off x="11155680" y="6473952"/>
+            <a:ext cx="548640" cy="274320"/>
           </a:xfrm>
           <a:prstGeom prst="rect">
             <a:avLst/>
@@ -8230,7 +9434,7 @@
             <a:r>
               <a:rPr sz="900" b="0">
                 <a:solidFill>
-                  <a:srgbClr val="5A7288"/>
+                  <a:srgbClr val="8AA0B2"/>
                 </a:solidFill>
                 <a:latin typeface="Arial"/>
               </a:rPr>
@@ -8272,7 +9476,7 @@
             <a:avLst/>
           </a:prstGeom>
           <a:solidFill>
-            <a:srgbClr val="050A10"/>
+            <a:srgbClr val="0D1B2A"/>
           </a:solidFill>
           <a:ln>
             <a:noFill/>
@@ -8309,8 +9513,8 @@
         </p:nvSpPr>
         <p:spPr>
           <a:xfrm>
-            <a:off x="914400" y="685800"/>
-            <a:ext cx="8229600" cy="365760"/>
+            <a:off x="640080" y="457200"/>
+            <a:ext cx="10881360" cy="274320"/>
           </a:xfrm>
           <a:prstGeom prst="rect">
             <a:avLst/>
@@ -8326,7 +9530,7 @@
             <a:r>
               <a:rPr sz="1200" b="1">
                 <a:solidFill>
-                  <a:srgbClr val="00C8B4"/>
+                  <a:srgbClr val="4FD8C4"/>
                 </a:solidFill>
                 <a:latin typeface="Arial"/>
               </a:rPr>
@@ -8343,8 +9547,8 @@
         </p:nvSpPr>
         <p:spPr>
           <a:xfrm>
-            <a:off x="914400" y="1234440"/>
-            <a:ext cx="10332720" cy="2194560"/>
+            <a:off x="640080" y="914400"/>
+            <a:ext cx="10881360" cy="1005840"/>
           </a:xfrm>
           <a:prstGeom prst="rect">
             <a:avLst/>
@@ -8359,13 +9563,13 @@
           <a:p>
             <a:pPr>
               <a:lnSpc>
-                <a:spcPct val="104000"/>
+                <a:spcPct val="102000"/>
               </a:lnSpc>
             </a:pPr>
             <a:r>
-              <a:rPr sz="4000" b="1">
-                <a:solidFill>
-                  <a:srgbClr val="F2F6F8"/>
+              <a:rPr sz="3400" b="1">
+                <a:solidFill>
+                  <a:srgbClr val="EAF2F5"/>
                 </a:solidFill>
                 <a:latin typeface="Arial"/>
               </a:rPr>
@@ -8382,25 +9586,19 @@
         </p:nvSpPr>
         <p:spPr>
           <a:xfrm>
-            <a:off x="914400" y="2834640"/>
-            <a:ext cx="3429000" cy="2377440"/>
+            <a:off x="640080" y="4023360"/>
+            <a:ext cx="3474720" cy="1737360"/>
           </a:xfrm>
           <a:prstGeom prst="roundRect">
             <a:avLst>
-              <a:gd name="adj" fmla="val 10000"/>
+              <a:gd name="adj" fmla="val 6000"/>
             </a:avLst>
           </a:prstGeom>
           <a:solidFill>
-            <a:srgbClr val="00C8B4">
-              <a:alpha val="12000"/>
-            </a:srgbClr>
+            <a:srgbClr val="101F30"/>
           </a:solidFill>
-          <a:ln w="12700">
-            <a:solidFill>
-              <a:srgbClr val="00C8B4">
-                <a:alpha val="30000"/>
-              </a:srgbClr>
-            </a:solidFill>
+          <a:ln>
+            <a:noFill/>
           </a:ln>
           <a:effectLst/>
         </p:spPr>
@@ -8428,104 +9626,23 @@
       </p:sp>
       <p:sp>
         <p:nvSpPr>
-          <p:cNvPr id="6" name="TextBox 5"/>
-          <p:cNvSpPr txBox="1"/>
-          <p:nvPr/>
-        </p:nvSpPr>
-        <p:spPr>
-          <a:xfrm>
-            <a:off x="1225296" y="3127248"/>
-            <a:ext cx="2807208" cy="457200"/>
-          </a:xfrm>
-          <a:prstGeom prst="rect">
-            <a:avLst/>
-          </a:prstGeom>
-          <a:noFill/>
-        </p:spPr>
-        <p:txBody>
-          <a:bodyPr wrap="square" anchor="t" lIns="0" rIns="0" tIns="0" bIns="0">
-            <a:spAutoFit/>
-          </a:bodyPr>
-          <a:lstStyle/>
-          <a:p>
-            <a:r>
-              <a:rPr sz="1600" b="1">
-                <a:solidFill>
-                  <a:srgbClr val="F2F6F8"/>
-                </a:solidFill>
-                <a:latin typeface="Arial"/>
-              </a:rPr>
-              <a:t>Wearables en auge</a:t>
-            </a:r>
-          </a:p>
-        </p:txBody>
-      </p:sp>
-      <p:sp>
-        <p:nvSpPr>
-          <p:cNvPr id="7" name="TextBox 6"/>
-          <p:cNvSpPr txBox="1"/>
-          <p:nvPr/>
-        </p:nvSpPr>
-        <p:spPr>
-          <a:xfrm>
-            <a:off x="1225296" y="3675888"/>
-            <a:ext cx="2807208" cy="1371600"/>
-          </a:xfrm>
-          <a:prstGeom prst="rect">
-            <a:avLst/>
-          </a:prstGeom>
-          <a:noFill/>
-        </p:spPr>
-        <p:txBody>
-          <a:bodyPr wrap="square" anchor="t" lIns="0" rIns="0" tIns="0" bIns="0">
-            <a:spAutoFit/>
-          </a:bodyPr>
-          <a:lstStyle/>
-          <a:p>
-            <a:pPr>
-              <a:lnSpc>
-                <a:spcPct val="118000"/>
-              </a:lnSpc>
-            </a:pPr>
-            <a:r>
-              <a:rPr sz="1300" b="0">
-                <a:solidFill>
-                  <a:srgbClr val="93A8BC"/>
-                </a:solidFill>
-                <a:latin typeface="Arial"/>
-              </a:rPr>
-              <a:t>Más relojes en muñecas; la demanda de 'más que pasos' crece.</a:t>
-            </a:r>
-          </a:p>
-        </p:txBody>
-      </p:sp>
-      <p:sp>
-        <p:nvSpPr>
-          <p:cNvPr id="8" name="Rounded Rectangle 7"/>
+          <p:cNvPr id="6" name="Oval 5"/>
           <p:cNvSpPr/>
           <p:nvPr/>
         </p:nvSpPr>
         <p:spPr>
           <a:xfrm>
-            <a:off x="4526280" y="2834640"/>
-            <a:ext cx="3429000" cy="2377440"/>
-          </a:xfrm>
-          <a:prstGeom prst="roundRect">
-            <a:avLst>
-              <a:gd name="adj" fmla="val 10000"/>
-            </a:avLst>
+            <a:off x="914400" y="4297680"/>
+            <a:ext cx="457200" cy="457200"/>
+          </a:xfrm>
+          <a:prstGeom prst="ellipse">
+            <a:avLst/>
           </a:prstGeom>
           <a:solidFill>
-            <a:srgbClr val="7C84F8">
-              <a:alpha val="12000"/>
-            </a:srgbClr>
+            <a:srgbClr val="4FD8C4"/>
           </a:solidFill>
-          <a:ln w="12700">
-            <a:solidFill>
-              <a:srgbClr val="7C84F8">
-                <a:alpha val="30000"/>
-              </a:srgbClr>
-            </a:solidFill>
+          <a:ln>
+            <a:noFill/>
           </a:ln>
           <a:effectLst/>
         </p:spPr>
@@ -8553,14 +9670,14 @@
       </p:sp>
       <p:sp>
         <p:nvSpPr>
-          <p:cNvPr id="9" name="TextBox 8"/>
-          <p:cNvSpPr txBox="1"/>
-          <p:nvPr/>
-        </p:nvSpPr>
-        <p:spPr>
-          <a:xfrm>
-            <a:off x="4837176" y="3127248"/>
-            <a:ext cx="2807208" cy="457200"/>
+          <p:cNvPr id="7" name="TextBox 6"/>
+          <p:cNvSpPr txBox="1"/>
+          <p:nvPr/>
+        </p:nvSpPr>
+        <p:spPr>
+          <a:xfrm>
+            <a:off x="1508760" y="4251960"/>
+            <a:ext cx="2468879" cy="548640"/>
           </a:xfrm>
           <a:prstGeom prst="rect">
             <a:avLst/>
@@ -8576,25 +9693,25 @@
             <a:r>
               <a:rPr sz="1600" b="1">
                 <a:solidFill>
-                  <a:srgbClr val="F2F6F8"/>
-                </a:solidFill>
-                <a:latin typeface="Arial"/>
-              </a:rPr>
-              <a:t>Población que envejece</a:t>
-            </a:r>
-          </a:p>
-        </p:txBody>
-      </p:sp>
-      <p:sp>
-        <p:nvSpPr>
-          <p:cNvPr id="10" name="TextBox 9"/>
-          <p:cNvSpPr txBox="1"/>
-          <p:nvPr/>
-        </p:nvSpPr>
-        <p:spPr>
-          <a:xfrm>
-            <a:off x="4837176" y="3675888"/>
-            <a:ext cx="2807208" cy="1371600"/>
+                  <a:srgbClr val="EAF2F5"/>
+                </a:solidFill>
+                <a:latin typeface="Arial"/>
+              </a:rPr>
+              <a:t>Wearables en auge</a:t>
+            </a:r>
+          </a:p>
+        </p:txBody>
+      </p:sp>
+      <p:sp>
+        <p:nvSpPr>
+          <p:cNvPr id="8" name="TextBox 7"/>
+          <p:cNvSpPr txBox="1"/>
+          <p:nvPr/>
+        </p:nvSpPr>
+        <p:spPr>
+          <a:xfrm>
+            <a:off x="914400" y="4937760"/>
+            <a:ext cx="2926079" cy="731519"/>
           </a:xfrm>
           <a:prstGeom prst="rect">
             <a:avLst/>
@@ -8609,48 +9726,42 @@
           <a:p>
             <a:pPr>
               <a:lnSpc>
-                <a:spcPct val="118000"/>
+                <a:spcPct val="115000"/>
               </a:lnSpc>
             </a:pPr>
             <a:r>
               <a:rPr sz="1300" b="0">
                 <a:solidFill>
-                  <a:srgbClr val="93A8BC"/>
-                </a:solidFill>
-                <a:latin typeface="Arial"/>
-              </a:rPr>
-              <a:t>Más adultos mayores; caídas e infecciones prevenibles sin detectar.</a:t>
-            </a:r>
-          </a:p>
-        </p:txBody>
-      </p:sp>
-      <p:sp>
-        <p:nvSpPr>
-          <p:cNvPr id="11" name="Rounded Rectangle 10"/>
+                  <a:srgbClr val="8AA0B2"/>
+                </a:solidFill>
+                <a:latin typeface="Arial"/>
+              </a:rPr>
+              <a:t>Más relojes en muñecas; la demanda de 'más que pasos' crece.</a:t>
+            </a:r>
+          </a:p>
+        </p:txBody>
+      </p:sp>
+      <p:sp>
+        <p:nvSpPr>
+          <p:cNvPr id="9" name="Rounded Rectangle 8"/>
           <p:cNvSpPr/>
           <p:nvPr/>
         </p:nvSpPr>
         <p:spPr>
           <a:xfrm>
-            <a:off x="8138160" y="2834640"/>
-            <a:ext cx="3108960" cy="2377440"/>
+            <a:off x="4480560" y="4023360"/>
+            <a:ext cx="3474720" cy="1737360"/>
           </a:xfrm>
           <a:prstGeom prst="roundRect">
             <a:avLst>
-              <a:gd name="adj" fmla="val 10000"/>
+              <a:gd name="adj" fmla="val 6000"/>
             </a:avLst>
           </a:prstGeom>
           <a:solidFill>
-            <a:srgbClr val="F2B84B">
-              <a:alpha val="12000"/>
-            </a:srgbClr>
+            <a:srgbClr val="101F30"/>
           </a:solidFill>
-          <a:ln w="12700">
-            <a:solidFill>
-              <a:srgbClr val="F2B84B">
-                <a:alpha val="30000"/>
-              </a:srgbClr>
-            </a:solidFill>
+          <a:ln>
+            <a:noFill/>
           </a:ln>
           <a:effectLst/>
         </p:spPr>
@@ -8678,48 +9789,92 @@
       </p:sp>
       <p:sp>
         <p:nvSpPr>
+          <p:cNvPr id="10" name="Oval 9"/>
+          <p:cNvSpPr/>
+          <p:nvPr/>
+        </p:nvSpPr>
+        <p:spPr>
+          <a:xfrm>
+            <a:off x="4754880" y="4297680"/>
+            <a:ext cx="457200" cy="457200"/>
+          </a:xfrm>
+          <a:prstGeom prst="ellipse">
+            <a:avLst/>
+          </a:prstGeom>
+          <a:solidFill>
+            <a:srgbClr val="9BA8F2"/>
+          </a:solidFill>
+          <a:ln>
+            <a:noFill/>
+          </a:ln>
+          <a:effectLst/>
+        </p:spPr>
+        <p:style>
+          <a:lnRef idx="1">
+            <a:schemeClr val="accent1"/>
+          </a:lnRef>
+          <a:fillRef idx="3">
+            <a:schemeClr val="accent1"/>
+          </a:fillRef>
+          <a:effectRef idx="2">
+            <a:schemeClr val="accent1"/>
+          </a:effectRef>
+          <a:fontRef idx="minor">
+            <a:schemeClr val="lt1"/>
+          </a:fontRef>
+        </p:style>
+        <p:txBody>
+          <a:bodyPr rtlCol="0" anchor="ctr"/>
+          <a:lstStyle/>
+          <a:p>
+            <a:pPr algn="ctr"/>
+          </a:p>
+        </p:txBody>
+      </p:sp>
+      <p:sp>
+        <p:nvSpPr>
+          <p:cNvPr id="11" name="TextBox 10"/>
+          <p:cNvSpPr txBox="1"/>
+          <p:nvPr/>
+        </p:nvSpPr>
+        <p:spPr>
+          <a:xfrm>
+            <a:off x="5349240" y="4251960"/>
+            <a:ext cx="2468879" cy="548640"/>
+          </a:xfrm>
+          <a:prstGeom prst="rect">
+            <a:avLst/>
+          </a:prstGeom>
+          <a:noFill/>
+        </p:spPr>
+        <p:txBody>
+          <a:bodyPr wrap="square" anchor="t" lIns="0" rIns="0" tIns="0" bIns="0">
+            <a:spAutoFit/>
+          </a:bodyPr>
+          <a:lstStyle/>
+          <a:p>
+            <a:r>
+              <a:rPr sz="1600" b="1">
+                <a:solidFill>
+                  <a:srgbClr val="EAF2F5"/>
+                </a:solidFill>
+                <a:latin typeface="Arial"/>
+              </a:rPr>
+              <a:t>Población que envejece</a:t>
+            </a:r>
+          </a:p>
+        </p:txBody>
+      </p:sp>
+      <p:sp>
+        <p:nvSpPr>
           <p:cNvPr id="12" name="TextBox 11"/>
           <p:cNvSpPr txBox="1"/>
           <p:nvPr/>
         </p:nvSpPr>
         <p:spPr>
           <a:xfrm>
-            <a:off x="8449056" y="3127248"/>
-            <a:ext cx="2487168" cy="457200"/>
-          </a:xfrm>
-          <a:prstGeom prst="rect">
-            <a:avLst/>
-          </a:prstGeom>
-          <a:noFill/>
-        </p:spPr>
-        <p:txBody>
-          <a:bodyPr wrap="square" anchor="t" lIns="0" rIns="0" tIns="0" bIns="0">
-            <a:spAutoFit/>
-          </a:bodyPr>
-          <a:lstStyle/>
-          <a:p>
-            <a:r>
-              <a:rPr sz="1600" b="1">
-                <a:solidFill>
-                  <a:srgbClr val="F2F6F8"/>
-                </a:solidFill>
-                <a:latin typeface="Arial"/>
-              </a:rPr>
-              <a:t>El cuello de botella</a:t>
-            </a:r>
-          </a:p>
-        </p:txBody>
-      </p:sp>
-      <p:sp>
-        <p:nvSpPr>
-          <p:cNvPr id="13" name="TextBox 12"/>
-          <p:cNvSpPr txBox="1"/>
-          <p:nvPr/>
-        </p:nvSpPr>
-        <p:spPr>
-          <a:xfrm>
-            <a:off x="8449056" y="3675888"/>
-            <a:ext cx="2487168" cy="1371600"/>
+            <a:off x="4754880" y="4937760"/>
+            <a:ext cx="2926079" cy="731519"/>
           </a:xfrm>
           <a:prstGeom prst="rect">
             <a:avLst/>
@@ -8734,13 +9889,176 @@
           <a:p>
             <a:pPr>
               <a:lnSpc>
-                <a:spcPct val="118000"/>
+                <a:spcPct val="115000"/>
               </a:lnSpc>
             </a:pPr>
             <a:r>
               <a:rPr sz="1300" b="0">
                 <a:solidFill>
-                  <a:srgbClr val="93A8BC"/>
+                  <a:srgbClr val="8AA0B2"/>
+                </a:solidFill>
+                <a:latin typeface="Arial"/>
+              </a:rPr>
+              <a:t>Más adultos mayores; caídas e infecciones prevenibles sin detectar.</a:t>
+            </a:r>
+          </a:p>
+        </p:txBody>
+      </p:sp>
+      <p:sp>
+        <p:nvSpPr>
+          <p:cNvPr id="13" name="Rounded Rectangle 12"/>
+          <p:cNvSpPr/>
+          <p:nvPr/>
+        </p:nvSpPr>
+        <p:spPr>
+          <a:xfrm>
+            <a:off x="8321040" y="4023360"/>
+            <a:ext cx="3474720" cy="1737360"/>
+          </a:xfrm>
+          <a:prstGeom prst="roundRect">
+            <a:avLst>
+              <a:gd name="adj" fmla="val 6000"/>
+            </a:avLst>
+          </a:prstGeom>
+          <a:solidFill>
+            <a:srgbClr val="101F30"/>
+          </a:solidFill>
+          <a:ln>
+            <a:noFill/>
+          </a:ln>
+          <a:effectLst/>
+        </p:spPr>
+        <p:style>
+          <a:lnRef idx="1">
+            <a:schemeClr val="accent1"/>
+          </a:lnRef>
+          <a:fillRef idx="3">
+            <a:schemeClr val="accent1"/>
+          </a:fillRef>
+          <a:effectRef idx="2">
+            <a:schemeClr val="accent1"/>
+          </a:effectRef>
+          <a:fontRef idx="minor">
+            <a:schemeClr val="lt1"/>
+          </a:fontRef>
+        </p:style>
+        <p:txBody>
+          <a:bodyPr rtlCol="0" anchor="ctr"/>
+          <a:lstStyle/>
+          <a:p>
+            <a:pPr algn="ctr"/>
+          </a:p>
+        </p:txBody>
+      </p:sp>
+      <p:sp>
+        <p:nvSpPr>
+          <p:cNvPr id="14" name="Oval 13"/>
+          <p:cNvSpPr/>
+          <p:nvPr/>
+        </p:nvSpPr>
+        <p:spPr>
+          <a:xfrm>
+            <a:off x="8595360" y="4297680"/>
+            <a:ext cx="457200" cy="457200"/>
+          </a:xfrm>
+          <a:prstGeom prst="ellipse">
+            <a:avLst/>
+          </a:prstGeom>
+          <a:solidFill>
+            <a:srgbClr val="F2B84B"/>
+          </a:solidFill>
+          <a:ln>
+            <a:noFill/>
+          </a:ln>
+          <a:effectLst/>
+        </p:spPr>
+        <p:style>
+          <a:lnRef idx="1">
+            <a:schemeClr val="accent1"/>
+          </a:lnRef>
+          <a:fillRef idx="3">
+            <a:schemeClr val="accent1"/>
+          </a:fillRef>
+          <a:effectRef idx="2">
+            <a:schemeClr val="accent1"/>
+          </a:effectRef>
+          <a:fontRef idx="minor">
+            <a:schemeClr val="lt1"/>
+          </a:fontRef>
+        </p:style>
+        <p:txBody>
+          <a:bodyPr rtlCol="0" anchor="ctr"/>
+          <a:lstStyle/>
+          <a:p>
+            <a:pPr algn="ctr"/>
+          </a:p>
+        </p:txBody>
+      </p:sp>
+      <p:sp>
+        <p:nvSpPr>
+          <p:cNvPr id="15" name="TextBox 14"/>
+          <p:cNvSpPr txBox="1"/>
+          <p:nvPr/>
+        </p:nvSpPr>
+        <p:spPr>
+          <a:xfrm>
+            <a:off x="9189719" y="4251960"/>
+            <a:ext cx="2468879" cy="548640"/>
+          </a:xfrm>
+          <a:prstGeom prst="rect">
+            <a:avLst/>
+          </a:prstGeom>
+          <a:noFill/>
+        </p:spPr>
+        <p:txBody>
+          <a:bodyPr wrap="square" anchor="t" lIns="0" rIns="0" tIns="0" bIns="0">
+            <a:spAutoFit/>
+          </a:bodyPr>
+          <a:lstStyle/>
+          <a:p>
+            <a:r>
+              <a:rPr sz="1600" b="1">
+                <a:solidFill>
+                  <a:srgbClr val="EAF2F5"/>
+                </a:solidFill>
+                <a:latin typeface="Arial"/>
+              </a:rPr>
+              <a:t>El cuello de botella</a:t>
+            </a:r>
+          </a:p>
+        </p:txBody>
+      </p:sp>
+      <p:sp>
+        <p:nvSpPr>
+          <p:cNvPr id="16" name="TextBox 15"/>
+          <p:cNvSpPr txBox="1"/>
+          <p:nvPr/>
+        </p:nvSpPr>
+        <p:spPr>
+          <a:xfrm>
+            <a:off x="8595360" y="4937760"/>
+            <a:ext cx="2926079" cy="731519"/>
+          </a:xfrm>
+          <a:prstGeom prst="rect">
+            <a:avLst/>
+          </a:prstGeom>
+          <a:noFill/>
+        </p:spPr>
+        <p:txBody>
+          <a:bodyPr wrap="square" anchor="t" lIns="0" rIns="0" tIns="0" bIns="0">
+            <a:spAutoFit/>
+          </a:bodyPr>
+          <a:lstStyle/>
+          <a:p>
+            <a:pPr>
+              <a:lnSpc>
+                <a:spcPct val="115000"/>
+              </a:lnSpc>
+            </a:pPr>
+            <a:r>
+              <a:rPr sz="1300" b="0">
+                <a:solidFill>
+                  <a:srgbClr val="8AA0B2"/>
                 </a:solidFill>
                 <a:latin typeface="Arial"/>
               </a:rPr>
@@ -8751,13 +10069,13 @@
       </p:sp>
       <p:sp>
         <p:nvSpPr>
-          <p:cNvPr id="14" name="TextBox 13"/>
-          <p:cNvSpPr txBox="1"/>
-          <p:nvPr/>
-        </p:nvSpPr>
-        <p:spPr>
-          <a:xfrm>
-            <a:off x="914400" y="6446520"/>
+          <p:cNvPr id="17" name="TextBox 16"/>
+          <p:cNvSpPr txBox="1"/>
+          <p:nvPr/>
+        </p:nvSpPr>
+        <p:spPr>
+          <a:xfrm>
+            <a:off x="640080" y="6473952"/>
             <a:ext cx="7315200" cy="274320"/>
           </a:xfrm>
           <a:prstGeom prst="rect">
@@ -8774,7 +10092,7 @@
             <a:r>
               <a:rPr sz="900" b="0">
                 <a:solidFill>
-                  <a:srgbClr val="5A7288"/>
+                  <a:srgbClr val="8AA0B2"/>
                 </a:solidFill>
                 <a:latin typeface="Arial"/>
               </a:rPr>
@@ -8785,14 +10103,14 @@
       </p:sp>
       <p:sp>
         <p:nvSpPr>
-          <p:cNvPr id="15" name="TextBox 14"/>
-          <p:cNvSpPr txBox="1"/>
-          <p:nvPr/>
-        </p:nvSpPr>
-        <p:spPr>
-          <a:xfrm>
-            <a:off x="10607040" y="6446520"/>
-            <a:ext cx="822960" cy="274320"/>
+          <p:cNvPr id="18" name="TextBox 17"/>
+          <p:cNvSpPr txBox="1"/>
+          <p:nvPr/>
+        </p:nvSpPr>
+        <p:spPr>
+          <a:xfrm>
+            <a:off x="11155680" y="6473952"/>
+            <a:ext cx="548640" cy="274320"/>
           </a:xfrm>
           <a:prstGeom prst="rect">
             <a:avLst/>
@@ -8808,7 +10126,7 @@
             <a:r>
               <a:rPr sz="900" b="0">
                 <a:solidFill>
-                  <a:srgbClr val="5A7288"/>
+                  <a:srgbClr val="8AA0B2"/>
                 </a:solidFill>
                 <a:latin typeface="Arial"/>
               </a:rPr>
